--- a/LB2.pptx
+++ b/LB2.pptx
@@ -9,6 +9,7 @@
     <p:sldId id="257" r:id="rId3"/>
     <p:sldId id="258" r:id="rId4"/>
     <p:sldId id="259" r:id="rId5"/>
+    <p:sldId id="260" r:id="rId6"/>
   </p:sldIdLst>
   <p:sldSz cx="12192000" cy="6858000"/>
   <p:notesSz cx="6858000" cy="9144000"/>
@@ -108,6 +109,3206 @@
     </a:lvl9pPr>
   </p:defaultTextStyle>
 </p:presentation>
+</file>
+
+<file path=ppt/diagrams/colors1.xml><?xml version="1.0" encoding="utf-8"?>
+<dgm:colorsDef xmlns:dgm="http://schemas.openxmlformats.org/drawingml/2006/diagram" xmlns:a="http://schemas.openxmlformats.org/drawingml/2006/main" uniqueId="urn:microsoft.com/office/officeart/2005/8/colors/accent0_3">
+  <dgm:title val=""/>
+  <dgm:desc val=""/>
+  <dgm:catLst>
+    <dgm:cat type="mainScheme" pri="10300"/>
+  </dgm:catLst>
+  <dgm:styleLbl name="node0">
+    <dgm:fillClrLst meth="repeat">
+      <a:schemeClr val="dk2"/>
+    </dgm:fillClrLst>
+    <dgm:linClrLst meth="repeat">
+      <a:schemeClr val="lt2"/>
+    </dgm:linClrLst>
+    <dgm:effectClrLst/>
+    <dgm:txLinClrLst/>
+    <dgm:txFillClrLst/>
+    <dgm:txEffectClrLst/>
+  </dgm:styleLbl>
+  <dgm:styleLbl name="alignNode1">
+    <dgm:fillClrLst meth="repeat">
+      <a:schemeClr val="dk2"/>
+    </dgm:fillClrLst>
+    <dgm:linClrLst meth="repeat">
+      <a:schemeClr val="dk2"/>
+    </dgm:linClrLst>
+    <dgm:effectClrLst/>
+    <dgm:txLinClrLst/>
+    <dgm:txFillClrLst/>
+    <dgm:txEffectClrLst/>
+  </dgm:styleLbl>
+  <dgm:styleLbl name="node1">
+    <dgm:fillClrLst meth="repeat">
+      <a:schemeClr val="dk2"/>
+    </dgm:fillClrLst>
+    <dgm:linClrLst meth="repeat">
+      <a:schemeClr val="lt2"/>
+    </dgm:linClrLst>
+    <dgm:effectClrLst/>
+    <dgm:txLinClrLst/>
+    <dgm:txFillClrLst/>
+    <dgm:txEffectClrLst/>
+  </dgm:styleLbl>
+  <dgm:styleLbl name="lnNode1">
+    <dgm:fillClrLst meth="repeat">
+      <a:schemeClr val="dk2"/>
+    </dgm:fillClrLst>
+    <dgm:linClrLst meth="repeat">
+      <a:schemeClr val="lt2"/>
+    </dgm:linClrLst>
+    <dgm:effectClrLst/>
+    <dgm:txLinClrLst/>
+    <dgm:txFillClrLst/>
+    <dgm:txEffectClrLst/>
+  </dgm:styleLbl>
+  <dgm:styleLbl name="vennNode1">
+    <dgm:fillClrLst meth="repeat">
+      <a:schemeClr val="dk2">
+        <a:alpha val="50000"/>
+      </a:schemeClr>
+    </dgm:fillClrLst>
+    <dgm:linClrLst meth="repeat">
+      <a:schemeClr val="lt2"/>
+    </dgm:linClrLst>
+    <dgm:effectClrLst/>
+    <dgm:txLinClrLst/>
+    <dgm:txFillClrLst/>
+    <dgm:txEffectClrLst/>
+  </dgm:styleLbl>
+  <dgm:styleLbl name="node2">
+    <dgm:fillClrLst meth="repeat">
+      <a:schemeClr val="dk2"/>
+    </dgm:fillClrLst>
+    <dgm:linClrLst meth="repeat">
+      <a:schemeClr val="lt2"/>
+    </dgm:linClrLst>
+    <dgm:effectClrLst/>
+    <dgm:txLinClrLst/>
+    <dgm:txFillClrLst/>
+    <dgm:txEffectClrLst/>
+  </dgm:styleLbl>
+  <dgm:styleLbl name="node3">
+    <dgm:fillClrLst meth="repeat">
+      <a:schemeClr val="dk2"/>
+    </dgm:fillClrLst>
+    <dgm:linClrLst meth="repeat">
+      <a:schemeClr val="lt2"/>
+    </dgm:linClrLst>
+    <dgm:effectClrLst/>
+    <dgm:txLinClrLst/>
+    <dgm:txFillClrLst/>
+    <dgm:txEffectClrLst/>
+  </dgm:styleLbl>
+  <dgm:styleLbl name="node4">
+    <dgm:fillClrLst meth="repeat">
+      <a:schemeClr val="dk2"/>
+    </dgm:fillClrLst>
+    <dgm:linClrLst meth="repeat">
+      <a:schemeClr val="lt2"/>
+    </dgm:linClrLst>
+    <dgm:effectClrLst/>
+    <dgm:txLinClrLst/>
+    <dgm:txFillClrLst/>
+    <dgm:txEffectClrLst/>
+  </dgm:styleLbl>
+  <dgm:styleLbl name="fgImgPlace1">
+    <dgm:fillClrLst meth="repeat">
+      <a:schemeClr val="dk2">
+        <a:tint val="50000"/>
+      </a:schemeClr>
+    </dgm:fillClrLst>
+    <dgm:linClrLst meth="repeat">
+      <a:schemeClr val="lt2"/>
+    </dgm:linClrLst>
+    <dgm:effectClrLst/>
+    <dgm:txLinClrLst/>
+    <dgm:txFillClrLst meth="repeat">
+      <a:schemeClr val="lt2"/>
+    </dgm:txFillClrLst>
+    <dgm:txEffectClrLst/>
+  </dgm:styleLbl>
+  <dgm:styleLbl name="alignImgPlace1">
+    <dgm:fillClrLst meth="repeat">
+      <a:schemeClr val="dk2">
+        <a:tint val="50000"/>
+      </a:schemeClr>
+    </dgm:fillClrLst>
+    <dgm:linClrLst meth="repeat">
+      <a:schemeClr val="dk2">
+        <a:shade val="80000"/>
+      </a:schemeClr>
+    </dgm:linClrLst>
+    <dgm:effectClrLst/>
+    <dgm:txLinClrLst/>
+    <dgm:txFillClrLst meth="repeat">
+      <a:schemeClr val="lt2"/>
+    </dgm:txFillClrLst>
+    <dgm:txEffectClrLst/>
+  </dgm:styleLbl>
+  <dgm:styleLbl name="bgImgPlace1">
+    <dgm:fillClrLst meth="repeat">
+      <a:schemeClr val="dk2">
+        <a:tint val="50000"/>
+      </a:schemeClr>
+    </dgm:fillClrLst>
+    <dgm:linClrLst meth="repeat">
+      <a:schemeClr val="dk2">
+        <a:shade val="80000"/>
+      </a:schemeClr>
+    </dgm:linClrLst>
+    <dgm:effectClrLst/>
+    <dgm:txLinClrLst/>
+    <dgm:txFillClrLst meth="repeat">
+      <a:schemeClr val="lt2"/>
+    </dgm:txFillClrLst>
+    <dgm:txEffectClrLst/>
+  </dgm:styleLbl>
+  <dgm:styleLbl name="sibTrans2D1">
+    <dgm:fillClrLst meth="repeat">
+      <a:schemeClr val="dk2">
+        <a:tint val="60000"/>
+      </a:schemeClr>
+    </dgm:fillClrLst>
+    <dgm:linClrLst meth="repeat">
+      <a:schemeClr val="dk2">
+        <a:tint val="60000"/>
+      </a:schemeClr>
+    </dgm:linClrLst>
+    <dgm:effectClrLst/>
+    <dgm:txLinClrLst/>
+    <dgm:txFillClrLst/>
+    <dgm:txEffectClrLst/>
+  </dgm:styleLbl>
+  <dgm:styleLbl name="fgSibTrans2D1">
+    <dgm:fillClrLst meth="repeat">
+      <a:schemeClr val="dk2">
+        <a:tint val="60000"/>
+      </a:schemeClr>
+    </dgm:fillClrLst>
+    <dgm:linClrLst meth="repeat">
+      <a:schemeClr val="dk2">
+        <a:tint val="60000"/>
+      </a:schemeClr>
+    </dgm:linClrLst>
+    <dgm:effectClrLst/>
+    <dgm:txLinClrLst/>
+    <dgm:txFillClrLst/>
+    <dgm:txEffectClrLst/>
+  </dgm:styleLbl>
+  <dgm:styleLbl name="bgSibTrans2D1">
+    <dgm:fillClrLst meth="repeat">
+      <a:schemeClr val="dk2">
+        <a:tint val="60000"/>
+      </a:schemeClr>
+    </dgm:fillClrLst>
+    <dgm:linClrLst meth="repeat">
+      <a:schemeClr val="dk2">
+        <a:tint val="60000"/>
+      </a:schemeClr>
+    </dgm:linClrLst>
+    <dgm:effectClrLst/>
+    <dgm:txLinClrLst/>
+    <dgm:txFillClrLst/>
+    <dgm:txEffectClrLst/>
+  </dgm:styleLbl>
+  <dgm:styleLbl name="sibTrans1D1">
+    <dgm:fillClrLst meth="repeat">
+      <a:schemeClr val="dk2"/>
+    </dgm:fillClrLst>
+    <dgm:linClrLst meth="repeat">
+      <a:schemeClr val="dk2"/>
+    </dgm:linClrLst>
+    <dgm:effectClrLst/>
+    <dgm:txLinClrLst/>
+    <dgm:txFillClrLst meth="repeat">
+      <a:schemeClr val="lt2"/>
+    </dgm:txFillClrLst>
+    <dgm:txEffectClrLst/>
+  </dgm:styleLbl>
+  <dgm:styleLbl name="callout">
+    <dgm:fillClrLst meth="repeat">
+      <a:schemeClr val="dk2"/>
+    </dgm:fillClrLst>
+    <dgm:linClrLst meth="repeat">
+      <a:schemeClr val="dk2">
+        <a:tint val="50000"/>
+      </a:schemeClr>
+    </dgm:linClrLst>
+    <dgm:effectClrLst/>
+    <dgm:txLinClrLst/>
+    <dgm:txFillClrLst meth="repeat">
+      <a:schemeClr val="lt2"/>
+    </dgm:txFillClrLst>
+    <dgm:txEffectClrLst/>
+  </dgm:styleLbl>
+  <dgm:styleLbl name="asst0">
+    <dgm:fillClrLst meth="repeat">
+      <a:schemeClr val="dk2"/>
+    </dgm:fillClrLst>
+    <dgm:linClrLst meth="repeat">
+      <a:schemeClr val="lt2"/>
+    </dgm:linClrLst>
+    <dgm:effectClrLst/>
+    <dgm:txLinClrLst/>
+    <dgm:txFillClrLst/>
+    <dgm:txEffectClrLst/>
+  </dgm:styleLbl>
+  <dgm:styleLbl name="asst1">
+    <dgm:fillClrLst meth="repeat">
+      <a:schemeClr val="dk2"/>
+    </dgm:fillClrLst>
+    <dgm:linClrLst meth="repeat">
+      <a:schemeClr val="lt2"/>
+    </dgm:linClrLst>
+    <dgm:effectClrLst/>
+    <dgm:txLinClrLst/>
+    <dgm:txFillClrLst/>
+    <dgm:txEffectClrLst/>
+  </dgm:styleLbl>
+  <dgm:styleLbl name="asst2">
+    <dgm:fillClrLst meth="repeat">
+      <a:schemeClr val="dk2"/>
+    </dgm:fillClrLst>
+    <dgm:linClrLst meth="repeat">
+      <a:schemeClr val="lt2"/>
+    </dgm:linClrLst>
+    <dgm:effectClrLst/>
+    <dgm:txLinClrLst/>
+    <dgm:txFillClrLst/>
+    <dgm:txEffectClrLst/>
+  </dgm:styleLbl>
+  <dgm:styleLbl name="asst3">
+    <dgm:fillClrLst meth="repeat">
+      <a:schemeClr val="dk2"/>
+    </dgm:fillClrLst>
+    <dgm:linClrLst meth="repeat">
+      <a:schemeClr val="lt2"/>
+    </dgm:linClrLst>
+    <dgm:effectClrLst/>
+    <dgm:txLinClrLst/>
+    <dgm:txFillClrLst/>
+    <dgm:txEffectClrLst/>
+  </dgm:styleLbl>
+  <dgm:styleLbl name="asst4">
+    <dgm:fillClrLst meth="repeat">
+      <a:schemeClr val="dk2"/>
+    </dgm:fillClrLst>
+    <dgm:linClrLst meth="repeat">
+      <a:schemeClr val="lt2"/>
+    </dgm:linClrLst>
+    <dgm:effectClrLst/>
+    <dgm:txLinClrLst/>
+    <dgm:txFillClrLst/>
+    <dgm:txEffectClrLst/>
+  </dgm:styleLbl>
+  <dgm:styleLbl name="parChTrans2D1">
+    <dgm:fillClrLst meth="repeat">
+      <a:schemeClr val="dk2">
+        <a:tint val="60000"/>
+      </a:schemeClr>
+    </dgm:fillClrLst>
+    <dgm:linClrLst meth="repeat">
+      <a:schemeClr val="dk2">
+        <a:tint val="60000"/>
+      </a:schemeClr>
+    </dgm:linClrLst>
+    <dgm:effectClrLst/>
+    <dgm:txLinClrLst/>
+    <dgm:txFillClrLst meth="repeat">
+      <a:schemeClr val="lt2"/>
+    </dgm:txFillClrLst>
+    <dgm:txEffectClrLst/>
+  </dgm:styleLbl>
+  <dgm:styleLbl name="parChTrans2D2">
+    <dgm:fillClrLst meth="repeat">
+      <a:schemeClr val="dk2"/>
+    </dgm:fillClrLst>
+    <dgm:linClrLst meth="repeat">
+      <a:schemeClr val="dk2"/>
+    </dgm:linClrLst>
+    <dgm:effectClrLst/>
+    <dgm:txLinClrLst/>
+    <dgm:txFillClrLst meth="repeat">
+      <a:schemeClr val="lt2"/>
+    </dgm:txFillClrLst>
+    <dgm:txEffectClrLst/>
+  </dgm:styleLbl>
+  <dgm:styleLbl name="parChTrans2D3">
+    <dgm:fillClrLst meth="repeat">
+      <a:schemeClr val="dk2"/>
+    </dgm:fillClrLst>
+    <dgm:linClrLst meth="repeat">
+      <a:schemeClr val="dk2"/>
+    </dgm:linClrLst>
+    <dgm:effectClrLst/>
+    <dgm:txLinClrLst/>
+    <dgm:txFillClrLst meth="repeat">
+      <a:schemeClr val="lt2"/>
+    </dgm:txFillClrLst>
+    <dgm:txEffectClrLst/>
+  </dgm:styleLbl>
+  <dgm:styleLbl name="parChTrans2D4">
+    <dgm:fillClrLst meth="repeat">
+      <a:schemeClr val="dk2"/>
+    </dgm:fillClrLst>
+    <dgm:linClrLst meth="repeat">
+      <a:schemeClr val="dk2"/>
+    </dgm:linClrLst>
+    <dgm:effectClrLst/>
+    <dgm:txLinClrLst/>
+    <dgm:txFillClrLst meth="repeat">
+      <a:schemeClr val="lt2"/>
+    </dgm:txFillClrLst>
+    <dgm:txEffectClrLst/>
+  </dgm:styleLbl>
+  <dgm:styleLbl name="parChTrans1D1">
+    <dgm:fillClrLst meth="repeat">
+      <a:schemeClr val="dk2"/>
+    </dgm:fillClrLst>
+    <dgm:linClrLst meth="repeat">
+      <a:schemeClr val="dk2">
+        <a:shade val="60000"/>
+      </a:schemeClr>
+    </dgm:linClrLst>
+    <dgm:effectClrLst/>
+    <dgm:txLinClrLst/>
+    <dgm:txFillClrLst meth="repeat">
+      <a:schemeClr val="tx1"/>
+    </dgm:txFillClrLst>
+    <dgm:txEffectClrLst/>
+  </dgm:styleLbl>
+  <dgm:styleLbl name="parChTrans1D2">
+    <dgm:fillClrLst meth="repeat">
+      <a:schemeClr val="dk2"/>
+    </dgm:fillClrLst>
+    <dgm:linClrLst meth="repeat">
+      <a:schemeClr val="dk2">
+        <a:shade val="60000"/>
+      </a:schemeClr>
+    </dgm:linClrLst>
+    <dgm:effectClrLst/>
+    <dgm:txLinClrLst/>
+    <dgm:txFillClrLst meth="repeat">
+      <a:schemeClr val="tx1"/>
+    </dgm:txFillClrLst>
+    <dgm:txEffectClrLst/>
+  </dgm:styleLbl>
+  <dgm:styleLbl name="parChTrans1D3">
+    <dgm:fillClrLst meth="repeat">
+      <a:schemeClr val="dk2"/>
+    </dgm:fillClrLst>
+    <dgm:linClrLst meth="repeat">
+      <a:schemeClr val="dk2">
+        <a:shade val="80000"/>
+      </a:schemeClr>
+    </dgm:linClrLst>
+    <dgm:effectClrLst/>
+    <dgm:txLinClrLst/>
+    <dgm:txFillClrLst meth="repeat">
+      <a:schemeClr val="tx1"/>
+    </dgm:txFillClrLst>
+    <dgm:txEffectClrLst/>
+  </dgm:styleLbl>
+  <dgm:styleLbl name="parChTrans1D4">
+    <dgm:fillClrLst meth="repeat">
+      <a:schemeClr val="dk2"/>
+    </dgm:fillClrLst>
+    <dgm:linClrLst meth="repeat">
+      <a:schemeClr val="dk2">
+        <a:shade val="80000"/>
+      </a:schemeClr>
+    </dgm:linClrLst>
+    <dgm:effectClrLst/>
+    <dgm:txLinClrLst/>
+    <dgm:txFillClrLst meth="repeat">
+      <a:schemeClr val="tx1"/>
+    </dgm:txFillClrLst>
+    <dgm:txEffectClrLst/>
+  </dgm:styleLbl>
+  <dgm:styleLbl name="fgAcc1">
+    <dgm:fillClrLst meth="repeat">
+      <a:schemeClr val="lt2">
+        <a:alpha val="90000"/>
+      </a:schemeClr>
+    </dgm:fillClrLst>
+    <dgm:linClrLst meth="repeat">
+      <a:schemeClr val="dk2"/>
+    </dgm:linClrLst>
+    <dgm:effectClrLst/>
+    <dgm:txLinClrLst/>
+    <dgm:txFillClrLst meth="repeat">
+      <a:schemeClr val="dk1"/>
+    </dgm:txFillClrLst>
+    <dgm:txEffectClrLst/>
+  </dgm:styleLbl>
+  <dgm:styleLbl name="conFgAcc1">
+    <dgm:fillClrLst meth="repeat">
+      <a:schemeClr val="lt2">
+        <a:alpha val="90000"/>
+      </a:schemeClr>
+    </dgm:fillClrLst>
+    <dgm:linClrLst meth="repeat">
+      <a:schemeClr val="dk2"/>
+    </dgm:linClrLst>
+    <dgm:effectClrLst/>
+    <dgm:txLinClrLst/>
+    <dgm:txFillClrLst meth="repeat">
+      <a:schemeClr val="dk1"/>
+    </dgm:txFillClrLst>
+    <dgm:txEffectClrLst/>
+  </dgm:styleLbl>
+  <dgm:styleLbl name="alignAcc1">
+    <dgm:fillClrLst meth="repeat">
+      <a:schemeClr val="lt2">
+        <a:alpha val="90000"/>
+      </a:schemeClr>
+    </dgm:fillClrLst>
+    <dgm:linClrLst meth="repeat">
+      <a:schemeClr val="dk2"/>
+    </dgm:linClrLst>
+    <dgm:effectClrLst/>
+    <dgm:txLinClrLst/>
+    <dgm:txFillClrLst meth="repeat">
+      <a:schemeClr val="dk1"/>
+    </dgm:txFillClrLst>
+    <dgm:txEffectClrLst/>
+  </dgm:styleLbl>
+  <dgm:styleLbl name="trAlignAcc1">
+    <dgm:fillClrLst meth="repeat">
+      <a:schemeClr val="lt2">
+        <a:alpha val="40000"/>
+      </a:schemeClr>
+    </dgm:fillClrLst>
+    <dgm:linClrLst meth="repeat">
+      <a:schemeClr val="dk2"/>
+    </dgm:linClrLst>
+    <dgm:effectClrLst/>
+    <dgm:txLinClrLst/>
+    <dgm:txFillClrLst meth="repeat">
+      <a:schemeClr val="dk1"/>
+    </dgm:txFillClrLst>
+    <dgm:txEffectClrLst/>
+  </dgm:styleLbl>
+  <dgm:styleLbl name="bgAcc1">
+    <dgm:fillClrLst meth="repeat">
+      <a:schemeClr val="lt2">
+        <a:alpha val="90000"/>
+      </a:schemeClr>
+    </dgm:fillClrLst>
+    <dgm:linClrLst meth="repeat">
+      <a:schemeClr val="dk2"/>
+    </dgm:linClrLst>
+    <dgm:effectClrLst/>
+    <dgm:txLinClrLst/>
+    <dgm:txFillClrLst meth="repeat">
+      <a:schemeClr val="dk1"/>
+    </dgm:txFillClrLst>
+    <dgm:txEffectClrLst/>
+  </dgm:styleLbl>
+  <dgm:styleLbl name="solidFgAcc1">
+    <dgm:fillClrLst meth="repeat">
+      <a:schemeClr val="lt2"/>
+    </dgm:fillClrLst>
+    <dgm:linClrLst meth="repeat">
+      <a:schemeClr val="dk2"/>
+    </dgm:linClrLst>
+    <dgm:effectClrLst/>
+    <dgm:txLinClrLst/>
+    <dgm:txFillClrLst meth="repeat">
+      <a:schemeClr val="dk1"/>
+    </dgm:txFillClrLst>
+    <dgm:txEffectClrLst/>
+  </dgm:styleLbl>
+  <dgm:styleLbl name="solidAlignAcc1">
+    <dgm:fillClrLst meth="repeat">
+      <a:schemeClr val="lt2"/>
+    </dgm:fillClrLst>
+    <dgm:linClrLst meth="repeat">
+      <a:schemeClr val="dk2"/>
+    </dgm:linClrLst>
+    <dgm:effectClrLst/>
+    <dgm:txLinClrLst/>
+    <dgm:txFillClrLst meth="repeat">
+      <a:schemeClr val="dk1"/>
+    </dgm:txFillClrLst>
+    <dgm:txEffectClrLst/>
+  </dgm:styleLbl>
+  <dgm:styleLbl name="solidBgAcc1">
+    <dgm:fillClrLst meth="repeat">
+      <a:schemeClr val="lt2"/>
+    </dgm:fillClrLst>
+    <dgm:linClrLst meth="repeat">
+      <a:schemeClr val="dk2"/>
+    </dgm:linClrLst>
+    <dgm:effectClrLst/>
+    <dgm:txLinClrLst/>
+    <dgm:txFillClrLst meth="repeat">
+      <a:schemeClr val="dk1"/>
+    </dgm:txFillClrLst>
+    <dgm:txEffectClrLst/>
+  </dgm:styleLbl>
+  <dgm:styleLbl name="fgAccFollowNode1">
+    <dgm:fillClrLst meth="repeat">
+      <a:schemeClr val="dk2">
+        <a:alpha val="90000"/>
+        <a:tint val="40000"/>
+      </a:schemeClr>
+    </dgm:fillClrLst>
+    <dgm:linClrLst meth="repeat">
+      <a:schemeClr val="dk2">
+        <a:alpha val="90000"/>
+        <a:tint val="40000"/>
+      </a:schemeClr>
+    </dgm:linClrLst>
+    <dgm:effectClrLst/>
+    <dgm:txLinClrLst/>
+    <dgm:txFillClrLst meth="repeat">
+      <a:schemeClr val="dk1"/>
+    </dgm:txFillClrLst>
+    <dgm:txEffectClrLst/>
+  </dgm:styleLbl>
+  <dgm:styleLbl name="alignAccFollowNode1">
+    <dgm:fillClrLst meth="repeat">
+      <a:schemeClr val="dk2">
+        <a:alpha val="90000"/>
+        <a:tint val="40000"/>
+      </a:schemeClr>
+    </dgm:fillClrLst>
+    <dgm:linClrLst meth="repeat">
+      <a:schemeClr val="dk2">
+        <a:alpha val="90000"/>
+        <a:tint val="40000"/>
+      </a:schemeClr>
+    </dgm:linClrLst>
+    <dgm:effectClrLst/>
+    <dgm:txLinClrLst/>
+    <dgm:txFillClrLst meth="repeat">
+      <a:schemeClr val="dk1"/>
+    </dgm:txFillClrLst>
+    <dgm:txEffectClrLst/>
+  </dgm:styleLbl>
+  <dgm:styleLbl name="bgAccFollowNode1">
+    <dgm:fillClrLst meth="repeat">
+      <a:schemeClr val="dk2">
+        <a:alpha val="90000"/>
+        <a:tint val="40000"/>
+      </a:schemeClr>
+    </dgm:fillClrLst>
+    <dgm:linClrLst meth="repeat">
+      <a:schemeClr val="dk2">
+        <a:alpha val="90000"/>
+        <a:tint val="40000"/>
+      </a:schemeClr>
+    </dgm:linClrLst>
+    <dgm:effectClrLst/>
+    <dgm:txLinClrLst/>
+    <dgm:txFillClrLst meth="repeat">
+      <a:schemeClr val="dk1"/>
+    </dgm:txFillClrLst>
+    <dgm:txEffectClrLst/>
+  </dgm:styleLbl>
+  <dgm:styleLbl name="fgAcc0">
+    <dgm:fillClrLst meth="repeat">
+      <a:schemeClr val="lt2">
+        <a:alpha val="90000"/>
+      </a:schemeClr>
+    </dgm:fillClrLst>
+    <dgm:linClrLst meth="repeat">
+      <a:schemeClr val="dk2"/>
+    </dgm:linClrLst>
+    <dgm:effectClrLst/>
+    <dgm:txLinClrLst/>
+    <dgm:txFillClrLst meth="repeat">
+      <a:schemeClr val="dk1"/>
+    </dgm:txFillClrLst>
+    <dgm:txEffectClrLst/>
+  </dgm:styleLbl>
+  <dgm:styleLbl name="fgAcc2">
+    <dgm:fillClrLst meth="repeat">
+      <a:schemeClr val="lt2">
+        <a:alpha val="90000"/>
+      </a:schemeClr>
+    </dgm:fillClrLst>
+    <dgm:linClrLst meth="repeat">
+      <a:schemeClr val="dk2"/>
+    </dgm:linClrLst>
+    <dgm:effectClrLst/>
+    <dgm:txLinClrLst/>
+    <dgm:txFillClrLst meth="repeat">
+      <a:schemeClr val="dk1"/>
+    </dgm:txFillClrLst>
+    <dgm:txEffectClrLst/>
+  </dgm:styleLbl>
+  <dgm:styleLbl name="fgAcc3">
+    <dgm:fillClrLst meth="repeat">
+      <a:schemeClr val="lt2">
+        <a:alpha val="90000"/>
+      </a:schemeClr>
+    </dgm:fillClrLst>
+    <dgm:linClrLst meth="repeat">
+      <a:schemeClr val="dk2"/>
+    </dgm:linClrLst>
+    <dgm:effectClrLst/>
+    <dgm:txLinClrLst/>
+    <dgm:txFillClrLst meth="repeat">
+      <a:schemeClr val="dk1"/>
+    </dgm:txFillClrLst>
+    <dgm:txEffectClrLst/>
+  </dgm:styleLbl>
+  <dgm:styleLbl name="fgAcc4">
+    <dgm:fillClrLst meth="repeat">
+      <a:schemeClr val="lt2">
+        <a:alpha val="90000"/>
+      </a:schemeClr>
+    </dgm:fillClrLst>
+    <dgm:linClrLst meth="repeat">
+      <a:schemeClr val="dk2"/>
+    </dgm:linClrLst>
+    <dgm:effectClrLst/>
+    <dgm:txLinClrLst/>
+    <dgm:txFillClrLst meth="repeat">
+      <a:schemeClr val="dk1"/>
+    </dgm:txFillClrLst>
+    <dgm:txEffectClrLst/>
+  </dgm:styleLbl>
+  <dgm:styleLbl name="bgShp">
+    <dgm:fillClrLst meth="repeat">
+      <a:schemeClr val="dk2">
+        <a:tint val="40000"/>
+      </a:schemeClr>
+    </dgm:fillClrLst>
+    <dgm:linClrLst meth="repeat">
+      <a:schemeClr val="dk2"/>
+    </dgm:linClrLst>
+    <dgm:effectClrLst/>
+    <dgm:txLinClrLst/>
+    <dgm:txFillClrLst meth="repeat">
+      <a:schemeClr val="dk1"/>
+    </dgm:txFillClrLst>
+    <dgm:txEffectClrLst/>
+  </dgm:styleLbl>
+  <dgm:styleLbl name="dkBgShp">
+    <dgm:fillClrLst meth="repeat">
+      <a:schemeClr val="dk2">
+        <a:shade val="80000"/>
+      </a:schemeClr>
+    </dgm:fillClrLst>
+    <dgm:linClrLst meth="repeat">
+      <a:schemeClr val="dk2"/>
+    </dgm:linClrLst>
+    <dgm:effectClrLst/>
+    <dgm:txLinClrLst/>
+    <dgm:txFillClrLst meth="repeat">
+      <a:schemeClr val="lt1"/>
+    </dgm:txFillClrLst>
+    <dgm:txEffectClrLst/>
+  </dgm:styleLbl>
+  <dgm:styleLbl name="trBgShp">
+    <dgm:fillClrLst meth="repeat">
+      <a:schemeClr val="dk2">
+        <a:tint val="50000"/>
+        <a:alpha val="40000"/>
+      </a:schemeClr>
+    </dgm:fillClrLst>
+    <dgm:linClrLst meth="repeat">
+      <a:schemeClr val="dk2"/>
+    </dgm:linClrLst>
+    <dgm:effectClrLst/>
+    <dgm:txLinClrLst/>
+    <dgm:txFillClrLst meth="repeat">
+      <a:schemeClr val="lt1"/>
+    </dgm:txFillClrLst>
+    <dgm:txEffectClrLst/>
+  </dgm:styleLbl>
+  <dgm:styleLbl name="fgShp">
+    <dgm:fillClrLst meth="repeat">
+      <a:schemeClr val="dk2">
+        <a:tint val="60000"/>
+      </a:schemeClr>
+    </dgm:fillClrLst>
+    <dgm:linClrLst meth="repeat">
+      <a:schemeClr val="lt2"/>
+    </dgm:linClrLst>
+    <dgm:effectClrLst/>
+    <dgm:txLinClrLst/>
+    <dgm:txFillClrLst meth="repeat">
+      <a:schemeClr val="dk1"/>
+    </dgm:txFillClrLst>
+    <dgm:txEffectClrLst/>
+  </dgm:styleLbl>
+  <dgm:styleLbl name="revTx">
+    <dgm:fillClrLst meth="repeat">
+      <a:schemeClr val="lt2">
+        <a:alpha val="0"/>
+      </a:schemeClr>
+    </dgm:fillClrLst>
+    <dgm:linClrLst meth="repeat">
+      <a:schemeClr val="dk1">
+        <a:alpha val="0"/>
+      </a:schemeClr>
+    </dgm:linClrLst>
+    <dgm:effectClrLst/>
+    <dgm:txLinClrLst/>
+    <dgm:txFillClrLst meth="repeat">
+      <a:schemeClr val="tx1"/>
+    </dgm:txFillClrLst>
+    <dgm:txEffectClrLst/>
+  </dgm:styleLbl>
+</dgm:colorsDef>
+</file>
+
+<file path=ppt/diagrams/data1.xml><?xml version="1.0" encoding="utf-8"?>
+<dgm:dataModel xmlns:dgm="http://schemas.openxmlformats.org/drawingml/2006/diagram" xmlns:a="http://schemas.openxmlformats.org/drawingml/2006/main">
+  <dgm:ptLst>
+    <dgm:pt modelId="{1528C369-44D6-4BE6-9A3A-4A8608DBA0E0}" type="doc">
+      <dgm:prSet loTypeId="urn:microsoft.com/office/officeart/2005/8/layout/hierarchy1" loCatId="hierarchy" qsTypeId="urn:microsoft.com/office/officeart/2005/8/quickstyle/simple1" qsCatId="simple" csTypeId="urn:microsoft.com/office/officeart/2005/8/colors/accent0_3" csCatId="mainScheme"/>
+      <dgm:spPr/>
+      <dgm:t>
+        <a:bodyPr/>
+        <a:lstStyle/>
+        <a:p>
+          <a:endParaRPr lang="en-US"/>
+        </a:p>
+      </dgm:t>
+    </dgm:pt>
+    <dgm:pt modelId="{11F79C86-314B-4E52-99E7-657B56D8F760}">
+      <dgm:prSet/>
+      <dgm:spPr/>
+      <dgm:t>
+        <a:bodyPr/>
+        <a:lstStyle/>
+        <a:p>
+          <a:r>
+            <a:rPr lang="de-CH"/>
+            <a:t>Das Projekt</a:t>
+          </a:r>
+          <a:endParaRPr lang="en-US"/>
+        </a:p>
+      </dgm:t>
+    </dgm:pt>
+    <dgm:pt modelId="{908D1526-305E-40F6-9779-30863D8A300E}" type="parTrans" cxnId="{8C021712-B520-4FB8-A680-9208BC15D9A6}">
+      <dgm:prSet/>
+      <dgm:spPr/>
+      <dgm:t>
+        <a:bodyPr/>
+        <a:lstStyle/>
+        <a:p>
+          <a:endParaRPr lang="en-US"/>
+        </a:p>
+      </dgm:t>
+    </dgm:pt>
+    <dgm:pt modelId="{EDEBFAD2-11E9-43AE-BE99-903343D56900}" type="sibTrans" cxnId="{8C021712-B520-4FB8-A680-9208BC15D9A6}">
+      <dgm:prSet/>
+      <dgm:spPr/>
+      <dgm:t>
+        <a:bodyPr/>
+        <a:lstStyle/>
+        <a:p>
+          <a:endParaRPr lang="en-US"/>
+        </a:p>
+      </dgm:t>
+    </dgm:pt>
+    <dgm:pt modelId="{617C08E3-D070-444F-930F-EBAC0DAC7581}">
+      <dgm:prSet/>
+      <dgm:spPr/>
+      <dgm:t>
+        <a:bodyPr/>
+        <a:lstStyle/>
+        <a:p>
+          <a:r>
+            <a:rPr lang="de-CH"/>
+            <a:t>Produkt</a:t>
+          </a:r>
+          <a:endParaRPr lang="en-US"/>
+        </a:p>
+      </dgm:t>
+    </dgm:pt>
+    <dgm:pt modelId="{5A4881B4-947A-4BD2-B933-4C7DB176A3DF}" type="parTrans" cxnId="{7220506E-EBD8-4B44-BDF5-C85F92A2195E}">
+      <dgm:prSet/>
+      <dgm:spPr/>
+      <dgm:t>
+        <a:bodyPr/>
+        <a:lstStyle/>
+        <a:p>
+          <a:endParaRPr lang="en-US"/>
+        </a:p>
+      </dgm:t>
+    </dgm:pt>
+    <dgm:pt modelId="{0703D6EB-75BB-4EEC-B6F8-E6CDF6CFA009}" type="sibTrans" cxnId="{7220506E-EBD8-4B44-BDF5-C85F92A2195E}">
+      <dgm:prSet/>
+      <dgm:spPr/>
+      <dgm:t>
+        <a:bodyPr/>
+        <a:lstStyle/>
+        <a:p>
+          <a:endParaRPr lang="en-US"/>
+        </a:p>
+      </dgm:t>
+    </dgm:pt>
+    <dgm:pt modelId="{272D95CA-1B13-4AEB-861E-9FED919112C8}">
+      <dgm:prSet/>
+      <dgm:spPr/>
+      <dgm:t>
+        <a:bodyPr/>
+        <a:lstStyle/>
+        <a:p>
+          <a:r>
+            <a:rPr lang="de-CH"/>
+            <a:t>Herangehensweise</a:t>
+          </a:r>
+          <a:endParaRPr lang="en-US"/>
+        </a:p>
+      </dgm:t>
+    </dgm:pt>
+    <dgm:pt modelId="{FE4DE427-0357-49B4-A12B-19F609E36CB4}" type="parTrans" cxnId="{75CAA030-25BA-40F6-8557-8B05BAA648FD}">
+      <dgm:prSet/>
+      <dgm:spPr/>
+      <dgm:t>
+        <a:bodyPr/>
+        <a:lstStyle/>
+        <a:p>
+          <a:endParaRPr lang="en-US"/>
+        </a:p>
+      </dgm:t>
+    </dgm:pt>
+    <dgm:pt modelId="{63F71EEC-7B2F-4092-8C94-A7B74C81B0B6}" type="sibTrans" cxnId="{75CAA030-25BA-40F6-8557-8B05BAA648FD}">
+      <dgm:prSet/>
+      <dgm:spPr/>
+      <dgm:t>
+        <a:bodyPr/>
+        <a:lstStyle/>
+        <a:p>
+          <a:endParaRPr lang="en-US"/>
+        </a:p>
+      </dgm:t>
+    </dgm:pt>
+    <dgm:pt modelId="{788DB37D-C91D-49EB-8952-E485C570E91A}">
+      <dgm:prSet/>
+      <dgm:spPr/>
+      <dgm:t>
+        <a:bodyPr/>
+        <a:lstStyle/>
+        <a:p>
+          <a:r>
+            <a:rPr lang="de-CH"/>
+            <a:t>Herausforderungen</a:t>
+          </a:r>
+          <a:endParaRPr lang="en-US"/>
+        </a:p>
+      </dgm:t>
+    </dgm:pt>
+    <dgm:pt modelId="{5DAE3A10-3677-4535-81D7-87D1EAE0EB74}" type="parTrans" cxnId="{EF3C8BD0-B723-4FB8-8303-FBAAAE52B910}">
+      <dgm:prSet/>
+      <dgm:spPr/>
+      <dgm:t>
+        <a:bodyPr/>
+        <a:lstStyle/>
+        <a:p>
+          <a:endParaRPr lang="en-US"/>
+        </a:p>
+      </dgm:t>
+    </dgm:pt>
+    <dgm:pt modelId="{1951943E-0038-4E10-BD7C-1EDCC04B16A0}" type="sibTrans" cxnId="{EF3C8BD0-B723-4FB8-8303-FBAAAE52B910}">
+      <dgm:prSet/>
+      <dgm:spPr/>
+      <dgm:t>
+        <a:bodyPr/>
+        <a:lstStyle/>
+        <a:p>
+          <a:endParaRPr lang="en-US"/>
+        </a:p>
+      </dgm:t>
+    </dgm:pt>
+    <dgm:pt modelId="{626BEB7E-E907-457C-AA7B-ACE4D2643C5A}" type="pres">
+      <dgm:prSet presAssocID="{1528C369-44D6-4BE6-9A3A-4A8608DBA0E0}" presName="hierChild1" presStyleCnt="0">
+        <dgm:presLayoutVars>
+          <dgm:chPref val="1"/>
+          <dgm:dir/>
+          <dgm:animOne val="branch"/>
+          <dgm:animLvl val="lvl"/>
+          <dgm:resizeHandles/>
+        </dgm:presLayoutVars>
+      </dgm:prSet>
+      <dgm:spPr/>
+    </dgm:pt>
+    <dgm:pt modelId="{9DD7DAD9-2CA7-4276-A8DF-6CC128F94E15}" type="pres">
+      <dgm:prSet presAssocID="{11F79C86-314B-4E52-99E7-657B56D8F760}" presName="hierRoot1" presStyleCnt="0"/>
+      <dgm:spPr/>
+    </dgm:pt>
+    <dgm:pt modelId="{9630F9AA-0008-4804-8F29-CB4C2E81CBC1}" type="pres">
+      <dgm:prSet presAssocID="{11F79C86-314B-4E52-99E7-657B56D8F760}" presName="composite" presStyleCnt="0"/>
+      <dgm:spPr/>
+    </dgm:pt>
+    <dgm:pt modelId="{389B28DA-3106-407B-A127-742B15F41E97}" type="pres">
+      <dgm:prSet presAssocID="{11F79C86-314B-4E52-99E7-657B56D8F760}" presName="background" presStyleLbl="node0" presStyleIdx="0" presStyleCnt="4"/>
+      <dgm:spPr/>
+    </dgm:pt>
+    <dgm:pt modelId="{11289389-6DEB-4599-B81F-3D1FD3FA3DF1}" type="pres">
+      <dgm:prSet presAssocID="{11F79C86-314B-4E52-99E7-657B56D8F760}" presName="text" presStyleLbl="fgAcc0" presStyleIdx="0" presStyleCnt="4">
+        <dgm:presLayoutVars>
+          <dgm:chPref val="3"/>
+        </dgm:presLayoutVars>
+      </dgm:prSet>
+      <dgm:spPr/>
+    </dgm:pt>
+    <dgm:pt modelId="{78D2DF56-0BFC-4F6D-AB4F-C3B94193755C}" type="pres">
+      <dgm:prSet presAssocID="{11F79C86-314B-4E52-99E7-657B56D8F760}" presName="hierChild2" presStyleCnt="0"/>
+      <dgm:spPr/>
+    </dgm:pt>
+    <dgm:pt modelId="{46D9F92D-E195-43B1-AC69-10233AFECDAD}" type="pres">
+      <dgm:prSet presAssocID="{617C08E3-D070-444F-930F-EBAC0DAC7581}" presName="hierRoot1" presStyleCnt="0"/>
+      <dgm:spPr/>
+    </dgm:pt>
+    <dgm:pt modelId="{289E92C9-96F9-437C-BB46-839E1395CAB3}" type="pres">
+      <dgm:prSet presAssocID="{617C08E3-D070-444F-930F-EBAC0DAC7581}" presName="composite" presStyleCnt="0"/>
+      <dgm:spPr/>
+    </dgm:pt>
+    <dgm:pt modelId="{B84F92A2-A5E1-408F-A096-A9BF8C064E83}" type="pres">
+      <dgm:prSet presAssocID="{617C08E3-D070-444F-930F-EBAC0DAC7581}" presName="background" presStyleLbl="node0" presStyleIdx="1" presStyleCnt="4"/>
+      <dgm:spPr/>
+    </dgm:pt>
+    <dgm:pt modelId="{8AD53D65-22E6-47A4-9B65-9840F1DB434B}" type="pres">
+      <dgm:prSet presAssocID="{617C08E3-D070-444F-930F-EBAC0DAC7581}" presName="text" presStyleLbl="fgAcc0" presStyleIdx="1" presStyleCnt="4">
+        <dgm:presLayoutVars>
+          <dgm:chPref val="3"/>
+        </dgm:presLayoutVars>
+      </dgm:prSet>
+      <dgm:spPr/>
+    </dgm:pt>
+    <dgm:pt modelId="{CD8BA619-1DC7-4583-8A6C-388C2AB275E7}" type="pres">
+      <dgm:prSet presAssocID="{617C08E3-D070-444F-930F-EBAC0DAC7581}" presName="hierChild2" presStyleCnt="0"/>
+      <dgm:spPr/>
+    </dgm:pt>
+    <dgm:pt modelId="{8DB4C624-0A0E-462A-A98D-BA2122220BDD}" type="pres">
+      <dgm:prSet presAssocID="{272D95CA-1B13-4AEB-861E-9FED919112C8}" presName="hierRoot1" presStyleCnt="0"/>
+      <dgm:spPr/>
+    </dgm:pt>
+    <dgm:pt modelId="{9CCF5FA3-C6E2-44C5-895D-764785296366}" type="pres">
+      <dgm:prSet presAssocID="{272D95CA-1B13-4AEB-861E-9FED919112C8}" presName="composite" presStyleCnt="0"/>
+      <dgm:spPr/>
+    </dgm:pt>
+    <dgm:pt modelId="{6CE5B004-EDF3-40EB-AFD4-E97D77B518CD}" type="pres">
+      <dgm:prSet presAssocID="{272D95CA-1B13-4AEB-861E-9FED919112C8}" presName="background" presStyleLbl="node0" presStyleIdx="2" presStyleCnt="4"/>
+      <dgm:spPr/>
+    </dgm:pt>
+    <dgm:pt modelId="{FA112FF1-0334-4621-8E71-F56291530D1A}" type="pres">
+      <dgm:prSet presAssocID="{272D95CA-1B13-4AEB-861E-9FED919112C8}" presName="text" presStyleLbl="fgAcc0" presStyleIdx="2" presStyleCnt="4">
+        <dgm:presLayoutVars>
+          <dgm:chPref val="3"/>
+        </dgm:presLayoutVars>
+      </dgm:prSet>
+      <dgm:spPr/>
+    </dgm:pt>
+    <dgm:pt modelId="{0B73FB23-E67A-4E56-A6F4-E616B872D0C1}" type="pres">
+      <dgm:prSet presAssocID="{272D95CA-1B13-4AEB-861E-9FED919112C8}" presName="hierChild2" presStyleCnt="0"/>
+      <dgm:spPr/>
+    </dgm:pt>
+    <dgm:pt modelId="{C38D1E99-8956-4CED-B15D-0F75145E37C4}" type="pres">
+      <dgm:prSet presAssocID="{788DB37D-C91D-49EB-8952-E485C570E91A}" presName="hierRoot1" presStyleCnt="0"/>
+      <dgm:spPr/>
+    </dgm:pt>
+    <dgm:pt modelId="{EADA2BAF-7CA7-4E8C-8F15-BB3318EB46C3}" type="pres">
+      <dgm:prSet presAssocID="{788DB37D-C91D-49EB-8952-E485C570E91A}" presName="composite" presStyleCnt="0"/>
+      <dgm:spPr/>
+    </dgm:pt>
+    <dgm:pt modelId="{AF12755E-B9C2-4948-983B-1C2322DD08F1}" type="pres">
+      <dgm:prSet presAssocID="{788DB37D-C91D-49EB-8952-E485C570E91A}" presName="background" presStyleLbl="node0" presStyleIdx="3" presStyleCnt="4"/>
+      <dgm:spPr/>
+    </dgm:pt>
+    <dgm:pt modelId="{1AA9CB32-B361-4789-B5D3-3AE310257CA9}" type="pres">
+      <dgm:prSet presAssocID="{788DB37D-C91D-49EB-8952-E485C570E91A}" presName="text" presStyleLbl="fgAcc0" presStyleIdx="3" presStyleCnt="4">
+        <dgm:presLayoutVars>
+          <dgm:chPref val="3"/>
+        </dgm:presLayoutVars>
+      </dgm:prSet>
+      <dgm:spPr/>
+    </dgm:pt>
+    <dgm:pt modelId="{C0589F3B-E78E-4891-82F5-2A72FC43EC3A}" type="pres">
+      <dgm:prSet presAssocID="{788DB37D-C91D-49EB-8952-E485C570E91A}" presName="hierChild2" presStyleCnt="0"/>
+      <dgm:spPr/>
+    </dgm:pt>
+  </dgm:ptLst>
+  <dgm:cxnLst>
+    <dgm:cxn modelId="{8C021712-B520-4FB8-A680-9208BC15D9A6}" srcId="{1528C369-44D6-4BE6-9A3A-4A8608DBA0E0}" destId="{11F79C86-314B-4E52-99E7-657B56D8F760}" srcOrd="0" destOrd="0" parTransId="{908D1526-305E-40F6-9779-30863D8A300E}" sibTransId="{EDEBFAD2-11E9-43AE-BE99-903343D56900}"/>
+    <dgm:cxn modelId="{6871CE1D-2B7B-4EF1-8F2E-EC6888EF7B90}" type="presOf" srcId="{788DB37D-C91D-49EB-8952-E485C570E91A}" destId="{1AA9CB32-B361-4789-B5D3-3AE310257CA9}" srcOrd="0" destOrd="0" presId="urn:microsoft.com/office/officeart/2005/8/layout/hierarchy1"/>
+    <dgm:cxn modelId="{C7741A28-27A7-49DB-ABD6-DABAE9B1C829}" type="presOf" srcId="{11F79C86-314B-4E52-99E7-657B56D8F760}" destId="{11289389-6DEB-4599-B81F-3D1FD3FA3DF1}" srcOrd="0" destOrd="0" presId="urn:microsoft.com/office/officeart/2005/8/layout/hierarchy1"/>
+    <dgm:cxn modelId="{A3F5392A-67DC-48E2-960A-8FDE9A3CF59A}" type="presOf" srcId="{617C08E3-D070-444F-930F-EBAC0DAC7581}" destId="{8AD53D65-22E6-47A4-9B65-9840F1DB434B}" srcOrd="0" destOrd="0" presId="urn:microsoft.com/office/officeart/2005/8/layout/hierarchy1"/>
+    <dgm:cxn modelId="{75CAA030-25BA-40F6-8557-8B05BAA648FD}" srcId="{1528C369-44D6-4BE6-9A3A-4A8608DBA0E0}" destId="{272D95CA-1B13-4AEB-861E-9FED919112C8}" srcOrd="2" destOrd="0" parTransId="{FE4DE427-0357-49B4-A12B-19F609E36CB4}" sibTransId="{63F71EEC-7B2F-4092-8C94-A7B74C81B0B6}"/>
+    <dgm:cxn modelId="{7220506E-EBD8-4B44-BDF5-C85F92A2195E}" srcId="{1528C369-44D6-4BE6-9A3A-4A8608DBA0E0}" destId="{617C08E3-D070-444F-930F-EBAC0DAC7581}" srcOrd="1" destOrd="0" parTransId="{5A4881B4-947A-4BD2-B933-4C7DB176A3DF}" sibTransId="{0703D6EB-75BB-4EEC-B6F8-E6CDF6CFA009}"/>
+    <dgm:cxn modelId="{76C76193-BAA6-413A-9864-86337D107125}" type="presOf" srcId="{1528C369-44D6-4BE6-9A3A-4A8608DBA0E0}" destId="{626BEB7E-E907-457C-AA7B-ACE4D2643C5A}" srcOrd="0" destOrd="0" presId="urn:microsoft.com/office/officeart/2005/8/layout/hierarchy1"/>
+    <dgm:cxn modelId="{774200BF-8779-4742-B842-FA078D427102}" type="presOf" srcId="{272D95CA-1B13-4AEB-861E-9FED919112C8}" destId="{FA112FF1-0334-4621-8E71-F56291530D1A}" srcOrd="0" destOrd="0" presId="urn:microsoft.com/office/officeart/2005/8/layout/hierarchy1"/>
+    <dgm:cxn modelId="{EF3C8BD0-B723-4FB8-8303-FBAAAE52B910}" srcId="{1528C369-44D6-4BE6-9A3A-4A8608DBA0E0}" destId="{788DB37D-C91D-49EB-8952-E485C570E91A}" srcOrd="3" destOrd="0" parTransId="{5DAE3A10-3677-4535-81D7-87D1EAE0EB74}" sibTransId="{1951943E-0038-4E10-BD7C-1EDCC04B16A0}"/>
+    <dgm:cxn modelId="{94030068-16A2-4729-8181-2E790F03F5BB}" type="presParOf" srcId="{626BEB7E-E907-457C-AA7B-ACE4D2643C5A}" destId="{9DD7DAD9-2CA7-4276-A8DF-6CC128F94E15}" srcOrd="0" destOrd="0" presId="urn:microsoft.com/office/officeart/2005/8/layout/hierarchy1"/>
+    <dgm:cxn modelId="{CB9DB440-0DCF-4250-9F3F-7D3672B17898}" type="presParOf" srcId="{9DD7DAD9-2CA7-4276-A8DF-6CC128F94E15}" destId="{9630F9AA-0008-4804-8F29-CB4C2E81CBC1}" srcOrd="0" destOrd="0" presId="urn:microsoft.com/office/officeart/2005/8/layout/hierarchy1"/>
+    <dgm:cxn modelId="{711EACD6-7224-4ABF-AD13-08E1959E419F}" type="presParOf" srcId="{9630F9AA-0008-4804-8F29-CB4C2E81CBC1}" destId="{389B28DA-3106-407B-A127-742B15F41E97}" srcOrd="0" destOrd="0" presId="urn:microsoft.com/office/officeart/2005/8/layout/hierarchy1"/>
+    <dgm:cxn modelId="{213C8740-A36B-4713-89E2-C8C0F6FD9EFA}" type="presParOf" srcId="{9630F9AA-0008-4804-8F29-CB4C2E81CBC1}" destId="{11289389-6DEB-4599-B81F-3D1FD3FA3DF1}" srcOrd="1" destOrd="0" presId="urn:microsoft.com/office/officeart/2005/8/layout/hierarchy1"/>
+    <dgm:cxn modelId="{43AFEFBC-8D0A-465C-96B0-900D3EA0DD3C}" type="presParOf" srcId="{9DD7DAD9-2CA7-4276-A8DF-6CC128F94E15}" destId="{78D2DF56-0BFC-4F6D-AB4F-C3B94193755C}" srcOrd="1" destOrd="0" presId="urn:microsoft.com/office/officeart/2005/8/layout/hierarchy1"/>
+    <dgm:cxn modelId="{15CE9DEC-6C5E-4F3C-908B-99D58748E004}" type="presParOf" srcId="{626BEB7E-E907-457C-AA7B-ACE4D2643C5A}" destId="{46D9F92D-E195-43B1-AC69-10233AFECDAD}" srcOrd="1" destOrd="0" presId="urn:microsoft.com/office/officeart/2005/8/layout/hierarchy1"/>
+    <dgm:cxn modelId="{CD1EBDED-763B-4A1E-B414-7DB9DF669D8B}" type="presParOf" srcId="{46D9F92D-E195-43B1-AC69-10233AFECDAD}" destId="{289E92C9-96F9-437C-BB46-839E1395CAB3}" srcOrd="0" destOrd="0" presId="urn:microsoft.com/office/officeart/2005/8/layout/hierarchy1"/>
+    <dgm:cxn modelId="{05876A65-2645-416E-9FB6-418F4095F3C8}" type="presParOf" srcId="{289E92C9-96F9-437C-BB46-839E1395CAB3}" destId="{B84F92A2-A5E1-408F-A096-A9BF8C064E83}" srcOrd="0" destOrd="0" presId="urn:microsoft.com/office/officeart/2005/8/layout/hierarchy1"/>
+    <dgm:cxn modelId="{1873CC21-534D-4B06-B56E-BF771AB323BC}" type="presParOf" srcId="{289E92C9-96F9-437C-BB46-839E1395CAB3}" destId="{8AD53D65-22E6-47A4-9B65-9840F1DB434B}" srcOrd="1" destOrd="0" presId="urn:microsoft.com/office/officeart/2005/8/layout/hierarchy1"/>
+    <dgm:cxn modelId="{9D8FE8BB-5D54-4198-9BA5-EC139F60520B}" type="presParOf" srcId="{46D9F92D-E195-43B1-AC69-10233AFECDAD}" destId="{CD8BA619-1DC7-4583-8A6C-388C2AB275E7}" srcOrd="1" destOrd="0" presId="urn:microsoft.com/office/officeart/2005/8/layout/hierarchy1"/>
+    <dgm:cxn modelId="{EC6F2CCB-C788-4A1C-960F-C54BA0457DAF}" type="presParOf" srcId="{626BEB7E-E907-457C-AA7B-ACE4D2643C5A}" destId="{8DB4C624-0A0E-462A-A98D-BA2122220BDD}" srcOrd="2" destOrd="0" presId="urn:microsoft.com/office/officeart/2005/8/layout/hierarchy1"/>
+    <dgm:cxn modelId="{8D1648C1-B071-4E24-BF9F-A4F967300AF4}" type="presParOf" srcId="{8DB4C624-0A0E-462A-A98D-BA2122220BDD}" destId="{9CCF5FA3-C6E2-44C5-895D-764785296366}" srcOrd="0" destOrd="0" presId="urn:microsoft.com/office/officeart/2005/8/layout/hierarchy1"/>
+    <dgm:cxn modelId="{84413F4A-98FC-4099-ADEF-F834DE4E4C1D}" type="presParOf" srcId="{9CCF5FA3-C6E2-44C5-895D-764785296366}" destId="{6CE5B004-EDF3-40EB-AFD4-E97D77B518CD}" srcOrd="0" destOrd="0" presId="urn:microsoft.com/office/officeart/2005/8/layout/hierarchy1"/>
+    <dgm:cxn modelId="{26D8E76C-6DF6-4060-82B8-D1EB895F922E}" type="presParOf" srcId="{9CCF5FA3-C6E2-44C5-895D-764785296366}" destId="{FA112FF1-0334-4621-8E71-F56291530D1A}" srcOrd="1" destOrd="0" presId="urn:microsoft.com/office/officeart/2005/8/layout/hierarchy1"/>
+    <dgm:cxn modelId="{8C5C0AAE-981D-4A0F-AB02-1B3E9297CB80}" type="presParOf" srcId="{8DB4C624-0A0E-462A-A98D-BA2122220BDD}" destId="{0B73FB23-E67A-4E56-A6F4-E616B872D0C1}" srcOrd="1" destOrd="0" presId="urn:microsoft.com/office/officeart/2005/8/layout/hierarchy1"/>
+    <dgm:cxn modelId="{4634DE8D-0669-4E8A-9A66-D2536DB99DA3}" type="presParOf" srcId="{626BEB7E-E907-457C-AA7B-ACE4D2643C5A}" destId="{C38D1E99-8956-4CED-B15D-0F75145E37C4}" srcOrd="3" destOrd="0" presId="urn:microsoft.com/office/officeart/2005/8/layout/hierarchy1"/>
+    <dgm:cxn modelId="{82DCBC83-823B-476F-B7C3-8FCE624D1B8E}" type="presParOf" srcId="{C38D1E99-8956-4CED-B15D-0F75145E37C4}" destId="{EADA2BAF-7CA7-4E8C-8F15-BB3318EB46C3}" srcOrd="0" destOrd="0" presId="urn:microsoft.com/office/officeart/2005/8/layout/hierarchy1"/>
+    <dgm:cxn modelId="{72C5A3D6-1371-4AD7-BDE6-85D2C8B9893D}" type="presParOf" srcId="{EADA2BAF-7CA7-4E8C-8F15-BB3318EB46C3}" destId="{AF12755E-B9C2-4948-983B-1C2322DD08F1}" srcOrd="0" destOrd="0" presId="urn:microsoft.com/office/officeart/2005/8/layout/hierarchy1"/>
+    <dgm:cxn modelId="{128705AA-0E92-483F-9BF6-58F114DB09C7}" type="presParOf" srcId="{EADA2BAF-7CA7-4E8C-8F15-BB3318EB46C3}" destId="{1AA9CB32-B361-4789-B5D3-3AE310257CA9}" srcOrd="1" destOrd="0" presId="urn:microsoft.com/office/officeart/2005/8/layout/hierarchy1"/>
+    <dgm:cxn modelId="{5B89967A-30F9-4DE9-8F73-CFBB1ED005F5}" type="presParOf" srcId="{C38D1E99-8956-4CED-B15D-0F75145E37C4}" destId="{C0589F3B-E78E-4891-82F5-2A72FC43EC3A}" srcOrd="1" destOrd="0" presId="urn:microsoft.com/office/officeart/2005/8/layout/hierarchy1"/>
+  </dgm:cxnLst>
+  <dgm:bg/>
+  <dgm:whole/>
+  <dgm:extLst>
+    <a:ext uri="http://schemas.microsoft.com/office/drawing/2008/diagram">
+      <dsp:dataModelExt xmlns:dsp="http://schemas.microsoft.com/office/drawing/2008/diagram" relId="rId6" minVer="http://schemas.openxmlformats.org/drawingml/2006/diagram"/>
+    </a:ext>
+  </dgm:extLst>
+</dgm:dataModel>
+</file>
+
+<file path=ppt/diagrams/drawing1.xml><?xml version="1.0" encoding="utf-8"?>
+<dsp:drawing xmlns:dgm="http://schemas.openxmlformats.org/drawingml/2006/diagram" xmlns:dsp="http://schemas.microsoft.com/office/drawing/2008/diagram" xmlns:a="http://schemas.openxmlformats.org/drawingml/2006/main">
+  <dsp:spTree>
+    <dsp:nvGrpSpPr>
+      <dsp:cNvPr id="0" name=""/>
+      <dsp:cNvGrpSpPr/>
+    </dsp:nvGrpSpPr>
+    <dsp:grpSpPr/>
+    <dsp:sp modelId="{389B28DA-3106-407B-A127-742B15F41E97}">
+      <dsp:nvSpPr>
+        <dsp:cNvPr id="0" name=""/>
+        <dsp:cNvSpPr/>
+      </dsp:nvSpPr>
+      <dsp:spPr>
+        <a:xfrm>
+          <a:off x="3201" y="998291"/>
+          <a:ext cx="2285879" cy="1451533"/>
+        </a:xfrm>
+        <a:prstGeom prst="roundRect">
+          <a:avLst>
+            <a:gd name="adj" fmla="val 10000"/>
+          </a:avLst>
+        </a:prstGeom>
+        <a:solidFill>
+          <a:schemeClr val="dk2">
+            <a:hueOff val="0"/>
+            <a:satOff val="0"/>
+            <a:lumOff val="0"/>
+            <a:alphaOff val="0"/>
+          </a:schemeClr>
+        </a:solidFill>
+        <a:ln w="19050" cap="flat" cmpd="sng" algn="ctr">
+          <a:solidFill>
+            <a:schemeClr val="lt2">
+              <a:hueOff val="0"/>
+              <a:satOff val="0"/>
+              <a:lumOff val="0"/>
+              <a:alphaOff val="0"/>
+            </a:schemeClr>
+          </a:solidFill>
+          <a:prstDash val="solid"/>
+          <a:miter lim="800000"/>
+        </a:ln>
+        <a:effectLst/>
+      </dsp:spPr>
+      <dsp:style>
+        <a:lnRef idx="2">
+          <a:scrgbClr r="0" g="0" b="0"/>
+        </a:lnRef>
+        <a:fillRef idx="1">
+          <a:scrgbClr r="0" g="0" b="0"/>
+        </a:fillRef>
+        <a:effectRef idx="0">
+          <a:scrgbClr r="0" g="0" b="0"/>
+        </a:effectRef>
+        <a:fontRef idx="minor">
+          <a:schemeClr val="lt1"/>
+        </a:fontRef>
+      </dsp:style>
+    </dsp:sp>
+    <dsp:sp modelId="{11289389-6DEB-4599-B81F-3D1FD3FA3DF1}">
+      <dsp:nvSpPr>
+        <dsp:cNvPr id="0" name=""/>
+        <dsp:cNvSpPr/>
+      </dsp:nvSpPr>
+      <dsp:spPr>
+        <a:xfrm>
+          <a:off x="257188" y="1239579"/>
+          <a:ext cx="2285879" cy="1451533"/>
+        </a:xfrm>
+        <a:prstGeom prst="roundRect">
+          <a:avLst>
+            <a:gd name="adj" fmla="val 10000"/>
+          </a:avLst>
+        </a:prstGeom>
+        <a:solidFill>
+          <a:schemeClr val="lt2">
+            <a:alpha val="90000"/>
+            <a:hueOff val="0"/>
+            <a:satOff val="0"/>
+            <a:lumOff val="0"/>
+            <a:alphaOff val="0"/>
+          </a:schemeClr>
+        </a:solidFill>
+        <a:ln w="19050" cap="flat" cmpd="sng" algn="ctr">
+          <a:solidFill>
+            <a:schemeClr val="dk2">
+              <a:hueOff val="0"/>
+              <a:satOff val="0"/>
+              <a:lumOff val="0"/>
+              <a:alphaOff val="0"/>
+            </a:schemeClr>
+          </a:solidFill>
+          <a:prstDash val="solid"/>
+          <a:miter lim="800000"/>
+        </a:ln>
+        <a:effectLst/>
+      </dsp:spPr>
+      <dsp:style>
+        <a:lnRef idx="2">
+          <a:scrgbClr r="0" g="0" b="0"/>
+        </a:lnRef>
+        <a:fillRef idx="1">
+          <a:scrgbClr r="0" g="0" b="0"/>
+        </a:fillRef>
+        <a:effectRef idx="0">
+          <a:scrgbClr r="0" g="0" b="0"/>
+        </a:effectRef>
+        <a:fontRef idx="minor"/>
+      </dsp:style>
+      <dsp:txBody>
+        <a:bodyPr spcFirstLastPara="0" vert="horz" wrap="square" lIns="72390" tIns="72390" rIns="72390" bIns="72390" numCol="1" spcCol="1270" anchor="ctr" anchorCtr="0">
+          <a:noAutofit/>
+        </a:bodyPr>
+        <a:lstStyle/>
+        <a:p>
+          <a:pPr marL="0" lvl="0" indent="0" algn="ctr" defTabSz="844550">
+            <a:lnSpc>
+              <a:spcPct val="90000"/>
+            </a:lnSpc>
+            <a:spcBef>
+              <a:spcPct val="0"/>
+            </a:spcBef>
+            <a:spcAft>
+              <a:spcPct val="35000"/>
+            </a:spcAft>
+            <a:buNone/>
+          </a:pPr>
+          <a:r>
+            <a:rPr lang="de-CH" sz="1900" kern="1200"/>
+            <a:t>Das Projekt</a:t>
+          </a:r>
+          <a:endParaRPr lang="en-US" sz="1900" kern="1200"/>
+        </a:p>
+      </dsp:txBody>
+      <dsp:txXfrm>
+        <a:off x="299702" y="1282093"/>
+        <a:ext cx="2200851" cy="1366505"/>
+      </dsp:txXfrm>
+    </dsp:sp>
+    <dsp:sp modelId="{B84F92A2-A5E1-408F-A096-A9BF8C064E83}">
+      <dsp:nvSpPr>
+        <dsp:cNvPr id="0" name=""/>
+        <dsp:cNvSpPr/>
+      </dsp:nvSpPr>
+      <dsp:spPr>
+        <a:xfrm>
+          <a:off x="2797054" y="998291"/>
+          <a:ext cx="2285879" cy="1451533"/>
+        </a:xfrm>
+        <a:prstGeom prst="roundRect">
+          <a:avLst>
+            <a:gd name="adj" fmla="val 10000"/>
+          </a:avLst>
+        </a:prstGeom>
+        <a:solidFill>
+          <a:schemeClr val="dk2">
+            <a:hueOff val="0"/>
+            <a:satOff val="0"/>
+            <a:lumOff val="0"/>
+            <a:alphaOff val="0"/>
+          </a:schemeClr>
+        </a:solidFill>
+        <a:ln w="19050" cap="flat" cmpd="sng" algn="ctr">
+          <a:solidFill>
+            <a:schemeClr val="lt2">
+              <a:hueOff val="0"/>
+              <a:satOff val="0"/>
+              <a:lumOff val="0"/>
+              <a:alphaOff val="0"/>
+            </a:schemeClr>
+          </a:solidFill>
+          <a:prstDash val="solid"/>
+          <a:miter lim="800000"/>
+        </a:ln>
+        <a:effectLst/>
+      </dsp:spPr>
+      <dsp:style>
+        <a:lnRef idx="2">
+          <a:scrgbClr r="0" g="0" b="0"/>
+        </a:lnRef>
+        <a:fillRef idx="1">
+          <a:scrgbClr r="0" g="0" b="0"/>
+        </a:fillRef>
+        <a:effectRef idx="0">
+          <a:scrgbClr r="0" g="0" b="0"/>
+        </a:effectRef>
+        <a:fontRef idx="minor">
+          <a:schemeClr val="lt1"/>
+        </a:fontRef>
+      </dsp:style>
+    </dsp:sp>
+    <dsp:sp modelId="{8AD53D65-22E6-47A4-9B65-9840F1DB434B}">
+      <dsp:nvSpPr>
+        <dsp:cNvPr id="0" name=""/>
+        <dsp:cNvSpPr/>
+      </dsp:nvSpPr>
+      <dsp:spPr>
+        <a:xfrm>
+          <a:off x="3051041" y="1239579"/>
+          <a:ext cx="2285879" cy="1451533"/>
+        </a:xfrm>
+        <a:prstGeom prst="roundRect">
+          <a:avLst>
+            <a:gd name="adj" fmla="val 10000"/>
+          </a:avLst>
+        </a:prstGeom>
+        <a:solidFill>
+          <a:schemeClr val="lt2">
+            <a:alpha val="90000"/>
+            <a:hueOff val="0"/>
+            <a:satOff val="0"/>
+            <a:lumOff val="0"/>
+            <a:alphaOff val="0"/>
+          </a:schemeClr>
+        </a:solidFill>
+        <a:ln w="19050" cap="flat" cmpd="sng" algn="ctr">
+          <a:solidFill>
+            <a:schemeClr val="dk2">
+              <a:hueOff val="0"/>
+              <a:satOff val="0"/>
+              <a:lumOff val="0"/>
+              <a:alphaOff val="0"/>
+            </a:schemeClr>
+          </a:solidFill>
+          <a:prstDash val="solid"/>
+          <a:miter lim="800000"/>
+        </a:ln>
+        <a:effectLst/>
+      </dsp:spPr>
+      <dsp:style>
+        <a:lnRef idx="2">
+          <a:scrgbClr r="0" g="0" b="0"/>
+        </a:lnRef>
+        <a:fillRef idx="1">
+          <a:scrgbClr r="0" g="0" b="0"/>
+        </a:fillRef>
+        <a:effectRef idx="0">
+          <a:scrgbClr r="0" g="0" b="0"/>
+        </a:effectRef>
+        <a:fontRef idx="minor"/>
+      </dsp:style>
+      <dsp:txBody>
+        <a:bodyPr spcFirstLastPara="0" vert="horz" wrap="square" lIns="72390" tIns="72390" rIns="72390" bIns="72390" numCol="1" spcCol="1270" anchor="ctr" anchorCtr="0">
+          <a:noAutofit/>
+        </a:bodyPr>
+        <a:lstStyle/>
+        <a:p>
+          <a:pPr marL="0" lvl="0" indent="0" algn="ctr" defTabSz="844550">
+            <a:lnSpc>
+              <a:spcPct val="90000"/>
+            </a:lnSpc>
+            <a:spcBef>
+              <a:spcPct val="0"/>
+            </a:spcBef>
+            <a:spcAft>
+              <a:spcPct val="35000"/>
+            </a:spcAft>
+            <a:buNone/>
+          </a:pPr>
+          <a:r>
+            <a:rPr lang="de-CH" sz="1900" kern="1200"/>
+            <a:t>Produkt</a:t>
+          </a:r>
+          <a:endParaRPr lang="en-US" sz="1900" kern="1200"/>
+        </a:p>
+      </dsp:txBody>
+      <dsp:txXfrm>
+        <a:off x="3093555" y="1282093"/>
+        <a:ext cx="2200851" cy="1366505"/>
+      </dsp:txXfrm>
+    </dsp:sp>
+    <dsp:sp modelId="{6CE5B004-EDF3-40EB-AFD4-E97D77B518CD}">
+      <dsp:nvSpPr>
+        <dsp:cNvPr id="0" name=""/>
+        <dsp:cNvSpPr/>
+      </dsp:nvSpPr>
+      <dsp:spPr>
+        <a:xfrm>
+          <a:off x="5590907" y="998291"/>
+          <a:ext cx="2285879" cy="1451533"/>
+        </a:xfrm>
+        <a:prstGeom prst="roundRect">
+          <a:avLst>
+            <a:gd name="adj" fmla="val 10000"/>
+          </a:avLst>
+        </a:prstGeom>
+        <a:solidFill>
+          <a:schemeClr val="dk2">
+            <a:hueOff val="0"/>
+            <a:satOff val="0"/>
+            <a:lumOff val="0"/>
+            <a:alphaOff val="0"/>
+          </a:schemeClr>
+        </a:solidFill>
+        <a:ln w="19050" cap="flat" cmpd="sng" algn="ctr">
+          <a:solidFill>
+            <a:schemeClr val="lt2">
+              <a:hueOff val="0"/>
+              <a:satOff val="0"/>
+              <a:lumOff val="0"/>
+              <a:alphaOff val="0"/>
+            </a:schemeClr>
+          </a:solidFill>
+          <a:prstDash val="solid"/>
+          <a:miter lim="800000"/>
+        </a:ln>
+        <a:effectLst/>
+      </dsp:spPr>
+      <dsp:style>
+        <a:lnRef idx="2">
+          <a:scrgbClr r="0" g="0" b="0"/>
+        </a:lnRef>
+        <a:fillRef idx="1">
+          <a:scrgbClr r="0" g="0" b="0"/>
+        </a:fillRef>
+        <a:effectRef idx="0">
+          <a:scrgbClr r="0" g="0" b="0"/>
+        </a:effectRef>
+        <a:fontRef idx="minor">
+          <a:schemeClr val="lt1"/>
+        </a:fontRef>
+      </dsp:style>
+    </dsp:sp>
+    <dsp:sp modelId="{FA112FF1-0334-4621-8E71-F56291530D1A}">
+      <dsp:nvSpPr>
+        <dsp:cNvPr id="0" name=""/>
+        <dsp:cNvSpPr/>
+      </dsp:nvSpPr>
+      <dsp:spPr>
+        <a:xfrm>
+          <a:off x="5844894" y="1239579"/>
+          <a:ext cx="2285879" cy="1451533"/>
+        </a:xfrm>
+        <a:prstGeom prst="roundRect">
+          <a:avLst>
+            <a:gd name="adj" fmla="val 10000"/>
+          </a:avLst>
+        </a:prstGeom>
+        <a:solidFill>
+          <a:schemeClr val="lt2">
+            <a:alpha val="90000"/>
+            <a:hueOff val="0"/>
+            <a:satOff val="0"/>
+            <a:lumOff val="0"/>
+            <a:alphaOff val="0"/>
+          </a:schemeClr>
+        </a:solidFill>
+        <a:ln w="19050" cap="flat" cmpd="sng" algn="ctr">
+          <a:solidFill>
+            <a:schemeClr val="dk2">
+              <a:hueOff val="0"/>
+              <a:satOff val="0"/>
+              <a:lumOff val="0"/>
+              <a:alphaOff val="0"/>
+            </a:schemeClr>
+          </a:solidFill>
+          <a:prstDash val="solid"/>
+          <a:miter lim="800000"/>
+        </a:ln>
+        <a:effectLst/>
+      </dsp:spPr>
+      <dsp:style>
+        <a:lnRef idx="2">
+          <a:scrgbClr r="0" g="0" b="0"/>
+        </a:lnRef>
+        <a:fillRef idx="1">
+          <a:scrgbClr r="0" g="0" b="0"/>
+        </a:fillRef>
+        <a:effectRef idx="0">
+          <a:scrgbClr r="0" g="0" b="0"/>
+        </a:effectRef>
+        <a:fontRef idx="minor"/>
+      </dsp:style>
+      <dsp:txBody>
+        <a:bodyPr spcFirstLastPara="0" vert="horz" wrap="square" lIns="72390" tIns="72390" rIns="72390" bIns="72390" numCol="1" spcCol="1270" anchor="ctr" anchorCtr="0">
+          <a:noAutofit/>
+        </a:bodyPr>
+        <a:lstStyle/>
+        <a:p>
+          <a:pPr marL="0" lvl="0" indent="0" algn="ctr" defTabSz="844550">
+            <a:lnSpc>
+              <a:spcPct val="90000"/>
+            </a:lnSpc>
+            <a:spcBef>
+              <a:spcPct val="0"/>
+            </a:spcBef>
+            <a:spcAft>
+              <a:spcPct val="35000"/>
+            </a:spcAft>
+            <a:buNone/>
+          </a:pPr>
+          <a:r>
+            <a:rPr lang="de-CH" sz="1900" kern="1200"/>
+            <a:t>Herangehensweise</a:t>
+          </a:r>
+          <a:endParaRPr lang="en-US" sz="1900" kern="1200"/>
+        </a:p>
+      </dsp:txBody>
+      <dsp:txXfrm>
+        <a:off x="5887408" y="1282093"/>
+        <a:ext cx="2200851" cy="1366505"/>
+      </dsp:txXfrm>
+    </dsp:sp>
+    <dsp:sp modelId="{AF12755E-B9C2-4948-983B-1C2322DD08F1}">
+      <dsp:nvSpPr>
+        <dsp:cNvPr id="0" name=""/>
+        <dsp:cNvSpPr/>
+      </dsp:nvSpPr>
+      <dsp:spPr>
+        <a:xfrm>
+          <a:off x="8384760" y="998291"/>
+          <a:ext cx="2285879" cy="1451533"/>
+        </a:xfrm>
+        <a:prstGeom prst="roundRect">
+          <a:avLst>
+            <a:gd name="adj" fmla="val 10000"/>
+          </a:avLst>
+        </a:prstGeom>
+        <a:solidFill>
+          <a:schemeClr val="dk2">
+            <a:hueOff val="0"/>
+            <a:satOff val="0"/>
+            <a:lumOff val="0"/>
+            <a:alphaOff val="0"/>
+          </a:schemeClr>
+        </a:solidFill>
+        <a:ln w="19050" cap="flat" cmpd="sng" algn="ctr">
+          <a:solidFill>
+            <a:schemeClr val="lt2">
+              <a:hueOff val="0"/>
+              <a:satOff val="0"/>
+              <a:lumOff val="0"/>
+              <a:alphaOff val="0"/>
+            </a:schemeClr>
+          </a:solidFill>
+          <a:prstDash val="solid"/>
+          <a:miter lim="800000"/>
+        </a:ln>
+        <a:effectLst/>
+      </dsp:spPr>
+      <dsp:style>
+        <a:lnRef idx="2">
+          <a:scrgbClr r="0" g="0" b="0"/>
+        </a:lnRef>
+        <a:fillRef idx="1">
+          <a:scrgbClr r="0" g="0" b="0"/>
+        </a:fillRef>
+        <a:effectRef idx="0">
+          <a:scrgbClr r="0" g="0" b="0"/>
+        </a:effectRef>
+        <a:fontRef idx="minor">
+          <a:schemeClr val="lt1"/>
+        </a:fontRef>
+      </dsp:style>
+    </dsp:sp>
+    <dsp:sp modelId="{1AA9CB32-B361-4789-B5D3-3AE310257CA9}">
+      <dsp:nvSpPr>
+        <dsp:cNvPr id="0" name=""/>
+        <dsp:cNvSpPr/>
+      </dsp:nvSpPr>
+      <dsp:spPr>
+        <a:xfrm>
+          <a:off x="8638747" y="1239579"/>
+          <a:ext cx="2285879" cy="1451533"/>
+        </a:xfrm>
+        <a:prstGeom prst="roundRect">
+          <a:avLst>
+            <a:gd name="adj" fmla="val 10000"/>
+          </a:avLst>
+        </a:prstGeom>
+        <a:solidFill>
+          <a:schemeClr val="lt2">
+            <a:alpha val="90000"/>
+            <a:hueOff val="0"/>
+            <a:satOff val="0"/>
+            <a:lumOff val="0"/>
+            <a:alphaOff val="0"/>
+          </a:schemeClr>
+        </a:solidFill>
+        <a:ln w="19050" cap="flat" cmpd="sng" algn="ctr">
+          <a:solidFill>
+            <a:schemeClr val="dk2">
+              <a:hueOff val="0"/>
+              <a:satOff val="0"/>
+              <a:lumOff val="0"/>
+              <a:alphaOff val="0"/>
+            </a:schemeClr>
+          </a:solidFill>
+          <a:prstDash val="solid"/>
+          <a:miter lim="800000"/>
+        </a:ln>
+        <a:effectLst/>
+      </dsp:spPr>
+      <dsp:style>
+        <a:lnRef idx="2">
+          <a:scrgbClr r="0" g="0" b="0"/>
+        </a:lnRef>
+        <a:fillRef idx="1">
+          <a:scrgbClr r="0" g="0" b="0"/>
+        </a:fillRef>
+        <a:effectRef idx="0">
+          <a:scrgbClr r="0" g="0" b="0"/>
+        </a:effectRef>
+        <a:fontRef idx="minor"/>
+      </dsp:style>
+      <dsp:txBody>
+        <a:bodyPr spcFirstLastPara="0" vert="horz" wrap="square" lIns="72390" tIns="72390" rIns="72390" bIns="72390" numCol="1" spcCol="1270" anchor="ctr" anchorCtr="0">
+          <a:noAutofit/>
+        </a:bodyPr>
+        <a:lstStyle/>
+        <a:p>
+          <a:pPr marL="0" lvl="0" indent="0" algn="ctr" defTabSz="844550">
+            <a:lnSpc>
+              <a:spcPct val="90000"/>
+            </a:lnSpc>
+            <a:spcBef>
+              <a:spcPct val="0"/>
+            </a:spcBef>
+            <a:spcAft>
+              <a:spcPct val="35000"/>
+            </a:spcAft>
+            <a:buNone/>
+          </a:pPr>
+          <a:r>
+            <a:rPr lang="de-CH" sz="1900" kern="1200"/>
+            <a:t>Herausforderungen</a:t>
+          </a:r>
+          <a:endParaRPr lang="en-US" sz="1900" kern="1200"/>
+        </a:p>
+      </dsp:txBody>
+      <dsp:txXfrm>
+        <a:off x="8681261" y="1282093"/>
+        <a:ext cx="2200851" cy="1366505"/>
+      </dsp:txXfrm>
+    </dsp:sp>
+  </dsp:spTree>
+</dsp:drawing>
+</file>
+
+<file path=ppt/diagrams/layout1.xml><?xml version="1.0" encoding="utf-8"?>
+<dgm:layoutDef xmlns:dgm="http://schemas.openxmlformats.org/drawingml/2006/diagram" xmlns:a="http://schemas.openxmlformats.org/drawingml/2006/main" uniqueId="urn:microsoft.com/office/officeart/2005/8/layout/hierarchy1">
+  <dgm:title val=""/>
+  <dgm:desc val=""/>
+  <dgm:catLst>
+    <dgm:cat type="hierarchy" pri="2000"/>
+  </dgm:catLst>
+  <dgm:sampData>
+    <dgm:dataModel>
+      <dgm:ptLst>
+        <dgm:pt modelId="0" type="doc"/>
+        <dgm:pt modelId="1">
+          <dgm:prSet phldr="1"/>
+        </dgm:pt>
+        <dgm:pt modelId="2">
+          <dgm:prSet phldr="1"/>
+        </dgm:pt>
+        <dgm:pt modelId="21">
+          <dgm:prSet phldr="1"/>
+        </dgm:pt>
+        <dgm:pt modelId="22">
+          <dgm:prSet phldr="1"/>
+        </dgm:pt>
+        <dgm:pt modelId="3">
+          <dgm:prSet phldr="1"/>
+        </dgm:pt>
+        <dgm:pt modelId="31">
+          <dgm:prSet phldr="1"/>
+        </dgm:pt>
+      </dgm:ptLst>
+      <dgm:cxnLst>
+        <dgm:cxn modelId="4" srcId="0" destId="1" srcOrd="0" destOrd="0"/>
+        <dgm:cxn modelId="5" srcId="1" destId="2" srcOrd="0" destOrd="0"/>
+        <dgm:cxn modelId="6" srcId="1" destId="3" srcOrd="1" destOrd="0"/>
+        <dgm:cxn modelId="23" srcId="2" destId="21" srcOrd="0" destOrd="0"/>
+        <dgm:cxn modelId="24" srcId="2" destId="22" srcOrd="1" destOrd="0"/>
+        <dgm:cxn modelId="33" srcId="3" destId="31" srcOrd="0" destOrd="0"/>
+      </dgm:cxnLst>
+      <dgm:bg/>
+      <dgm:whole/>
+    </dgm:dataModel>
+  </dgm:sampData>
+  <dgm:styleData>
+    <dgm:dataModel>
+      <dgm:ptLst>
+        <dgm:pt modelId="0" type="doc"/>
+        <dgm:pt modelId="1"/>
+        <dgm:pt modelId="11"/>
+        <dgm:pt modelId="12"/>
+      </dgm:ptLst>
+      <dgm:cxnLst>
+        <dgm:cxn modelId="2" srcId="0" destId="1" srcOrd="0" destOrd="0"/>
+        <dgm:cxn modelId="13" srcId="1" destId="11" srcOrd="0" destOrd="0"/>
+        <dgm:cxn modelId="14" srcId="1" destId="12" srcOrd="1" destOrd="0"/>
+      </dgm:cxnLst>
+      <dgm:bg/>
+      <dgm:whole/>
+    </dgm:dataModel>
+  </dgm:styleData>
+  <dgm:clrData>
+    <dgm:dataModel>
+      <dgm:ptLst>
+        <dgm:pt modelId="0" type="doc"/>
+        <dgm:pt modelId="1"/>
+        <dgm:pt modelId="2"/>
+        <dgm:pt modelId="21"/>
+        <dgm:pt modelId="211"/>
+        <dgm:pt modelId="3"/>
+        <dgm:pt modelId="31"/>
+        <dgm:pt modelId="311"/>
+      </dgm:ptLst>
+      <dgm:cxnLst>
+        <dgm:cxn modelId="4" srcId="0" destId="1" srcOrd="0" destOrd="0"/>
+        <dgm:cxn modelId="5" srcId="1" destId="2" srcOrd="0" destOrd="0"/>
+        <dgm:cxn modelId="6" srcId="1" destId="3" srcOrd="1" destOrd="0"/>
+        <dgm:cxn modelId="23" srcId="2" destId="21" srcOrd="0" destOrd="0"/>
+        <dgm:cxn modelId="24" srcId="21" destId="211" srcOrd="0" destOrd="0"/>
+        <dgm:cxn modelId="33" srcId="3" destId="31" srcOrd="0" destOrd="0"/>
+        <dgm:cxn modelId="34" srcId="31" destId="311" srcOrd="0" destOrd="0"/>
+      </dgm:cxnLst>
+      <dgm:bg/>
+      <dgm:whole/>
+    </dgm:dataModel>
+  </dgm:clrData>
+  <dgm:layoutNode name="hierChild1">
+    <dgm:varLst>
+      <dgm:chPref val="1"/>
+      <dgm:dir/>
+      <dgm:animOne val="branch"/>
+      <dgm:animLvl val="lvl"/>
+      <dgm:resizeHandles/>
+    </dgm:varLst>
+    <dgm:choose name="Name0">
+      <dgm:if name="Name1" func="var" arg="dir" op="equ" val="norm">
+        <dgm:alg type="hierChild">
+          <dgm:param type="linDir" val="fromL"/>
+        </dgm:alg>
+      </dgm:if>
+      <dgm:else name="Name2">
+        <dgm:alg type="hierChild">
+          <dgm:param type="linDir" val="fromR"/>
+        </dgm:alg>
+      </dgm:else>
+    </dgm:choose>
+    <dgm:shape xmlns:r="http://schemas.openxmlformats.org/officeDocument/2006/relationships" r:blip="">
+      <dgm:adjLst/>
+    </dgm:shape>
+    <dgm:presOf/>
+    <dgm:constrLst>
+      <dgm:constr type="primFontSz" for="des" ptType="node" op="equ" val="65"/>
+      <dgm:constr type="w" for="des" forName="composite" refType="w"/>
+      <dgm:constr type="h" for="des" forName="composite" refType="w" refFor="des" refForName="composite" fact="0.667"/>
+      <dgm:constr type="w" for="des" forName="composite2" refType="w" refFor="des" refForName="composite"/>
+      <dgm:constr type="h" for="des" forName="composite2" refType="h" refFor="des" refForName="composite"/>
+      <dgm:constr type="w" for="des" forName="composite3" refType="w" refFor="des" refForName="composite"/>
+      <dgm:constr type="h" for="des" forName="composite3" refType="h" refFor="des" refForName="composite"/>
+      <dgm:constr type="w" for="des" forName="composite4" refType="w" refFor="des" refForName="composite"/>
+      <dgm:constr type="h" for="des" forName="composite4" refType="h" refFor="des" refForName="composite"/>
+      <dgm:constr type="w" for="des" forName="composite5" refType="w" refFor="des" refForName="composite"/>
+      <dgm:constr type="h" for="des" forName="composite5" refType="h" refFor="des" refForName="composite"/>
+      <dgm:constr type="sibSp" refType="w" refFor="des" refForName="composite" fact="0.1"/>
+      <dgm:constr type="sibSp" for="des" forName="hierChild2" refType="sibSp"/>
+      <dgm:constr type="sibSp" for="des" forName="hierChild3" refType="sibSp"/>
+      <dgm:constr type="sibSp" for="des" forName="hierChild4" refType="sibSp"/>
+      <dgm:constr type="sibSp" for="des" forName="hierChild5" refType="sibSp"/>
+      <dgm:constr type="sibSp" for="des" forName="hierChild6" refType="sibSp"/>
+      <dgm:constr type="sp" for="des" forName="hierRoot1" refType="h" refFor="des" refForName="composite" fact="0.25"/>
+      <dgm:constr type="sp" for="des" forName="hierRoot2" refType="sp" refFor="des" refForName="hierRoot1"/>
+      <dgm:constr type="sp" for="des" forName="hierRoot3" refType="sp" refFor="des" refForName="hierRoot1"/>
+      <dgm:constr type="sp" for="des" forName="hierRoot4" refType="sp" refFor="des" refForName="hierRoot1"/>
+      <dgm:constr type="sp" for="des" forName="hierRoot5" refType="sp" refFor="des" refForName="hierRoot1"/>
+    </dgm:constrLst>
+    <dgm:ruleLst/>
+    <dgm:forEach name="Name3" axis="ch">
+      <dgm:forEach name="Name4" axis="self" ptType="node">
+        <dgm:layoutNode name="hierRoot1">
+          <dgm:alg type="hierRoot"/>
+          <dgm:shape xmlns:r="http://schemas.openxmlformats.org/officeDocument/2006/relationships" r:blip="">
+            <dgm:adjLst/>
+          </dgm:shape>
+          <dgm:presOf/>
+          <dgm:constrLst>
+            <dgm:constr type="bendDist" for="des" ptType="parTrans" refType="sp" fact="0.5"/>
+          </dgm:constrLst>
+          <dgm:ruleLst/>
+          <dgm:layoutNode name="composite">
+            <dgm:alg type="composite"/>
+            <dgm:shape xmlns:r="http://schemas.openxmlformats.org/officeDocument/2006/relationships" r:blip="">
+              <dgm:adjLst/>
+            </dgm:shape>
+            <dgm:presOf/>
+            <dgm:constrLst>
+              <dgm:constr type="w" for="ch" forName="background" refType="w" fact="0.9"/>
+              <dgm:constr type="h" for="ch" forName="background" refType="w" refFor="ch" refForName="background" fact="0.635"/>
+              <dgm:constr type="t" for="ch" forName="background"/>
+              <dgm:constr type="l" for="ch" forName="background"/>
+              <dgm:constr type="w" for="ch" forName="text" refType="w" fact="0.9"/>
+              <dgm:constr type="h" for="ch" forName="text" refType="w" refFor="ch" refForName="text" fact="0.635"/>
+              <dgm:constr type="t" for="ch" forName="text" refType="w" fact="0.095"/>
+              <dgm:constr type="l" for="ch" forName="text" refType="w" fact="0.1"/>
+            </dgm:constrLst>
+            <dgm:ruleLst/>
+            <dgm:layoutNode name="background" styleLbl="node0" moveWith="text">
+              <dgm:alg type="sp"/>
+              <dgm:shape xmlns:r="http://schemas.openxmlformats.org/officeDocument/2006/relationships" type="roundRect" r:blip="">
+                <dgm:adjLst>
+                  <dgm:adj idx="1" val="0.1"/>
+                </dgm:adjLst>
+              </dgm:shape>
+              <dgm:presOf/>
+              <dgm:constrLst/>
+              <dgm:ruleLst/>
+            </dgm:layoutNode>
+            <dgm:layoutNode name="text" styleLbl="fgAcc0">
+              <dgm:varLst>
+                <dgm:chPref val="3"/>
+              </dgm:varLst>
+              <dgm:alg type="tx"/>
+              <dgm:shape xmlns:r="http://schemas.openxmlformats.org/officeDocument/2006/relationships" type="roundRect" r:blip="">
+                <dgm:adjLst>
+                  <dgm:adj idx="1" val="0.1"/>
+                </dgm:adjLst>
+              </dgm:shape>
+              <dgm:presOf axis="self"/>
+              <dgm:constrLst>
+                <dgm:constr type="tMarg" refType="primFontSz" fact="0.3"/>
+                <dgm:constr type="bMarg" refType="primFontSz" fact="0.3"/>
+                <dgm:constr type="lMarg" refType="primFontSz" fact="0.3"/>
+                <dgm:constr type="rMarg" refType="primFontSz" fact="0.3"/>
+              </dgm:constrLst>
+              <dgm:ruleLst>
+                <dgm:rule type="primFontSz" val="5" fact="NaN" max="NaN"/>
+              </dgm:ruleLst>
+            </dgm:layoutNode>
+          </dgm:layoutNode>
+          <dgm:layoutNode name="hierChild2">
+            <dgm:choose name="Name5">
+              <dgm:if name="Name6" func="var" arg="dir" op="equ" val="norm">
+                <dgm:alg type="hierChild">
+                  <dgm:param type="linDir" val="fromL"/>
+                </dgm:alg>
+              </dgm:if>
+              <dgm:else name="Name7">
+                <dgm:alg type="hierChild">
+                  <dgm:param type="linDir" val="fromR"/>
+                </dgm:alg>
+              </dgm:else>
+            </dgm:choose>
+            <dgm:shape xmlns:r="http://schemas.openxmlformats.org/officeDocument/2006/relationships" r:blip="">
+              <dgm:adjLst/>
+            </dgm:shape>
+            <dgm:presOf/>
+            <dgm:constrLst/>
+            <dgm:ruleLst/>
+            <dgm:forEach name="Name8" axis="ch">
+              <dgm:forEach name="Name9" axis="self" ptType="parTrans" cnt="1">
+                <dgm:layoutNode name="Name10">
+                  <dgm:alg type="conn">
+                    <dgm:param type="dim" val="1D"/>
+                    <dgm:param type="endSty" val="noArr"/>
+                    <dgm:param type="connRout" val="bend"/>
+                    <dgm:param type="bendPt" val="end"/>
+                    <dgm:param type="begPts" val="bCtr"/>
+                    <dgm:param type="endPts" val="tCtr"/>
+                    <dgm:param type="srcNode" val="background"/>
+                    <dgm:param type="dstNode" val="background2"/>
+                  </dgm:alg>
+                  <dgm:shape xmlns:r="http://schemas.openxmlformats.org/officeDocument/2006/relationships" type="conn" r:blip="" zOrderOff="-999">
+                    <dgm:adjLst/>
+                  </dgm:shape>
+                  <dgm:presOf axis="self"/>
+                  <dgm:constrLst>
+                    <dgm:constr type="begPad"/>
+                    <dgm:constr type="endPad"/>
+                  </dgm:constrLst>
+                  <dgm:ruleLst/>
+                </dgm:layoutNode>
+              </dgm:forEach>
+              <dgm:forEach name="Name11" axis="self" ptType="node">
+                <dgm:layoutNode name="hierRoot2">
+                  <dgm:alg type="hierRoot"/>
+                  <dgm:shape xmlns:r="http://schemas.openxmlformats.org/officeDocument/2006/relationships" r:blip="">
+                    <dgm:adjLst/>
+                  </dgm:shape>
+                  <dgm:presOf/>
+                  <dgm:constrLst>
+                    <dgm:constr type="bendDist" for="des" ptType="parTrans" refType="sp" fact="0.5"/>
+                  </dgm:constrLst>
+                  <dgm:ruleLst/>
+                  <dgm:layoutNode name="composite2">
+                    <dgm:alg type="composite"/>
+                    <dgm:shape xmlns:r="http://schemas.openxmlformats.org/officeDocument/2006/relationships" r:blip="">
+                      <dgm:adjLst/>
+                    </dgm:shape>
+                    <dgm:presOf/>
+                    <dgm:constrLst>
+                      <dgm:constr type="w" for="ch" forName="background2" refType="w" fact="0.9"/>
+                      <dgm:constr type="h" for="ch" forName="background2" refType="w" refFor="ch" refForName="background2" fact="0.635"/>
+                      <dgm:constr type="t" for="ch" forName="background2"/>
+                      <dgm:constr type="l" for="ch" forName="background2"/>
+                      <dgm:constr type="w" for="ch" forName="text2" refType="w" fact="0.9"/>
+                      <dgm:constr type="h" for="ch" forName="text2" refType="w" refFor="ch" refForName="text2" fact="0.635"/>
+                      <dgm:constr type="t" for="ch" forName="text2" refType="w" fact="0.095"/>
+                      <dgm:constr type="l" for="ch" forName="text2" refType="w" fact="0.1"/>
+                    </dgm:constrLst>
+                    <dgm:ruleLst/>
+                    <dgm:layoutNode name="background2" moveWith="text2">
+                      <dgm:alg type="sp"/>
+                      <dgm:shape xmlns:r="http://schemas.openxmlformats.org/officeDocument/2006/relationships" type="roundRect" r:blip="">
+                        <dgm:adjLst>
+                          <dgm:adj idx="1" val="0.1"/>
+                        </dgm:adjLst>
+                      </dgm:shape>
+                      <dgm:presOf/>
+                      <dgm:constrLst/>
+                      <dgm:ruleLst/>
+                    </dgm:layoutNode>
+                    <dgm:layoutNode name="text2" styleLbl="fgAcc2">
+                      <dgm:varLst>
+                        <dgm:chPref val="3"/>
+                      </dgm:varLst>
+                      <dgm:alg type="tx"/>
+                      <dgm:shape xmlns:r="http://schemas.openxmlformats.org/officeDocument/2006/relationships" type="roundRect" r:blip="">
+                        <dgm:adjLst>
+                          <dgm:adj idx="1" val="0.1"/>
+                        </dgm:adjLst>
+                      </dgm:shape>
+                      <dgm:presOf axis="self"/>
+                      <dgm:constrLst>
+                        <dgm:constr type="tMarg" refType="primFontSz" fact="0.3"/>
+                        <dgm:constr type="bMarg" refType="primFontSz" fact="0.3"/>
+                        <dgm:constr type="lMarg" refType="primFontSz" fact="0.3"/>
+                        <dgm:constr type="rMarg" refType="primFontSz" fact="0.3"/>
+                      </dgm:constrLst>
+                      <dgm:ruleLst>
+                        <dgm:rule type="primFontSz" val="5" fact="NaN" max="NaN"/>
+                      </dgm:ruleLst>
+                    </dgm:layoutNode>
+                  </dgm:layoutNode>
+                  <dgm:layoutNode name="hierChild3">
+                    <dgm:choose name="Name12">
+                      <dgm:if name="Name13" func="var" arg="dir" op="equ" val="norm">
+                        <dgm:alg type="hierChild">
+                          <dgm:param type="linDir" val="fromL"/>
+                        </dgm:alg>
+                      </dgm:if>
+                      <dgm:else name="Name14">
+                        <dgm:alg type="hierChild">
+                          <dgm:param type="linDir" val="fromR"/>
+                        </dgm:alg>
+                      </dgm:else>
+                    </dgm:choose>
+                    <dgm:shape xmlns:r="http://schemas.openxmlformats.org/officeDocument/2006/relationships" r:blip="">
+                      <dgm:adjLst/>
+                    </dgm:shape>
+                    <dgm:presOf/>
+                    <dgm:constrLst/>
+                    <dgm:ruleLst/>
+                    <dgm:forEach name="Name15" axis="ch">
+                      <dgm:forEach name="Name16" axis="self" ptType="parTrans" cnt="1">
+                        <dgm:layoutNode name="Name17">
+                          <dgm:alg type="conn">
+                            <dgm:param type="dim" val="1D"/>
+                            <dgm:param type="endSty" val="noArr"/>
+                            <dgm:param type="connRout" val="bend"/>
+                            <dgm:param type="bendPt" val="end"/>
+                            <dgm:param type="begPts" val="bCtr"/>
+                            <dgm:param type="endPts" val="tCtr"/>
+                            <dgm:param type="srcNode" val="background2"/>
+                            <dgm:param type="dstNode" val="background3"/>
+                          </dgm:alg>
+                          <dgm:shape xmlns:r="http://schemas.openxmlformats.org/officeDocument/2006/relationships" type="conn" r:blip="" zOrderOff="-999">
+                            <dgm:adjLst/>
+                          </dgm:shape>
+                          <dgm:presOf axis="self"/>
+                          <dgm:constrLst>
+                            <dgm:constr type="begPad"/>
+                            <dgm:constr type="endPad"/>
+                          </dgm:constrLst>
+                          <dgm:ruleLst/>
+                        </dgm:layoutNode>
+                      </dgm:forEach>
+                      <dgm:forEach name="Name18" axis="self" ptType="node">
+                        <dgm:layoutNode name="hierRoot3">
+                          <dgm:alg type="hierRoot"/>
+                          <dgm:shape xmlns:r="http://schemas.openxmlformats.org/officeDocument/2006/relationships" r:blip="">
+                            <dgm:adjLst/>
+                          </dgm:shape>
+                          <dgm:presOf/>
+                          <dgm:constrLst>
+                            <dgm:constr type="bendDist" for="des" ptType="parTrans" refType="sp" fact="0.5"/>
+                          </dgm:constrLst>
+                          <dgm:ruleLst/>
+                          <dgm:layoutNode name="composite3">
+                            <dgm:alg type="composite"/>
+                            <dgm:shape xmlns:r="http://schemas.openxmlformats.org/officeDocument/2006/relationships" r:blip="">
+                              <dgm:adjLst/>
+                            </dgm:shape>
+                            <dgm:presOf/>
+                            <dgm:constrLst>
+                              <dgm:constr type="w" for="ch" forName="background3" refType="w" fact="0.9"/>
+                              <dgm:constr type="h" for="ch" forName="background3" refType="w" refFor="ch" refForName="background3" fact="0.635"/>
+                              <dgm:constr type="t" for="ch" forName="background3"/>
+                              <dgm:constr type="l" for="ch" forName="background3"/>
+                              <dgm:constr type="w" for="ch" forName="text3" refType="w" fact="0.9"/>
+                              <dgm:constr type="h" for="ch" forName="text3" refType="w" refFor="ch" refForName="text3" fact="0.635"/>
+                              <dgm:constr type="t" for="ch" forName="text3" refType="w" fact="0.095"/>
+                              <dgm:constr type="l" for="ch" forName="text3" refType="w" fact="0.1"/>
+                            </dgm:constrLst>
+                            <dgm:ruleLst/>
+                            <dgm:layoutNode name="background3" moveWith="text3">
+                              <dgm:alg type="sp"/>
+                              <dgm:shape xmlns:r="http://schemas.openxmlformats.org/officeDocument/2006/relationships" type="roundRect" r:blip="">
+                                <dgm:adjLst>
+                                  <dgm:adj idx="1" val="0.1"/>
+                                </dgm:adjLst>
+                              </dgm:shape>
+                              <dgm:presOf/>
+                              <dgm:constrLst/>
+                              <dgm:ruleLst/>
+                            </dgm:layoutNode>
+                            <dgm:layoutNode name="text3" styleLbl="fgAcc3">
+                              <dgm:varLst>
+                                <dgm:chPref val="3"/>
+                              </dgm:varLst>
+                              <dgm:alg type="tx"/>
+                              <dgm:shape xmlns:r="http://schemas.openxmlformats.org/officeDocument/2006/relationships" type="roundRect" r:blip="">
+                                <dgm:adjLst>
+                                  <dgm:adj idx="1" val="0.1"/>
+                                </dgm:adjLst>
+                              </dgm:shape>
+                              <dgm:presOf axis="self"/>
+                              <dgm:constrLst>
+                                <dgm:constr type="tMarg" refType="primFontSz" fact="0.3"/>
+                                <dgm:constr type="bMarg" refType="primFontSz" fact="0.3"/>
+                                <dgm:constr type="lMarg" refType="primFontSz" fact="0.3"/>
+                                <dgm:constr type="rMarg" refType="primFontSz" fact="0.3"/>
+                              </dgm:constrLst>
+                              <dgm:ruleLst>
+                                <dgm:rule type="primFontSz" val="5" fact="NaN" max="NaN"/>
+                              </dgm:ruleLst>
+                            </dgm:layoutNode>
+                          </dgm:layoutNode>
+                          <dgm:layoutNode name="hierChild4">
+                            <dgm:choose name="Name19">
+                              <dgm:if name="Name20" func="var" arg="dir" op="equ" val="norm">
+                                <dgm:alg type="hierChild">
+                                  <dgm:param type="linDir" val="fromL"/>
+                                </dgm:alg>
+                              </dgm:if>
+                              <dgm:else name="Name21">
+                                <dgm:alg type="hierChild">
+                                  <dgm:param type="linDir" val="fromR"/>
+                                </dgm:alg>
+                              </dgm:else>
+                            </dgm:choose>
+                            <dgm:shape xmlns:r="http://schemas.openxmlformats.org/officeDocument/2006/relationships" r:blip="">
+                              <dgm:adjLst/>
+                            </dgm:shape>
+                            <dgm:presOf/>
+                            <dgm:constrLst/>
+                            <dgm:ruleLst/>
+                            <dgm:forEach name="repeat" axis="ch">
+                              <dgm:forEach name="Name22" axis="self" ptType="parTrans" cnt="1">
+                                <dgm:layoutNode name="Name23">
+                                  <dgm:choose name="Name24">
+                                    <dgm:if name="Name25" axis="self" func="depth" op="lte" val="4">
+                                      <dgm:alg type="conn">
+                                        <dgm:param type="dim" val="1D"/>
+                                        <dgm:param type="endSty" val="noArr"/>
+                                        <dgm:param type="connRout" val="bend"/>
+                                        <dgm:param type="bendPt" val="end"/>
+                                        <dgm:param type="begPts" val="bCtr"/>
+                                        <dgm:param type="endPts" val="tCtr"/>
+                                        <dgm:param type="srcNode" val="background3"/>
+                                        <dgm:param type="dstNode" val="background4"/>
+                                      </dgm:alg>
+                                    </dgm:if>
+                                    <dgm:else name="Name26">
+                                      <dgm:alg type="conn">
+                                        <dgm:param type="dim" val="1D"/>
+                                        <dgm:param type="endSty" val="noArr"/>
+                                        <dgm:param type="connRout" val="bend"/>
+                                        <dgm:param type="bendPt" val="end"/>
+                                        <dgm:param type="begPts" val="bCtr"/>
+                                        <dgm:param type="endPts" val="tCtr"/>
+                                        <dgm:param type="srcNode" val="background4"/>
+                                        <dgm:param type="dstNode" val="background4"/>
+                                      </dgm:alg>
+                                    </dgm:else>
+                                  </dgm:choose>
+                                  <dgm:shape xmlns:r="http://schemas.openxmlformats.org/officeDocument/2006/relationships" type="conn" r:blip="" zOrderOff="-999">
+                                    <dgm:adjLst/>
+                                  </dgm:shape>
+                                  <dgm:presOf axis="self"/>
+                                  <dgm:constrLst>
+                                    <dgm:constr type="begPad"/>
+                                    <dgm:constr type="endPad"/>
+                                  </dgm:constrLst>
+                                  <dgm:ruleLst/>
+                                </dgm:layoutNode>
+                              </dgm:forEach>
+                              <dgm:forEach name="Name27" axis="self" ptType="node">
+                                <dgm:layoutNode name="hierRoot4">
+                                  <dgm:alg type="hierRoot"/>
+                                  <dgm:shape xmlns:r="http://schemas.openxmlformats.org/officeDocument/2006/relationships" r:blip="">
+                                    <dgm:adjLst/>
+                                  </dgm:shape>
+                                  <dgm:presOf/>
+                                  <dgm:constrLst>
+                                    <dgm:constr type="bendDist" for="des" ptType="parTrans" refType="sp" fact="0.5"/>
+                                  </dgm:constrLst>
+                                  <dgm:ruleLst/>
+                                  <dgm:layoutNode name="composite4">
+                                    <dgm:alg type="composite"/>
+                                    <dgm:shape xmlns:r="http://schemas.openxmlformats.org/officeDocument/2006/relationships" r:blip="">
+                                      <dgm:adjLst/>
+                                    </dgm:shape>
+                                    <dgm:presOf/>
+                                    <dgm:constrLst>
+                                      <dgm:constr type="w" for="ch" forName="background4" refType="w" fact="0.9"/>
+                                      <dgm:constr type="h" for="ch" forName="background4" refType="w" refFor="ch" refForName="background4" fact="0.635"/>
+                                      <dgm:constr type="t" for="ch" forName="background4"/>
+                                      <dgm:constr type="l" for="ch" forName="background4"/>
+                                      <dgm:constr type="w" for="ch" forName="text4" refType="w" fact="0.9"/>
+                                      <dgm:constr type="h" for="ch" forName="text4" refType="w" refFor="ch" refForName="text4" fact="0.635"/>
+                                      <dgm:constr type="t" for="ch" forName="text4" refType="w" fact="0.095"/>
+                                      <dgm:constr type="l" for="ch" forName="text4" refType="w" fact="0.1"/>
+                                    </dgm:constrLst>
+                                    <dgm:ruleLst/>
+                                    <dgm:layoutNode name="background4" moveWith="text4">
+                                      <dgm:alg type="sp"/>
+                                      <dgm:shape xmlns:r="http://schemas.openxmlformats.org/officeDocument/2006/relationships" type="roundRect" r:blip="">
+                                        <dgm:adjLst>
+                                          <dgm:adj idx="1" val="0.1"/>
+                                        </dgm:adjLst>
+                                      </dgm:shape>
+                                      <dgm:presOf/>
+                                      <dgm:constrLst/>
+                                      <dgm:ruleLst/>
+                                    </dgm:layoutNode>
+                                    <dgm:layoutNode name="text4" styleLbl="fgAcc4">
+                                      <dgm:varLst>
+                                        <dgm:chPref val="3"/>
+                                      </dgm:varLst>
+                                      <dgm:alg type="tx"/>
+                                      <dgm:shape xmlns:r="http://schemas.openxmlformats.org/officeDocument/2006/relationships" type="roundRect" r:blip="">
+                                        <dgm:adjLst>
+                                          <dgm:adj idx="1" val="0.1"/>
+                                        </dgm:adjLst>
+                                      </dgm:shape>
+                                      <dgm:presOf axis="self"/>
+                                      <dgm:constrLst>
+                                        <dgm:constr type="tMarg" refType="primFontSz" fact="0.3"/>
+                                        <dgm:constr type="bMarg" refType="primFontSz" fact="0.3"/>
+                                        <dgm:constr type="lMarg" refType="primFontSz" fact="0.3"/>
+                                        <dgm:constr type="rMarg" refType="primFontSz" fact="0.3"/>
+                                      </dgm:constrLst>
+                                      <dgm:ruleLst>
+                                        <dgm:rule type="primFontSz" val="5" fact="NaN" max="NaN"/>
+                                      </dgm:ruleLst>
+                                    </dgm:layoutNode>
+                                  </dgm:layoutNode>
+                                  <dgm:layoutNode name="hierChild5">
+                                    <dgm:choose name="Name28">
+                                      <dgm:if name="Name29" func="var" arg="dir" op="equ" val="norm">
+                                        <dgm:alg type="hierChild">
+                                          <dgm:param type="linDir" val="fromL"/>
+                                        </dgm:alg>
+                                      </dgm:if>
+                                      <dgm:else name="Name30">
+                                        <dgm:alg type="hierChild">
+                                          <dgm:param type="linDir" val="fromR"/>
+                                        </dgm:alg>
+                                      </dgm:else>
+                                    </dgm:choose>
+                                    <dgm:shape xmlns:r="http://schemas.openxmlformats.org/officeDocument/2006/relationships" r:blip="">
+                                      <dgm:adjLst/>
+                                    </dgm:shape>
+                                    <dgm:presOf/>
+                                    <dgm:constrLst/>
+                                    <dgm:ruleLst/>
+                                    <dgm:forEach name="Name31" ref="repeat"/>
+                                  </dgm:layoutNode>
+                                </dgm:layoutNode>
+                              </dgm:forEach>
+                            </dgm:forEach>
+                          </dgm:layoutNode>
+                        </dgm:layoutNode>
+                      </dgm:forEach>
+                    </dgm:forEach>
+                  </dgm:layoutNode>
+                </dgm:layoutNode>
+              </dgm:forEach>
+            </dgm:forEach>
+          </dgm:layoutNode>
+        </dgm:layoutNode>
+      </dgm:forEach>
+    </dgm:forEach>
+  </dgm:layoutNode>
+</dgm:layoutDef>
+</file>
+
+<file path=ppt/diagrams/quickStyle1.xml><?xml version="1.0" encoding="utf-8"?>
+<dgm:styleDef xmlns:dgm="http://schemas.openxmlformats.org/drawingml/2006/diagram" xmlns:a="http://schemas.openxmlformats.org/drawingml/2006/main" uniqueId="urn:microsoft.com/office/officeart/2005/8/quickstyle/simple1">
+  <dgm:title val=""/>
+  <dgm:desc val=""/>
+  <dgm:catLst>
+    <dgm:cat type="simple" pri="10100"/>
+  </dgm:catLst>
+  <dgm:scene3d>
+    <a:camera prst="orthographicFront"/>
+    <a:lightRig rig="threePt" dir="t"/>
+  </dgm:scene3d>
+  <dgm:styleLbl name="node0">
+    <dgm:scene3d>
+      <a:camera prst="orthographicFront"/>
+      <a:lightRig rig="threePt" dir="t"/>
+    </dgm:scene3d>
+    <dgm:sp3d/>
+    <dgm:txPr/>
+    <dgm:style>
+      <a:lnRef idx="2">
+        <a:scrgbClr r="0" g="0" b="0"/>
+      </a:lnRef>
+      <a:fillRef idx="1">
+        <a:scrgbClr r="0" g="0" b="0"/>
+      </a:fillRef>
+      <a:effectRef idx="0">
+        <a:scrgbClr r="0" g="0" b="0"/>
+      </a:effectRef>
+      <a:fontRef idx="minor">
+        <a:schemeClr val="lt1"/>
+      </a:fontRef>
+    </dgm:style>
+  </dgm:styleLbl>
+  <dgm:styleLbl name="lnNode1">
+    <dgm:scene3d>
+      <a:camera prst="orthographicFront"/>
+      <a:lightRig rig="threePt" dir="t"/>
+    </dgm:scene3d>
+    <dgm:sp3d/>
+    <dgm:txPr/>
+    <dgm:style>
+      <a:lnRef idx="2">
+        <a:scrgbClr r="0" g="0" b="0"/>
+      </a:lnRef>
+      <a:fillRef idx="1">
+        <a:scrgbClr r="0" g="0" b="0"/>
+      </a:fillRef>
+      <a:effectRef idx="0">
+        <a:scrgbClr r="0" g="0" b="0"/>
+      </a:effectRef>
+      <a:fontRef idx="minor">
+        <a:schemeClr val="lt1"/>
+      </a:fontRef>
+    </dgm:style>
+  </dgm:styleLbl>
+  <dgm:styleLbl name="vennNode1">
+    <dgm:scene3d>
+      <a:camera prst="orthographicFront"/>
+      <a:lightRig rig="threePt" dir="t"/>
+    </dgm:scene3d>
+    <dgm:sp3d/>
+    <dgm:txPr/>
+    <dgm:style>
+      <a:lnRef idx="2">
+        <a:scrgbClr r="0" g="0" b="0"/>
+      </a:lnRef>
+      <a:fillRef idx="1">
+        <a:scrgbClr r="0" g="0" b="0"/>
+      </a:fillRef>
+      <a:effectRef idx="0">
+        <a:scrgbClr r="0" g="0" b="0"/>
+      </a:effectRef>
+      <a:fontRef idx="minor">
+        <a:schemeClr val="tx1"/>
+      </a:fontRef>
+    </dgm:style>
+  </dgm:styleLbl>
+  <dgm:styleLbl name="alignNode1">
+    <dgm:scene3d>
+      <a:camera prst="orthographicFront"/>
+      <a:lightRig rig="threePt" dir="t"/>
+    </dgm:scene3d>
+    <dgm:sp3d/>
+    <dgm:txPr/>
+    <dgm:style>
+      <a:lnRef idx="2">
+        <a:scrgbClr r="0" g="0" b="0"/>
+      </a:lnRef>
+      <a:fillRef idx="1">
+        <a:scrgbClr r="0" g="0" b="0"/>
+      </a:fillRef>
+      <a:effectRef idx="0">
+        <a:scrgbClr r="0" g="0" b="0"/>
+      </a:effectRef>
+      <a:fontRef idx="minor">
+        <a:schemeClr val="lt1"/>
+      </a:fontRef>
+    </dgm:style>
+  </dgm:styleLbl>
+  <dgm:styleLbl name="node1">
+    <dgm:scene3d>
+      <a:camera prst="orthographicFront"/>
+      <a:lightRig rig="threePt" dir="t"/>
+    </dgm:scene3d>
+    <dgm:sp3d/>
+    <dgm:txPr/>
+    <dgm:style>
+      <a:lnRef idx="2">
+        <a:scrgbClr r="0" g="0" b="0"/>
+      </a:lnRef>
+      <a:fillRef idx="1">
+        <a:scrgbClr r="0" g="0" b="0"/>
+      </a:fillRef>
+      <a:effectRef idx="0">
+        <a:scrgbClr r="0" g="0" b="0"/>
+      </a:effectRef>
+      <a:fontRef idx="minor">
+        <a:schemeClr val="lt1"/>
+      </a:fontRef>
+    </dgm:style>
+  </dgm:styleLbl>
+  <dgm:styleLbl name="node2">
+    <dgm:scene3d>
+      <a:camera prst="orthographicFront"/>
+      <a:lightRig rig="threePt" dir="t"/>
+    </dgm:scene3d>
+    <dgm:sp3d/>
+    <dgm:txPr/>
+    <dgm:style>
+      <a:lnRef idx="2">
+        <a:scrgbClr r="0" g="0" b="0"/>
+      </a:lnRef>
+      <a:fillRef idx="1">
+        <a:scrgbClr r="0" g="0" b="0"/>
+      </a:fillRef>
+      <a:effectRef idx="0">
+        <a:scrgbClr r="0" g="0" b="0"/>
+      </a:effectRef>
+      <a:fontRef idx="minor">
+        <a:schemeClr val="lt1"/>
+      </a:fontRef>
+    </dgm:style>
+  </dgm:styleLbl>
+  <dgm:styleLbl name="node3">
+    <dgm:scene3d>
+      <a:camera prst="orthographicFront"/>
+      <a:lightRig rig="threePt" dir="t"/>
+    </dgm:scene3d>
+    <dgm:sp3d/>
+    <dgm:txPr/>
+    <dgm:style>
+      <a:lnRef idx="2">
+        <a:scrgbClr r="0" g="0" b="0"/>
+      </a:lnRef>
+      <a:fillRef idx="1">
+        <a:scrgbClr r="0" g="0" b="0"/>
+      </a:fillRef>
+      <a:effectRef idx="0">
+        <a:scrgbClr r="0" g="0" b="0"/>
+      </a:effectRef>
+      <a:fontRef idx="minor">
+        <a:schemeClr val="lt1"/>
+      </a:fontRef>
+    </dgm:style>
+  </dgm:styleLbl>
+  <dgm:styleLbl name="node4">
+    <dgm:scene3d>
+      <a:camera prst="orthographicFront"/>
+      <a:lightRig rig="threePt" dir="t"/>
+    </dgm:scene3d>
+    <dgm:sp3d/>
+    <dgm:txPr/>
+    <dgm:style>
+      <a:lnRef idx="2">
+        <a:scrgbClr r="0" g="0" b="0"/>
+      </a:lnRef>
+      <a:fillRef idx="1">
+        <a:scrgbClr r="0" g="0" b="0"/>
+      </a:fillRef>
+      <a:effectRef idx="0">
+        <a:scrgbClr r="0" g="0" b="0"/>
+      </a:effectRef>
+      <a:fontRef idx="minor">
+        <a:schemeClr val="lt1"/>
+      </a:fontRef>
+    </dgm:style>
+  </dgm:styleLbl>
+  <dgm:styleLbl name="fgImgPlace1">
+    <dgm:scene3d>
+      <a:camera prst="orthographicFront"/>
+      <a:lightRig rig="threePt" dir="t"/>
+    </dgm:scene3d>
+    <dgm:sp3d/>
+    <dgm:txPr/>
+    <dgm:style>
+      <a:lnRef idx="2">
+        <a:scrgbClr r="0" g="0" b="0"/>
+      </a:lnRef>
+      <a:fillRef idx="1">
+        <a:scrgbClr r="0" g="0" b="0"/>
+      </a:fillRef>
+      <a:effectRef idx="0">
+        <a:scrgbClr r="0" g="0" b="0"/>
+      </a:effectRef>
+      <a:fontRef idx="minor"/>
+    </dgm:style>
+  </dgm:styleLbl>
+  <dgm:styleLbl name="alignImgPlace1">
+    <dgm:scene3d>
+      <a:camera prst="orthographicFront"/>
+      <a:lightRig rig="threePt" dir="t"/>
+    </dgm:scene3d>
+    <dgm:sp3d/>
+    <dgm:txPr/>
+    <dgm:style>
+      <a:lnRef idx="2">
+        <a:scrgbClr r="0" g="0" b="0"/>
+      </a:lnRef>
+      <a:fillRef idx="1">
+        <a:scrgbClr r="0" g="0" b="0"/>
+      </a:fillRef>
+      <a:effectRef idx="0">
+        <a:scrgbClr r="0" g="0" b="0"/>
+      </a:effectRef>
+      <a:fontRef idx="minor"/>
+    </dgm:style>
+  </dgm:styleLbl>
+  <dgm:styleLbl name="bgImgPlace1">
+    <dgm:scene3d>
+      <a:camera prst="orthographicFront"/>
+      <a:lightRig rig="threePt" dir="t"/>
+    </dgm:scene3d>
+    <dgm:sp3d/>
+    <dgm:txPr/>
+    <dgm:style>
+      <a:lnRef idx="2">
+        <a:scrgbClr r="0" g="0" b="0"/>
+      </a:lnRef>
+      <a:fillRef idx="1">
+        <a:scrgbClr r="0" g="0" b="0"/>
+      </a:fillRef>
+      <a:effectRef idx="0">
+        <a:scrgbClr r="0" g="0" b="0"/>
+      </a:effectRef>
+      <a:fontRef idx="minor"/>
+    </dgm:style>
+  </dgm:styleLbl>
+  <dgm:styleLbl name="sibTrans2D1">
+    <dgm:scene3d>
+      <a:camera prst="orthographicFront"/>
+      <a:lightRig rig="threePt" dir="t"/>
+    </dgm:scene3d>
+    <dgm:sp3d/>
+    <dgm:txPr/>
+    <dgm:style>
+      <a:lnRef idx="0">
+        <a:scrgbClr r="0" g="0" b="0"/>
+      </a:lnRef>
+      <a:fillRef idx="1">
+        <a:scrgbClr r="0" g="0" b="0"/>
+      </a:fillRef>
+      <a:effectRef idx="0">
+        <a:scrgbClr r="0" g="0" b="0"/>
+      </a:effectRef>
+      <a:fontRef idx="minor">
+        <a:schemeClr val="lt1"/>
+      </a:fontRef>
+    </dgm:style>
+  </dgm:styleLbl>
+  <dgm:styleLbl name="fgSibTrans2D1">
+    <dgm:scene3d>
+      <a:camera prst="orthographicFront"/>
+      <a:lightRig rig="threePt" dir="t"/>
+    </dgm:scene3d>
+    <dgm:sp3d/>
+    <dgm:txPr/>
+    <dgm:style>
+      <a:lnRef idx="0">
+        <a:scrgbClr r="0" g="0" b="0"/>
+      </a:lnRef>
+      <a:fillRef idx="1">
+        <a:scrgbClr r="0" g="0" b="0"/>
+      </a:fillRef>
+      <a:effectRef idx="0">
+        <a:scrgbClr r="0" g="0" b="0"/>
+      </a:effectRef>
+      <a:fontRef idx="minor">
+        <a:schemeClr val="lt1"/>
+      </a:fontRef>
+    </dgm:style>
+  </dgm:styleLbl>
+  <dgm:styleLbl name="bgSibTrans2D1">
+    <dgm:scene3d>
+      <a:camera prst="orthographicFront"/>
+      <a:lightRig rig="threePt" dir="t"/>
+    </dgm:scene3d>
+    <dgm:sp3d/>
+    <dgm:txPr/>
+    <dgm:style>
+      <a:lnRef idx="0">
+        <a:scrgbClr r="0" g="0" b="0"/>
+      </a:lnRef>
+      <a:fillRef idx="1">
+        <a:scrgbClr r="0" g="0" b="0"/>
+      </a:fillRef>
+      <a:effectRef idx="0">
+        <a:scrgbClr r="0" g="0" b="0"/>
+      </a:effectRef>
+      <a:fontRef idx="minor">
+        <a:schemeClr val="lt1"/>
+      </a:fontRef>
+    </dgm:style>
+  </dgm:styleLbl>
+  <dgm:styleLbl name="sibTrans1D1">
+    <dgm:scene3d>
+      <a:camera prst="orthographicFront"/>
+      <a:lightRig rig="threePt" dir="t"/>
+    </dgm:scene3d>
+    <dgm:sp3d/>
+    <dgm:txPr/>
+    <dgm:style>
+      <a:lnRef idx="1">
+        <a:scrgbClr r="0" g="0" b="0"/>
+      </a:lnRef>
+      <a:fillRef idx="0">
+        <a:scrgbClr r="0" g="0" b="0"/>
+      </a:fillRef>
+      <a:effectRef idx="0">
+        <a:scrgbClr r="0" g="0" b="0"/>
+      </a:effectRef>
+      <a:fontRef idx="minor"/>
+    </dgm:style>
+  </dgm:styleLbl>
+  <dgm:styleLbl name="callout">
+    <dgm:scene3d>
+      <a:camera prst="orthographicFront"/>
+      <a:lightRig rig="threePt" dir="t"/>
+    </dgm:scene3d>
+    <dgm:sp3d/>
+    <dgm:txPr/>
+    <dgm:style>
+      <a:lnRef idx="2">
+        <a:scrgbClr r="0" g="0" b="0"/>
+      </a:lnRef>
+      <a:fillRef idx="1">
+        <a:scrgbClr r="0" g="0" b="0"/>
+      </a:fillRef>
+      <a:effectRef idx="0">
+        <a:scrgbClr r="0" g="0" b="0"/>
+      </a:effectRef>
+      <a:fontRef idx="minor"/>
+    </dgm:style>
+  </dgm:styleLbl>
+  <dgm:styleLbl name="asst0">
+    <dgm:scene3d>
+      <a:camera prst="orthographicFront"/>
+      <a:lightRig rig="threePt" dir="t"/>
+    </dgm:scene3d>
+    <dgm:sp3d/>
+    <dgm:txPr/>
+    <dgm:style>
+      <a:lnRef idx="2">
+        <a:scrgbClr r="0" g="0" b="0"/>
+      </a:lnRef>
+      <a:fillRef idx="1">
+        <a:scrgbClr r="0" g="0" b="0"/>
+      </a:fillRef>
+      <a:effectRef idx="0">
+        <a:scrgbClr r="0" g="0" b="0"/>
+      </a:effectRef>
+      <a:fontRef idx="minor">
+        <a:schemeClr val="lt1"/>
+      </a:fontRef>
+    </dgm:style>
+  </dgm:styleLbl>
+  <dgm:styleLbl name="asst1">
+    <dgm:scene3d>
+      <a:camera prst="orthographicFront"/>
+      <a:lightRig rig="threePt" dir="t"/>
+    </dgm:scene3d>
+    <dgm:sp3d/>
+    <dgm:txPr/>
+    <dgm:style>
+      <a:lnRef idx="2">
+        <a:scrgbClr r="0" g="0" b="0"/>
+      </a:lnRef>
+      <a:fillRef idx="1">
+        <a:scrgbClr r="0" g="0" b="0"/>
+      </a:fillRef>
+      <a:effectRef idx="0">
+        <a:scrgbClr r="0" g="0" b="0"/>
+      </a:effectRef>
+      <a:fontRef idx="minor">
+        <a:schemeClr val="lt1"/>
+      </a:fontRef>
+    </dgm:style>
+  </dgm:styleLbl>
+  <dgm:styleLbl name="asst2">
+    <dgm:scene3d>
+      <a:camera prst="orthographicFront"/>
+      <a:lightRig rig="threePt" dir="t"/>
+    </dgm:scene3d>
+    <dgm:sp3d/>
+    <dgm:txPr/>
+    <dgm:style>
+      <a:lnRef idx="2">
+        <a:scrgbClr r="0" g="0" b="0"/>
+      </a:lnRef>
+      <a:fillRef idx="1">
+        <a:scrgbClr r="0" g="0" b="0"/>
+      </a:fillRef>
+      <a:effectRef idx="0">
+        <a:scrgbClr r="0" g="0" b="0"/>
+      </a:effectRef>
+      <a:fontRef idx="minor">
+        <a:schemeClr val="lt1"/>
+      </a:fontRef>
+    </dgm:style>
+  </dgm:styleLbl>
+  <dgm:styleLbl name="asst3">
+    <dgm:scene3d>
+      <a:camera prst="orthographicFront"/>
+      <a:lightRig rig="threePt" dir="t"/>
+    </dgm:scene3d>
+    <dgm:sp3d/>
+    <dgm:txPr/>
+    <dgm:style>
+      <a:lnRef idx="2">
+        <a:scrgbClr r="0" g="0" b="0"/>
+      </a:lnRef>
+      <a:fillRef idx="1">
+        <a:scrgbClr r="0" g="0" b="0"/>
+      </a:fillRef>
+      <a:effectRef idx="0">
+        <a:scrgbClr r="0" g="0" b="0"/>
+      </a:effectRef>
+      <a:fontRef idx="minor">
+        <a:schemeClr val="lt1"/>
+      </a:fontRef>
+    </dgm:style>
+  </dgm:styleLbl>
+  <dgm:styleLbl name="asst4">
+    <dgm:scene3d>
+      <a:camera prst="orthographicFront"/>
+      <a:lightRig rig="threePt" dir="t"/>
+    </dgm:scene3d>
+    <dgm:sp3d/>
+    <dgm:txPr/>
+    <dgm:style>
+      <a:lnRef idx="2">
+        <a:scrgbClr r="0" g="0" b="0"/>
+      </a:lnRef>
+      <a:fillRef idx="1">
+        <a:scrgbClr r="0" g="0" b="0"/>
+      </a:fillRef>
+      <a:effectRef idx="0">
+        <a:scrgbClr r="0" g="0" b="0"/>
+      </a:effectRef>
+      <a:fontRef idx="minor">
+        <a:schemeClr val="lt1"/>
+      </a:fontRef>
+    </dgm:style>
+  </dgm:styleLbl>
+  <dgm:styleLbl name="parChTrans2D1">
+    <dgm:scene3d>
+      <a:camera prst="orthographicFront"/>
+      <a:lightRig rig="threePt" dir="t"/>
+    </dgm:scene3d>
+    <dgm:sp3d/>
+    <dgm:txPr/>
+    <dgm:style>
+      <a:lnRef idx="2">
+        <a:scrgbClr r="0" g="0" b="0"/>
+      </a:lnRef>
+      <a:fillRef idx="1">
+        <a:scrgbClr r="0" g="0" b="0"/>
+      </a:fillRef>
+      <a:effectRef idx="0">
+        <a:scrgbClr r="0" g="0" b="0"/>
+      </a:effectRef>
+      <a:fontRef idx="minor">
+        <a:schemeClr val="lt1"/>
+      </a:fontRef>
+    </dgm:style>
+  </dgm:styleLbl>
+  <dgm:styleLbl name="parChTrans2D2">
+    <dgm:scene3d>
+      <a:camera prst="orthographicFront"/>
+      <a:lightRig rig="threePt" dir="t"/>
+    </dgm:scene3d>
+    <dgm:sp3d/>
+    <dgm:txPr/>
+    <dgm:style>
+      <a:lnRef idx="2">
+        <a:scrgbClr r="0" g="0" b="0"/>
+      </a:lnRef>
+      <a:fillRef idx="1">
+        <a:scrgbClr r="0" g="0" b="0"/>
+      </a:fillRef>
+      <a:effectRef idx="0">
+        <a:scrgbClr r="0" g="0" b="0"/>
+      </a:effectRef>
+      <a:fontRef idx="minor">
+        <a:schemeClr val="lt1"/>
+      </a:fontRef>
+    </dgm:style>
+  </dgm:styleLbl>
+  <dgm:styleLbl name="parChTrans2D3">
+    <dgm:scene3d>
+      <a:camera prst="orthographicFront"/>
+      <a:lightRig rig="threePt" dir="t"/>
+    </dgm:scene3d>
+    <dgm:sp3d/>
+    <dgm:txPr/>
+    <dgm:style>
+      <a:lnRef idx="2">
+        <a:scrgbClr r="0" g="0" b="0"/>
+      </a:lnRef>
+      <a:fillRef idx="1">
+        <a:scrgbClr r="0" g="0" b="0"/>
+      </a:fillRef>
+      <a:effectRef idx="0">
+        <a:scrgbClr r="0" g="0" b="0"/>
+      </a:effectRef>
+      <a:fontRef idx="minor">
+        <a:schemeClr val="lt1"/>
+      </a:fontRef>
+    </dgm:style>
+  </dgm:styleLbl>
+  <dgm:styleLbl name="parChTrans2D4">
+    <dgm:scene3d>
+      <a:camera prst="orthographicFront"/>
+      <a:lightRig rig="threePt" dir="t"/>
+    </dgm:scene3d>
+    <dgm:sp3d/>
+    <dgm:txPr/>
+    <dgm:style>
+      <a:lnRef idx="2">
+        <a:scrgbClr r="0" g="0" b="0"/>
+      </a:lnRef>
+      <a:fillRef idx="1">
+        <a:scrgbClr r="0" g="0" b="0"/>
+      </a:fillRef>
+      <a:effectRef idx="0">
+        <a:scrgbClr r="0" g="0" b="0"/>
+      </a:effectRef>
+      <a:fontRef idx="minor">
+        <a:schemeClr val="lt1"/>
+      </a:fontRef>
+    </dgm:style>
+  </dgm:styleLbl>
+  <dgm:styleLbl name="parChTrans1D1">
+    <dgm:scene3d>
+      <a:camera prst="orthographicFront"/>
+      <a:lightRig rig="threePt" dir="t"/>
+    </dgm:scene3d>
+    <dgm:sp3d/>
+    <dgm:txPr/>
+    <dgm:style>
+      <a:lnRef idx="2">
+        <a:scrgbClr r="0" g="0" b="0"/>
+      </a:lnRef>
+      <a:fillRef idx="0">
+        <a:scrgbClr r="0" g="0" b="0"/>
+      </a:fillRef>
+      <a:effectRef idx="0">
+        <a:scrgbClr r="0" g="0" b="0"/>
+      </a:effectRef>
+      <a:fontRef idx="minor"/>
+    </dgm:style>
+  </dgm:styleLbl>
+  <dgm:styleLbl name="parChTrans1D2">
+    <dgm:scene3d>
+      <a:camera prst="orthographicFront"/>
+      <a:lightRig rig="threePt" dir="t"/>
+    </dgm:scene3d>
+    <dgm:sp3d/>
+    <dgm:txPr/>
+    <dgm:style>
+      <a:lnRef idx="2">
+        <a:scrgbClr r="0" g="0" b="0"/>
+      </a:lnRef>
+      <a:fillRef idx="0">
+        <a:scrgbClr r="0" g="0" b="0"/>
+      </a:fillRef>
+      <a:effectRef idx="0">
+        <a:scrgbClr r="0" g="0" b="0"/>
+      </a:effectRef>
+      <a:fontRef idx="minor"/>
+    </dgm:style>
+  </dgm:styleLbl>
+  <dgm:styleLbl name="parChTrans1D3">
+    <dgm:scene3d>
+      <a:camera prst="orthographicFront"/>
+      <a:lightRig rig="threePt" dir="t"/>
+    </dgm:scene3d>
+    <dgm:sp3d/>
+    <dgm:txPr/>
+    <dgm:style>
+      <a:lnRef idx="2">
+        <a:scrgbClr r="0" g="0" b="0"/>
+      </a:lnRef>
+      <a:fillRef idx="0">
+        <a:scrgbClr r="0" g="0" b="0"/>
+      </a:fillRef>
+      <a:effectRef idx="0">
+        <a:scrgbClr r="0" g="0" b="0"/>
+      </a:effectRef>
+      <a:fontRef idx="minor"/>
+    </dgm:style>
+  </dgm:styleLbl>
+  <dgm:styleLbl name="parChTrans1D4">
+    <dgm:scene3d>
+      <a:camera prst="orthographicFront"/>
+      <a:lightRig rig="threePt" dir="t"/>
+    </dgm:scene3d>
+    <dgm:sp3d/>
+    <dgm:txPr/>
+    <dgm:style>
+      <a:lnRef idx="2">
+        <a:scrgbClr r="0" g="0" b="0"/>
+      </a:lnRef>
+      <a:fillRef idx="0">
+        <a:scrgbClr r="0" g="0" b="0"/>
+      </a:fillRef>
+      <a:effectRef idx="0">
+        <a:scrgbClr r="0" g="0" b="0"/>
+      </a:effectRef>
+      <a:fontRef idx="minor"/>
+    </dgm:style>
+  </dgm:styleLbl>
+  <dgm:styleLbl name="fgAcc1">
+    <dgm:scene3d>
+      <a:camera prst="orthographicFront"/>
+      <a:lightRig rig="threePt" dir="t"/>
+    </dgm:scene3d>
+    <dgm:sp3d/>
+    <dgm:txPr/>
+    <dgm:style>
+      <a:lnRef idx="2">
+        <a:scrgbClr r="0" g="0" b="0"/>
+      </a:lnRef>
+      <a:fillRef idx="1">
+        <a:scrgbClr r="0" g="0" b="0"/>
+      </a:fillRef>
+      <a:effectRef idx="0">
+        <a:scrgbClr r="0" g="0" b="0"/>
+      </a:effectRef>
+      <a:fontRef idx="minor"/>
+    </dgm:style>
+  </dgm:styleLbl>
+  <dgm:styleLbl name="conFgAcc1">
+    <dgm:scene3d>
+      <a:camera prst="orthographicFront"/>
+      <a:lightRig rig="threePt" dir="t"/>
+    </dgm:scene3d>
+    <dgm:sp3d/>
+    <dgm:txPr/>
+    <dgm:style>
+      <a:lnRef idx="2">
+        <a:scrgbClr r="0" g="0" b="0"/>
+      </a:lnRef>
+      <a:fillRef idx="1">
+        <a:scrgbClr r="0" g="0" b="0"/>
+      </a:fillRef>
+      <a:effectRef idx="0">
+        <a:scrgbClr r="0" g="0" b="0"/>
+      </a:effectRef>
+      <a:fontRef idx="minor"/>
+    </dgm:style>
+  </dgm:styleLbl>
+  <dgm:styleLbl name="alignAcc1">
+    <dgm:scene3d>
+      <a:camera prst="orthographicFront"/>
+      <a:lightRig rig="threePt" dir="t"/>
+    </dgm:scene3d>
+    <dgm:sp3d/>
+    <dgm:txPr/>
+    <dgm:style>
+      <a:lnRef idx="2">
+        <a:scrgbClr r="0" g="0" b="0"/>
+      </a:lnRef>
+      <a:fillRef idx="1">
+        <a:scrgbClr r="0" g="0" b="0"/>
+      </a:fillRef>
+      <a:effectRef idx="0">
+        <a:scrgbClr r="0" g="0" b="0"/>
+      </a:effectRef>
+      <a:fontRef idx="minor"/>
+    </dgm:style>
+  </dgm:styleLbl>
+  <dgm:styleLbl name="trAlignAcc1">
+    <dgm:scene3d>
+      <a:camera prst="orthographicFront"/>
+      <a:lightRig rig="threePt" dir="t"/>
+    </dgm:scene3d>
+    <dgm:sp3d/>
+    <dgm:txPr/>
+    <dgm:style>
+      <a:lnRef idx="1">
+        <a:scrgbClr r="0" g="0" b="0"/>
+      </a:lnRef>
+      <a:fillRef idx="1">
+        <a:scrgbClr r="0" g="0" b="0"/>
+      </a:fillRef>
+      <a:effectRef idx="0">
+        <a:scrgbClr r="0" g="0" b="0"/>
+      </a:effectRef>
+      <a:fontRef idx="minor"/>
+    </dgm:style>
+  </dgm:styleLbl>
+  <dgm:styleLbl name="bgAcc1">
+    <dgm:scene3d>
+      <a:camera prst="orthographicFront"/>
+      <a:lightRig rig="threePt" dir="t"/>
+    </dgm:scene3d>
+    <dgm:sp3d/>
+    <dgm:txPr/>
+    <dgm:style>
+      <a:lnRef idx="2">
+        <a:scrgbClr r="0" g="0" b="0"/>
+      </a:lnRef>
+      <a:fillRef idx="1">
+        <a:scrgbClr r="0" g="0" b="0"/>
+      </a:fillRef>
+      <a:effectRef idx="0">
+        <a:scrgbClr r="0" g="0" b="0"/>
+      </a:effectRef>
+      <a:fontRef idx="minor"/>
+    </dgm:style>
+  </dgm:styleLbl>
+  <dgm:styleLbl name="solidFgAcc1">
+    <dgm:scene3d>
+      <a:camera prst="orthographicFront"/>
+      <a:lightRig rig="threePt" dir="t"/>
+    </dgm:scene3d>
+    <dgm:sp3d/>
+    <dgm:txPr/>
+    <dgm:style>
+      <a:lnRef idx="2">
+        <a:scrgbClr r="0" g="0" b="0"/>
+      </a:lnRef>
+      <a:fillRef idx="1">
+        <a:scrgbClr r="0" g="0" b="0"/>
+      </a:fillRef>
+      <a:effectRef idx="0">
+        <a:scrgbClr r="0" g="0" b="0"/>
+      </a:effectRef>
+      <a:fontRef idx="minor"/>
+    </dgm:style>
+  </dgm:styleLbl>
+  <dgm:styleLbl name="solidAlignAcc1">
+    <dgm:scene3d>
+      <a:camera prst="orthographicFront"/>
+      <a:lightRig rig="threePt" dir="t"/>
+    </dgm:scene3d>
+    <dgm:sp3d/>
+    <dgm:txPr/>
+    <dgm:style>
+      <a:lnRef idx="2">
+        <a:scrgbClr r="0" g="0" b="0"/>
+      </a:lnRef>
+      <a:fillRef idx="1">
+        <a:scrgbClr r="0" g="0" b="0"/>
+      </a:fillRef>
+      <a:effectRef idx="0">
+        <a:scrgbClr r="0" g="0" b="0"/>
+      </a:effectRef>
+      <a:fontRef idx="minor"/>
+    </dgm:style>
+  </dgm:styleLbl>
+  <dgm:styleLbl name="solidBgAcc1">
+    <dgm:scene3d>
+      <a:camera prst="orthographicFront"/>
+      <a:lightRig rig="threePt" dir="t"/>
+    </dgm:scene3d>
+    <dgm:sp3d/>
+    <dgm:txPr/>
+    <dgm:style>
+      <a:lnRef idx="2">
+        <a:scrgbClr r="0" g="0" b="0"/>
+      </a:lnRef>
+      <a:fillRef idx="1">
+        <a:scrgbClr r="0" g="0" b="0"/>
+      </a:fillRef>
+      <a:effectRef idx="0">
+        <a:scrgbClr r="0" g="0" b="0"/>
+      </a:effectRef>
+      <a:fontRef idx="minor"/>
+    </dgm:style>
+  </dgm:styleLbl>
+  <dgm:styleLbl name="fgAccFollowNode1">
+    <dgm:scene3d>
+      <a:camera prst="orthographicFront"/>
+      <a:lightRig rig="threePt" dir="t"/>
+    </dgm:scene3d>
+    <dgm:sp3d/>
+    <dgm:txPr/>
+    <dgm:style>
+      <a:lnRef idx="2">
+        <a:scrgbClr r="0" g="0" b="0"/>
+      </a:lnRef>
+      <a:fillRef idx="1">
+        <a:scrgbClr r="0" g="0" b="0"/>
+      </a:fillRef>
+      <a:effectRef idx="0">
+        <a:scrgbClr r="0" g="0" b="0"/>
+      </a:effectRef>
+      <a:fontRef idx="minor"/>
+    </dgm:style>
+  </dgm:styleLbl>
+  <dgm:styleLbl name="alignAccFollowNode1">
+    <dgm:scene3d>
+      <a:camera prst="orthographicFront"/>
+      <a:lightRig rig="threePt" dir="t"/>
+    </dgm:scene3d>
+    <dgm:sp3d/>
+    <dgm:txPr/>
+    <dgm:style>
+      <a:lnRef idx="2">
+        <a:scrgbClr r="0" g="0" b="0"/>
+      </a:lnRef>
+      <a:fillRef idx="1">
+        <a:scrgbClr r="0" g="0" b="0"/>
+      </a:fillRef>
+      <a:effectRef idx="0">
+        <a:scrgbClr r="0" g="0" b="0"/>
+      </a:effectRef>
+      <a:fontRef idx="minor"/>
+    </dgm:style>
+  </dgm:styleLbl>
+  <dgm:styleLbl name="bgAccFollowNode1">
+    <dgm:scene3d>
+      <a:camera prst="orthographicFront"/>
+      <a:lightRig rig="threePt" dir="t"/>
+    </dgm:scene3d>
+    <dgm:sp3d/>
+    <dgm:txPr/>
+    <dgm:style>
+      <a:lnRef idx="2">
+        <a:scrgbClr r="0" g="0" b="0"/>
+      </a:lnRef>
+      <a:fillRef idx="1">
+        <a:scrgbClr r="0" g="0" b="0"/>
+      </a:fillRef>
+      <a:effectRef idx="0">
+        <a:scrgbClr r="0" g="0" b="0"/>
+      </a:effectRef>
+      <a:fontRef idx="minor"/>
+    </dgm:style>
+  </dgm:styleLbl>
+  <dgm:styleLbl name="fgAcc0">
+    <dgm:scene3d>
+      <a:camera prst="orthographicFront"/>
+      <a:lightRig rig="threePt" dir="t"/>
+    </dgm:scene3d>
+    <dgm:sp3d/>
+    <dgm:txPr/>
+    <dgm:style>
+      <a:lnRef idx="2">
+        <a:scrgbClr r="0" g="0" b="0"/>
+      </a:lnRef>
+      <a:fillRef idx="1">
+        <a:scrgbClr r="0" g="0" b="0"/>
+      </a:fillRef>
+      <a:effectRef idx="0">
+        <a:scrgbClr r="0" g="0" b="0"/>
+      </a:effectRef>
+      <a:fontRef idx="minor"/>
+    </dgm:style>
+  </dgm:styleLbl>
+  <dgm:styleLbl name="fgAcc2">
+    <dgm:scene3d>
+      <a:camera prst="orthographicFront"/>
+      <a:lightRig rig="threePt" dir="t"/>
+    </dgm:scene3d>
+    <dgm:sp3d/>
+    <dgm:txPr/>
+    <dgm:style>
+      <a:lnRef idx="2">
+        <a:scrgbClr r="0" g="0" b="0"/>
+      </a:lnRef>
+      <a:fillRef idx="1">
+        <a:scrgbClr r="0" g="0" b="0"/>
+      </a:fillRef>
+      <a:effectRef idx="0">
+        <a:scrgbClr r="0" g="0" b="0"/>
+      </a:effectRef>
+      <a:fontRef idx="minor"/>
+    </dgm:style>
+  </dgm:styleLbl>
+  <dgm:styleLbl name="fgAcc3">
+    <dgm:scene3d>
+      <a:camera prst="orthographicFront"/>
+      <a:lightRig rig="threePt" dir="t"/>
+    </dgm:scene3d>
+    <dgm:sp3d/>
+    <dgm:txPr/>
+    <dgm:style>
+      <a:lnRef idx="2">
+        <a:scrgbClr r="0" g="0" b="0"/>
+      </a:lnRef>
+      <a:fillRef idx="1">
+        <a:scrgbClr r="0" g="0" b="0"/>
+      </a:fillRef>
+      <a:effectRef idx="0">
+        <a:scrgbClr r="0" g="0" b="0"/>
+      </a:effectRef>
+      <a:fontRef idx="minor"/>
+    </dgm:style>
+  </dgm:styleLbl>
+  <dgm:styleLbl name="fgAcc4">
+    <dgm:scene3d>
+      <a:camera prst="orthographicFront"/>
+      <a:lightRig rig="threePt" dir="t"/>
+    </dgm:scene3d>
+    <dgm:sp3d/>
+    <dgm:txPr/>
+    <dgm:style>
+      <a:lnRef idx="2">
+        <a:scrgbClr r="0" g="0" b="0"/>
+      </a:lnRef>
+      <a:fillRef idx="1">
+        <a:scrgbClr r="0" g="0" b="0"/>
+      </a:fillRef>
+      <a:effectRef idx="0">
+        <a:scrgbClr r="0" g="0" b="0"/>
+      </a:effectRef>
+      <a:fontRef idx="minor"/>
+    </dgm:style>
+  </dgm:styleLbl>
+  <dgm:styleLbl name="bgShp">
+    <dgm:scene3d>
+      <a:camera prst="orthographicFront"/>
+      <a:lightRig rig="threePt" dir="t"/>
+    </dgm:scene3d>
+    <dgm:sp3d/>
+    <dgm:txPr/>
+    <dgm:style>
+      <a:lnRef idx="0">
+        <a:scrgbClr r="0" g="0" b="0"/>
+      </a:lnRef>
+      <a:fillRef idx="1">
+        <a:scrgbClr r="0" g="0" b="0"/>
+      </a:fillRef>
+      <a:effectRef idx="0">
+        <a:scrgbClr r="0" g="0" b="0"/>
+      </a:effectRef>
+      <a:fontRef idx="minor"/>
+    </dgm:style>
+  </dgm:styleLbl>
+  <dgm:styleLbl name="dkBgShp">
+    <dgm:scene3d>
+      <a:camera prst="orthographicFront"/>
+      <a:lightRig rig="threePt" dir="t"/>
+    </dgm:scene3d>
+    <dgm:sp3d/>
+    <dgm:txPr/>
+    <dgm:style>
+      <a:lnRef idx="0">
+        <a:scrgbClr r="0" g="0" b="0"/>
+      </a:lnRef>
+      <a:fillRef idx="1">
+        <a:scrgbClr r="0" g="0" b="0"/>
+      </a:fillRef>
+      <a:effectRef idx="0">
+        <a:scrgbClr r="0" g="0" b="0"/>
+      </a:effectRef>
+      <a:fontRef idx="minor"/>
+    </dgm:style>
+  </dgm:styleLbl>
+  <dgm:styleLbl name="trBgShp">
+    <dgm:scene3d>
+      <a:camera prst="orthographicFront"/>
+      <a:lightRig rig="threePt" dir="t"/>
+    </dgm:scene3d>
+    <dgm:sp3d/>
+    <dgm:txPr/>
+    <dgm:style>
+      <a:lnRef idx="0">
+        <a:scrgbClr r="0" g="0" b="0"/>
+      </a:lnRef>
+      <a:fillRef idx="1">
+        <a:scrgbClr r="0" g="0" b="0"/>
+      </a:fillRef>
+      <a:effectRef idx="0">
+        <a:scrgbClr r="0" g="0" b="0"/>
+      </a:effectRef>
+      <a:fontRef idx="minor"/>
+    </dgm:style>
+  </dgm:styleLbl>
+  <dgm:styleLbl name="fgShp">
+    <dgm:scene3d>
+      <a:camera prst="orthographicFront"/>
+      <a:lightRig rig="threePt" dir="t"/>
+    </dgm:scene3d>
+    <dgm:sp3d/>
+    <dgm:txPr/>
+    <dgm:style>
+      <a:lnRef idx="2">
+        <a:scrgbClr r="0" g="0" b="0"/>
+      </a:lnRef>
+      <a:fillRef idx="1">
+        <a:scrgbClr r="0" g="0" b="0"/>
+      </a:fillRef>
+      <a:effectRef idx="0">
+        <a:scrgbClr r="0" g="0" b="0"/>
+      </a:effectRef>
+      <a:fontRef idx="minor"/>
+    </dgm:style>
+  </dgm:styleLbl>
+  <dgm:styleLbl name="revTx">
+    <dgm:scene3d>
+      <a:camera prst="orthographicFront"/>
+      <a:lightRig rig="threePt" dir="t"/>
+    </dgm:scene3d>
+    <dgm:sp3d/>
+    <dgm:txPr/>
+    <dgm:style>
+      <a:lnRef idx="0">
+        <a:scrgbClr r="0" g="0" b="0"/>
+      </a:lnRef>
+      <a:fillRef idx="0">
+        <a:scrgbClr r="0" g="0" b="0"/>
+      </a:fillRef>
+      <a:effectRef idx="0">
+        <a:scrgbClr r="0" g="0" b="0"/>
+      </a:effectRef>
+      <a:fontRef idx="minor"/>
+    </dgm:style>
+  </dgm:styleLbl>
+</dgm:styleDef>
 </file>
 
 <file path=ppt/slideLayouts/slideLayout1.xml><?xml version="1.0" encoding="utf-8"?>
@@ -3331,6 +6532,14 @@
 <file path=ppt/slides/slide1.xml><?xml version="1.0" encoding="utf-8"?>
 <p:sld xmlns:a="http://schemas.openxmlformats.org/drawingml/2006/main" xmlns:r="http://schemas.openxmlformats.org/officeDocument/2006/relationships" xmlns:p="http://schemas.openxmlformats.org/presentationml/2006/main">
   <p:cSld>
+    <p:bg>
+      <p:bgPr>
+        <a:solidFill>
+          <a:srgbClr val="000000"/>
+        </a:solidFill>
+        <a:effectLst/>
+      </p:bgPr>
+    </p:bg>
     <p:spTree>
       <p:nvGrpSpPr>
         <p:cNvPr id="1" name=""/>
@@ -3347,6 +6556,102 @@
       </p:grpSpPr>
       <p:sp>
         <p:nvSpPr>
+          <p:cNvPr id="10" name="Rectangle 9">
+            <a:extLst>
+              <a:ext uri="{FF2B5EF4-FFF2-40B4-BE49-F238E27FC236}">
+                <a16:creationId xmlns:a16="http://schemas.microsoft.com/office/drawing/2014/main" id="{71B2258F-86CA-4D4D-8270-BC05FCDEBFB3}"/>
+              </a:ext>
+              <a:ext uri="{C183D7F6-B498-43B3-948B-1728B52AA6E4}">
+                <adec:decorative xmlns:adec="http://schemas.microsoft.com/office/drawing/2017/decorative" val="1"/>
+              </a:ext>
+            </a:extLst>
+          </p:cNvPr>
+          <p:cNvSpPr>
+            <a:spLocks noGrp="1" noRot="1" noChangeAspect="1" noMove="1" noResize="1" noEditPoints="1" noAdjustHandles="1" noChangeArrowheads="1" noChangeShapeType="1" noTextEdit="1"/>
+          </p:cNvSpPr>
+          <p:nvPr>
+            <p:extLst>
+              <p:ext uri="{386F3935-93C4-4BCD-93E2-E3B085C9AB24}">
+                <p16:designElem xmlns:p16="http://schemas.microsoft.com/office/powerpoint/2015/main" val="1"/>
+              </p:ext>
+            </p:extLst>
+          </p:nvPr>
+        </p:nvSpPr>
+        <p:spPr>
+          <a:xfrm>
+            <a:off x="0" y="0"/>
+            <a:ext cx="12192000" cy="6857999"/>
+          </a:xfrm>
+          <a:prstGeom prst="rect">
+            <a:avLst/>
+          </a:prstGeom>
+          <a:solidFill>
+            <a:srgbClr val="000000"/>
+          </a:solidFill>
+          <a:ln>
+            <a:noFill/>
+          </a:ln>
+        </p:spPr>
+        <p:style>
+          <a:lnRef idx="2">
+            <a:schemeClr val="accent1">
+              <a:shade val="50000"/>
+            </a:schemeClr>
+          </a:lnRef>
+          <a:fillRef idx="1">
+            <a:schemeClr val="accent1"/>
+          </a:fillRef>
+          <a:effectRef idx="0">
+            <a:schemeClr val="accent1"/>
+          </a:effectRef>
+          <a:fontRef idx="minor">
+            <a:schemeClr val="lt1"/>
+          </a:fontRef>
+        </p:style>
+        <p:txBody>
+          <a:bodyPr rtlCol="0" anchor="ctr"/>
+          <a:lstStyle/>
+          <a:p>
+            <a:pPr algn="ctr"/>
+            <a:endParaRPr lang="en-US"/>
+          </a:p>
+        </p:txBody>
+      </p:sp>
+      <p:pic>
+        <p:nvPicPr>
+          <p:cNvPr id="5" name="Grafik 4" descr="Urban Runner Pro">
+            <a:extLst>
+              <a:ext uri="{FF2B5EF4-FFF2-40B4-BE49-F238E27FC236}">
+                <a16:creationId xmlns:a16="http://schemas.microsoft.com/office/drawing/2014/main" id="{C98D03A3-5430-6AFB-AB6B-6DB856CD0343}"/>
+              </a:ext>
+            </a:extLst>
+          </p:cNvPr>
+          <p:cNvPicPr>
+            <a:picLocks noChangeAspect="1"/>
+          </p:cNvPicPr>
+          <p:nvPr/>
+        </p:nvPicPr>
+        <p:blipFill>
+          <a:blip r:embed="rId2">
+            <a:alphaModFix amt="50000"/>
+          </a:blip>
+          <a:srcRect t="6825" b="8906"/>
+          <a:stretch>
+            <a:fillRect/>
+          </a:stretch>
+        </p:blipFill>
+        <p:spPr>
+          <a:xfrm>
+            <a:off x="20" y="1"/>
+            <a:ext cx="12191980" cy="6857999"/>
+          </a:xfrm>
+          <a:prstGeom prst="rect">
+            <a:avLst/>
+          </a:prstGeom>
+        </p:spPr>
+      </p:pic>
+      <p:sp>
+        <p:nvSpPr>
           <p:cNvPr id="2" name="Titel 1">
             <a:extLst>
               <a:ext uri="{FF2B5EF4-FFF2-40B4-BE49-F238E27FC236}">
@@ -3361,16 +6666,26 @@
             <p:ph type="ctrTitle"/>
           </p:nvPr>
         </p:nvSpPr>
-        <p:spPr/>
+        <p:spPr>
+          <a:xfrm>
+            <a:off x="1524000" y="1122362"/>
+            <a:ext cx="9144000" cy="2900518"/>
+          </a:xfrm>
+        </p:spPr>
         <p:txBody>
-          <a:bodyPr/>
+          <a:bodyPr>
+            <a:normAutofit/>
+          </a:bodyPr>
           <a:lstStyle/>
           <a:p>
             <a:r>
-              <a:rPr lang="de-CH" dirty="0" err="1"/>
+              <a:rPr lang="de-CH">
+                <a:solidFill>
+                  <a:srgbClr val="FFFFFF"/>
+                </a:solidFill>
+              </a:rPr>
               <a:t>StepStyle</a:t>
             </a:r>
-            <a:endParaRPr lang="de-CH" dirty="0"/>
           </a:p>
         </p:txBody>
       </p:sp>
@@ -3390,13 +6705,24 @@
             <p:ph type="subTitle" idx="1"/>
           </p:nvPr>
         </p:nvSpPr>
-        <p:spPr/>
+        <p:spPr>
+          <a:xfrm>
+            <a:off x="1524000" y="4159404"/>
+            <a:ext cx="9144000" cy="1098395"/>
+          </a:xfrm>
+        </p:spPr>
         <p:txBody>
-          <a:bodyPr/>
+          <a:bodyPr>
+            <a:normAutofit/>
+          </a:bodyPr>
           <a:lstStyle/>
           <a:p>
             <a:r>
-              <a:rPr lang="de-CH" dirty="0"/>
+              <a:rPr lang="de-CH">
+                <a:solidFill>
+                  <a:srgbClr val="FFFFFF"/>
+                </a:solidFill>
+              </a:rPr>
               <a:t>Loris</a:t>
             </a:r>
           </a:p>
@@ -3410,14 +6736,161 @@
     </p:extLst>
   </p:cSld>
   <p:clrMapOvr>
-    <a:masterClrMapping/>
+    <a:overrideClrMapping bg1="dk1" tx1="lt1" bg2="dk2" tx2="lt2" accent1="accent1" accent2="accent2" accent3="accent3" accent4="accent4" accent5="accent5" accent6="accent6" hlink="hlink" folHlink="folHlink"/>
   </p:clrMapOvr>
+  <p:timing>
+    <p:tnLst>
+      <p:par>
+        <p:cTn id="1" dur="indefinite" restart="never" nodeType="tmRoot">
+          <p:childTnLst>
+            <p:seq concurrent="1" nextAc="seek">
+              <p:cTn id="2" dur="indefinite" nodeType="mainSeq">
+                <p:childTnLst>
+                  <p:par>
+                    <p:cTn id="3" fill="hold">
+                      <p:stCondLst>
+                        <p:cond delay="indefinite"/>
+                        <p:cond evt="onBegin" delay="0">
+                          <p:tn val="2"/>
+                        </p:cond>
+                      </p:stCondLst>
+                      <p:childTnLst>
+                        <p:par>
+                          <p:cTn id="4" fill="hold">
+                            <p:stCondLst>
+                              <p:cond delay="0"/>
+                            </p:stCondLst>
+                            <p:childTnLst>
+                              <p:par>
+                                <p:cTn id="5" presetID="10" presetClass="entr" presetSubtype="0" fill="hold" grpId="0" nodeType="withEffect">
+                                  <p:stCondLst>
+                                    <p:cond delay="1000"/>
+                                  </p:stCondLst>
+                                  <p:iterate>
+                                    <p:tmPct val="10000"/>
+                                  </p:iterate>
+                                  <p:childTnLst>
+                                    <p:set>
+                                      <p:cBhvr>
+                                        <p:cTn id="6" dur="1" fill="hold">
+                                          <p:stCondLst>
+                                            <p:cond delay="0"/>
+                                          </p:stCondLst>
+                                        </p:cTn>
+                                        <p:tgtEl>
+                                          <p:spTgt spid="2"/>
+                                        </p:tgtEl>
+                                        <p:attrNameLst>
+                                          <p:attrName>style.visibility</p:attrName>
+                                        </p:attrNameLst>
+                                      </p:cBhvr>
+                                      <p:to>
+                                        <p:strVal val="visible"/>
+                                      </p:to>
+                                    </p:set>
+                                    <p:animEffect transition="in" filter="fade">
+                                      <p:cBhvr>
+                                        <p:cTn id="7" dur="700"/>
+                                        <p:tgtEl>
+                                          <p:spTgt spid="2"/>
+                                        </p:tgtEl>
+                                      </p:cBhvr>
+                                    </p:animEffect>
+                                  </p:childTnLst>
+                                </p:cTn>
+                              </p:par>
+                              <p:par>
+                                <p:cTn id="8" presetID="10" presetClass="entr" presetSubtype="0" fill="hold" grpId="0" nodeType="withEffect">
+                                  <p:stCondLst>
+                                    <p:cond delay="1500"/>
+                                  </p:stCondLst>
+                                  <p:iterate>
+                                    <p:tmPct val="10000"/>
+                                  </p:iterate>
+                                  <p:childTnLst>
+                                    <p:set>
+                                      <p:cBhvr>
+                                        <p:cTn id="9" dur="1" fill="hold">
+                                          <p:stCondLst>
+                                            <p:cond delay="0"/>
+                                          </p:stCondLst>
+                                        </p:cTn>
+                                        <p:tgtEl>
+                                          <p:spTgt spid="3">
+                                            <p:txEl>
+                                              <p:pRg st="0" end="0"/>
+                                            </p:txEl>
+                                          </p:spTgt>
+                                        </p:tgtEl>
+                                        <p:attrNameLst>
+                                          <p:attrName>style.visibility</p:attrName>
+                                        </p:attrNameLst>
+                                      </p:cBhvr>
+                                      <p:to>
+                                        <p:strVal val="visible"/>
+                                      </p:to>
+                                    </p:set>
+                                    <p:animEffect transition="in" filter="fade">
+                                      <p:cBhvr>
+                                        <p:cTn id="10" dur="700"/>
+                                        <p:tgtEl>
+                                          <p:spTgt spid="3">
+                                            <p:txEl>
+                                              <p:pRg st="0" end="0"/>
+                                            </p:txEl>
+                                          </p:spTgt>
+                                        </p:tgtEl>
+                                      </p:cBhvr>
+                                    </p:animEffect>
+                                  </p:childTnLst>
+                                </p:cTn>
+                              </p:par>
+                            </p:childTnLst>
+                          </p:cTn>
+                        </p:par>
+                      </p:childTnLst>
+                    </p:cTn>
+                  </p:par>
+                </p:childTnLst>
+              </p:cTn>
+              <p:prevCondLst>
+                <p:cond evt="onPrev" delay="0">
+                  <p:tgtEl>
+                    <p:sldTgt/>
+                  </p:tgtEl>
+                </p:cond>
+              </p:prevCondLst>
+              <p:nextCondLst>
+                <p:cond evt="onNext" delay="0">
+                  <p:tgtEl>
+                    <p:sldTgt/>
+                  </p:tgtEl>
+                </p:cond>
+              </p:nextCondLst>
+            </p:seq>
+          </p:childTnLst>
+        </p:cTn>
+      </p:par>
+    </p:tnLst>
+    <p:bldLst>
+      <p:bldP spid="2" grpId="0"/>
+      <p:bldP spid="3" grpId="0" build="p"/>
+    </p:bldLst>
+  </p:timing>
 </p:sld>
 </file>
 
 <file path=ppt/slides/slide2.xml><?xml version="1.0" encoding="utf-8"?>
 <p:sld xmlns:a="http://schemas.openxmlformats.org/drawingml/2006/main" xmlns:r="http://schemas.openxmlformats.org/officeDocument/2006/relationships" xmlns:p="http://schemas.openxmlformats.org/presentationml/2006/main">
   <p:cSld>
+    <p:bg>
+      <p:bgPr>
+        <a:solidFill>
+          <a:schemeClr val="bg1"/>
+        </a:solidFill>
+        <a:effectLst/>
+      </p:bgPr>
+    </p:bg>
     <p:spTree>
       <p:nvGrpSpPr>
         <p:cNvPr id="1" name=""/>
@@ -3432,6 +6905,309 @@
           <a:chExt cx="0" cy="0"/>
         </a:xfrm>
       </p:grpSpPr>
+      <p:sp useBgFill="1">
+        <p:nvSpPr>
+          <p:cNvPr id="9" name="Rectangle 8">
+            <a:extLst>
+              <a:ext uri="{FF2B5EF4-FFF2-40B4-BE49-F238E27FC236}">
+                <a16:creationId xmlns:a16="http://schemas.microsoft.com/office/drawing/2014/main" id="{BACC6370-2D7E-4714-9D71-7542949D7D5D}"/>
+              </a:ext>
+              <a:ext uri="{C183D7F6-B498-43B3-948B-1728B52AA6E4}">
+                <adec:decorative xmlns:adec="http://schemas.microsoft.com/office/drawing/2017/decorative" val="1"/>
+              </a:ext>
+            </a:extLst>
+          </p:cNvPr>
+          <p:cNvSpPr>
+            <a:spLocks noGrp="1" noRot="1" noChangeAspect="1" noMove="1" noResize="1" noEditPoints="1" noAdjustHandles="1" noChangeArrowheads="1" noChangeShapeType="1" noTextEdit="1"/>
+          </p:cNvSpPr>
+          <p:nvPr>
+            <p:extLst>
+              <p:ext uri="{386F3935-93C4-4BCD-93E2-E3B085C9AB24}">
+                <p16:designElem xmlns:p16="http://schemas.microsoft.com/office/powerpoint/2015/main" val="1"/>
+              </p:ext>
+            </p:extLst>
+          </p:nvPr>
+        </p:nvSpPr>
+        <p:spPr>
+          <a:xfrm>
+            <a:off x="0" y="0"/>
+            <a:ext cx="12192000" cy="6858000"/>
+          </a:xfrm>
+          <a:prstGeom prst="rect">
+            <a:avLst/>
+          </a:prstGeom>
+          <a:ln w="12700" cap="flat" cmpd="sng" algn="ctr">
+            <a:noFill/>
+            <a:prstDash val="solid"/>
+            <a:miter lim="800000"/>
+          </a:ln>
+          <a:effectLst/>
+          <a:extLst>
+            <a:ext uri="{91240B29-F687-4F45-9708-019B960494DF}">
+              <a14:hiddenLine xmlns:a14="http://schemas.microsoft.com/office/drawing/2010/main" w="12700" cap="flat" cmpd="sng" algn="ctr">
+                <a:solidFill>
+                  <a:schemeClr val="accent1">
+                    <a:shade val="50000"/>
+                  </a:schemeClr>
+                </a:solidFill>
+                <a:prstDash val="solid"/>
+                <a:miter lim="800000"/>
+              </a14:hiddenLine>
+            </a:ext>
+          </a:extLst>
+        </p:spPr>
+        <p:style>
+          <a:lnRef idx="2">
+            <a:schemeClr val="accent1">
+              <a:shade val="50000"/>
+            </a:schemeClr>
+          </a:lnRef>
+          <a:fillRef idx="1">
+            <a:schemeClr val="accent1"/>
+          </a:fillRef>
+          <a:effectRef idx="0">
+            <a:schemeClr val="accent1"/>
+          </a:effectRef>
+          <a:fontRef idx="minor">
+            <a:schemeClr val="lt1"/>
+          </a:fontRef>
+        </p:style>
+        <p:txBody>
+          <a:bodyPr rtlCol="0" anchor="ctr"/>
+          <a:lstStyle/>
+          <a:p>
+            <a:pPr algn="ctr"/>
+            <a:endParaRPr lang="en-US"/>
+          </a:p>
+        </p:txBody>
+      </p:sp>
+      <p:sp>
+        <p:nvSpPr>
+          <p:cNvPr id="11" name="Rectangle 10">
+            <a:extLst>
+              <a:ext uri="{FF2B5EF4-FFF2-40B4-BE49-F238E27FC236}">
+                <a16:creationId xmlns:a16="http://schemas.microsoft.com/office/drawing/2014/main" id="{F68B3F68-107C-434F-AA38-110D5EA91B85}"/>
+              </a:ext>
+              <a:ext uri="{C183D7F6-B498-43B3-948B-1728B52AA6E4}">
+                <adec:decorative xmlns:adec="http://schemas.microsoft.com/office/drawing/2017/decorative" val="1"/>
+              </a:ext>
+            </a:extLst>
+          </p:cNvPr>
+          <p:cNvSpPr>
+            <a:spLocks noGrp="1" noRot="1" noChangeAspect="1" noMove="1" noResize="1" noEditPoints="1" noAdjustHandles="1" noChangeArrowheads="1" noChangeShapeType="1" noTextEdit="1"/>
+          </p:cNvSpPr>
+          <p:nvPr>
+            <p:extLst>
+              <p:ext uri="{386F3935-93C4-4BCD-93E2-E3B085C9AB24}">
+                <p16:designElem xmlns:p16="http://schemas.microsoft.com/office/powerpoint/2015/main" val="1"/>
+              </p:ext>
+            </p:extLst>
+          </p:nvPr>
+        </p:nvSpPr>
+        <p:spPr>
+          <a:xfrm flipH="1">
+            <a:off x="2" y="0"/>
+            <a:ext cx="12191998" cy="2170031"/>
+          </a:xfrm>
+          <a:prstGeom prst="rect">
+            <a:avLst/>
+          </a:prstGeom>
+          <a:gradFill>
+            <a:gsLst>
+              <a:gs pos="0">
+                <a:srgbClr val="000000">
+                  <a:alpha val="96000"/>
+                </a:srgbClr>
+              </a:gs>
+              <a:gs pos="100000">
+                <a:schemeClr val="accent1">
+                  <a:lumMod val="75000"/>
+                </a:schemeClr>
+              </a:gs>
+            </a:gsLst>
+            <a:lin ang="19800000" scaled="0"/>
+          </a:gradFill>
+          <a:ln>
+            <a:noFill/>
+          </a:ln>
+        </p:spPr>
+        <p:style>
+          <a:lnRef idx="2">
+            <a:schemeClr val="accent1">
+              <a:shade val="50000"/>
+            </a:schemeClr>
+          </a:lnRef>
+          <a:fillRef idx="1">
+            <a:schemeClr val="accent1"/>
+          </a:fillRef>
+          <a:effectRef idx="0">
+            <a:schemeClr val="accent1"/>
+          </a:effectRef>
+          <a:fontRef idx="minor">
+            <a:schemeClr val="lt1"/>
+          </a:fontRef>
+        </p:style>
+        <p:txBody>
+          <a:bodyPr rtlCol="0" anchor="ctr"/>
+          <a:lstStyle/>
+          <a:p>
+            <a:pPr algn="ctr"/>
+            <a:endParaRPr lang="en-US"/>
+          </a:p>
+        </p:txBody>
+      </p:sp>
+      <p:sp>
+        <p:nvSpPr>
+          <p:cNvPr id="13" name="Rectangle 12">
+            <a:extLst>
+              <a:ext uri="{FF2B5EF4-FFF2-40B4-BE49-F238E27FC236}">
+                <a16:creationId xmlns:a16="http://schemas.microsoft.com/office/drawing/2014/main" id="{AAD0DBB9-1A4B-4391-81D4-CB19F9AB918A}"/>
+              </a:ext>
+              <a:ext uri="{C183D7F6-B498-43B3-948B-1728B52AA6E4}">
+                <adec:decorative xmlns:adec="http://schemas.microsoft.com/office/drawing/2017/decorative" val="1"/>
+              </a:ext>
+            </a:extLst>
+          </p:cNvPr>
+          <p:cNvSpPr>
+            <a:spLocks noGrp="1" noRot="1" noChangeAspect="1" noMove="1" noResize="1" noEditPoints="1" noAdjustHandles="1" noChangeArrowheads="1" noChangeShapeType="1" noTextEdit="1"/>
+          </p:cNvSpPr>
+          <p:nvPr>
+            <p:extLst>
+              <p:ext uri="{386F3935-93C4-4BCD-93E2-E3B085C9AB24}">
+                <p16:designElem xmlns:p16="http://schemas.microsoft.com/office/powerpoint/2015/main" val="1"/>
+              </p:ext>
+            </p:extLst>
+          </p:nvPr>
+        </p:nvSpPr>
+        <p:spPr>
+          <a:xfrm flipH="1">
+            <a:off x="8082819" y="0"/>
+            <a:ext cx="4097211" cy="2170661"/>
+          </a:xfrm>
+          <a:prstGeom prst="rect">
+            <a:avLst/>
+          </a:prstGeom>
+          <a:gradFill>
+            <a:gsLst>
+              <a:gs pos="19000">
+                <a:schemeClr val="accent1">
+                  <a:lumMod val="50000"/>
+                  <a:alpha val="68000"/>
+                </a:schemeClr>
+              </a:gs>
+              <a:gs pos="100000">
+                <a:schemeClr val="accent1">
+                  <a:alpha val="48000"/>
+                </a:schemeClr>
+              </a:gs>
+            </a:gsLst>
+            <a:lin ang="19200000" scaled="0"/>
+          </a:gradFill>
+          <a:ln>
+            <a:noFill/>
+          </a:ln>
+        </p:spPr>
+        <p:style>
+          <a:lnRef idx="2">
+            <a:schemeClr val="accent1">
+              <a:shade val="50000"/>
+            </a:schemeClr>
+          </a:lnRef>
+          <a:fillRef idx="1">
+            <a:schemeClr val="accent1"/>
+          </a:fillRef>
+          <a:effectRef idx="0">
+            <a:schemeClr val="accent1"/>
+          </a:effectRef>
+          <a:fontRef idx="minor">
+            <a:schemeClr val="lt1"/>
+          </a:fontRef>
+        </p:style>
+        <p:txBody>
+          <a:bodyPr rtlCol="0" anchor="ctr"/>
+          <a:lstStyle/>
+          <a:p>
+            <a:pPr algn="ctr"/>
+            <a:endParaRPr lang="en-US"/>
+          </a:p>
+        </p:txBody>
+      </p:sp>
+      <p:sp>
+        <p:nvSpPr>
+          <p:cNvPr id="15" name="Rectangle 14">
+            <a:extLst>
+              <a:ext uri="{FF2B5EF4-FFF2-40B4-BE49-F238E27FC236}">
+                <a16:creationId xmlns:a16="http://schemas.microsoft.com/office/drawing/2014/main" id="{063BBA22-50EA-4C4D-BE05-F1CE4E63AA56}"/>
+              </a:ext>
+              <a:ext uri="{C183D7F6-B498-43B3-948B-1728B52AA6E4}">
+                <adec:decorative xmlns:adec="http://schemas.microsoft.com/office/drawing/2017/decorative" val="1"/>
+              </a:ext>
+            </a:extLst>
+          </p:cNvPr>
+          <p:cNvSpPr>
+            <a:spLocks noGrp="1" noRot="1" noChangeAspect="1" noMove="1" noResize="1" noEditPoints="1" noAdjustHandles="1" noChangeArrowheads="1" noChangeShapeType="1" noTextEdit="1"/>
+          </p:cNvSpPr>
+          <p:nvPr>
+            <p:extLst>
+              <p:ext uri="{386F3935-93C4-4BCD-93E2-E3B085C9AB24}">
+                <p16:designElem xmlns:p16="http://schemas.microsoft.com/office/powerpoint/2015/main" val="1"/>
+              </p:ext>
+            </p:extLst>
+          </p:nvPr>
+        </p:nvSpPr>
+        <p:spPr>
+          <a:xfrm rot="16200000" flipH="1">
+            <a:off x="5010646" y="-5010043"/>
+            <a:ext cx="2170709" cy="12192000"/>
+          </a:xfrm>
+          <a:prstGeom prst="rect">
+            <a:avLst/>
+          </a:prstGeom>
+          <a:gradFill>
+            <a:gsLst>
+              <a:gs pos="23000">
+                <a:schemeClr val="accent1">
+                  <a:lumMod val="75000"/>
+                  <a:alpha val="16000"/>
+                </a:schemeClr>
+              </a:gs>
+              <a:gs pos="99000">
+                <a:srgbClr val="000000">
+                  <a:alpha val="45000"/>
+                </a:srgbClr>
+              </a:gs>
+            </a:gsLst>
+            <a:lin ang="21000000" scaled="0"/>
+          </a:gradFill>
+          <a:ln>
+            <a:noFill/>
+          </a:ln>
+        </p:spPr>
+        <p:style>
+          <a:lnRef idx="2">
+            <a:schemeClr val="accent1">
+              <a:shade val="50000"/>
+            </a:schemeClr>
+          </a:lnRef>
+          <a:fillRef idx="1">
+            <a:schemeClr val="accent1"/>
+          </a:fillRef>
+          <a:effectRef idx="0">
+            <a:schemeClr val="accent1"/>
+          </a:effectRef>
+          <a:fontRef idx="minor">
+            <a:schemeClr val="lt1"/>
+          </a:fontRef>
+        </p:style>
+        <p:txBody>
+          <a:bodyPr rtlCol="0" anchor="ctr"/>
+          <a:lstStyle/>
+          <a:p>
+            <a:pPr algn="ctr"/>
+            <a:endParaRPr lang="en-US" dirty="0"/>
+          </a:p>
+        </p:txBody>
+      </p:sp>
       <p:sp>
         <p:nvSpPr>
           <p:cNvPr id="2" name="Titel 1">
@@ -3448,64 +7224,60 @@
             <p:ph type="title"/>
           </p:nvPr>
         </p:nvSpPr>
-        <p:spPr/>
+        <p:spPr>
+          <a:xfrm>
+            <a:off x="1383564" y="348865"/>
+            <a:ext cx="9718111" cy="1576446"/>
+          </a:xfrm>
+        </p:spPr>
         <p:txBody>
-          <a:bodyPr/>
+          <a:bodyPr anchor="ctr">
+            <a:normAutofit/>
+          </a:bodyPr>
           <a:lstStyle/>
           <a:p>
             <a:r>
-              <a:rPr lang="de-CH" dirty="0"/>
+              <a:rPr lang="de-CH" sz="4000">
+                <a:solidFill>
+                  <a:srgbClr val="FFFFFF"/>
+                </a:solidFill>
+              </a:rPr>
               <a:t>Inhalt</a:t>
             </a:r>
           </a:p>
         </p:txBody>
       </p:sp>
-      <p:sp>
-        <p:nvSpPr>
-          <p:cNvPr id="3" name="Inhaltsplatzhalter 2">
-            <a:extLst>
-              <a:ext uri="{FF2B5EF4-FFF2-40B4-BE49-F238E27FC236}">
-                <a16:creationId xmlns:a16="http://schemas.microsoft.com/office/drawing/2014/main" id="{C88223F7-0A02-BEE6-30C8-ABF1ECD755F2}"/>
-              </a:ext>
-            </a:extLst>
-          </p:cNvPr>
-          <p:cNvSpPr>
-            <a:spLocks noGrp="1"/>
-          </p:cNvSpPr>
+      <p:graphicFrame>
+        <p:nvGraphicFramePr>
+          <p:cNvPr id="5" name="Inhaltsplatzhalter 2">
+            <a:extLst>
+              <a:ext uri="{FF2B5EF4-FFF2-40B4-BE49-F238E27FC236}">
+                <a16:creationId xmlns:a16="http://schemas.microsoft.com/office/drawing/2014/main" id="{F6858CC8-039F-DFC3-5AE7-3164434E8921}"/>
+              </a:ext>
+            </a:extLst>
+          </p:cNvPr>
+          <p:cNvGraphicFramePr>
+            <a:graphicFrameLocks noGrp="1"/>
+          </p:cNvGraphicFramePr>
           <p:nvPr>
             <p:ph idx="1"/>
+            <p:extLst>
+              <p:ext uri="{D42A27DB-BD31-4B8C-83A1-F6EECF244321}">
+                <p14:modId xmlns:p14="http://schemas.microsoft.com/office/powerpoint/2010/main" val="2887197179"/>
+              </p:ext>
+            </p:extLst>
           </p:nvPr>
-        </p:nvSpPr>
-        <p:spPr/>
-        <p:txBody>
-          <a:bodyPr/>
-          <a:lstStyle/>
-          <a:p>
-            <a:r>
-              <a:rPr lang="de-CH" dirty="0"/>
-              <a:t>Das Projekt</a:t>
-            </a:r>
-          </a:p>
-          <a:p>
-            <a:r>
-              <a:rPr lang="de-CH" dirty="0"/>
-              <a:t>Produkt</a:t>
-            </a:r>
-          </a:p>
-          <a:p>
-            <a:r>
-              <a:rPr lang="de-CH" dirty="0"/>
-              <a:t>Herangehensweise</a:t>
-            </a:r>
-          </a:p>
-          <a:p>
-            <a:r>
-              <a:rPr lang="de-CH" dirty="0"/>
-              <a:t>Herausforderungen</a:t>
-            </a:r>
-          </a:p>
-        </p:txBody>
-      </p:sp>
+        </p:nvGraphicFramePr>
+        <p:xfrm>
+          <a:off x="644056" y="2615979"/>
+          <a:ext cx="10927829" cy="3689405"/>
+        </p:xfrm>
+        <a:graphic>
+          <a:graphicData uri="http://schemas.openxmlformats.org/drawingml/2006/diagram">
+            <dgm:relIds xmlns:dgm="http://schemas.openxmlformats.org/drawingml/2006/diagram" xmlns:r="http://schemas.openxmlformats.org/officeDocument/2006/relationships" r:dm="rId2" r:lo="rId3" r:qs="rId4" r:cs="rId5"/>
+          </a:graphicData>
+        </a:graphic>
+      </p:graphicFrame>
     </p:spTree>
     <p:extLst>
       <p:ext uri="{BB962C8B-B14F-4D97-AF65-F5344CB8AC3E}">
@@ -3522,6 +7294,14 @@
 <file path=ppt/slides/slide3.xml><?xml version="1.0" encoding="utf-8"?>
 <p:sld xmlns:a="http://schemas.openxmlformats.org/drawingml/2006/main" xmlns:r="http://schemas.openxmlformats.org/officeDocument/2006/relationships" xmlns:p="http://schemas.openxmlformats.org/presentationml/2006/main">
   <p:cSld>
+    <p:bg>
+      <p:bgPr>
+        <a:solidFill>
+          <a:schemeClr val="bg1"/>
+        </a:solidFill>
+        <a:effectLst/>
+      </p:bgPr>
+    </p:bg>
     <p:spTree>
       <p:nvGrpSpPr>
         <p:cNvPr id="1" name=""/>
@@ -3536,6 +7316,382 @@
           <a:chExt cx="0" cy="0"/>
         </a:xfrm>
       </p:grpSpPr>
+      <p:sp useBgFill="1">
+        <p:nvSpPr>
+          <p:cNvPr id="8" name="Rectangle 7">
+            <a:extLst>
+              <a:ext uri="{FF2B5EF4-FFF2-40B4-BE49-F238E27FC236}">
+                <a16:creationId xmlns:a16="http://schemas.microsoft.com/office/drawing/2014/main" id="{1B15ED52-F352-441B-82BF-E0EA34836D08}"/>
+              </a:ext>
+              <a:ext uri="{C183D7F6-B498-43B3-948B-1728B52AA6E4}">
+                <adec:decorative xmlns:adec="http://schemas.microsoft.com/office/drawing/2017/decorative" val="1"/>
+              </a:ext>
+            </a:extLst>
+          </p:cNvPr>
+          <p:cNvSpPr>
+            <a:spLocks noGrp="1" noRot="1" noChangeAspect="1" noMove="1" noResize="1" noEditPoints="1" noAdjustHandles="1" noChangeArrowheads="1" noChangeShapeType="1" noTextEdit="1"/>
+          </p:cNvSpPr>
+          <p:nvPr>
+            <p:extLst>
+              <p:ext uri="{386F3935-93C4-4BCD-93E2-E3B085C9AB24}">
+                <p16:designElem xmlns:p16="http://schemas.microsoft.com/office/powerpoint/2015/main" val="1"/>
+              </p:ext>
+            </p:extLst>
+          </p:nvPr>
+        </p:nvSpPr>
+        <p:spPr>
+          <a:xfrm>
+            <a:off x="0" y="0"/>
+            <a:ext cx="12192000" cy="6858000"/>
+          </a:xfrm>
+          <a:prstGeom prst="rect">
+            <a:avLst/>
+          </a:prstGeom>
+          <a:ln w="12700" cap="flat" cmpd="sng" algn="ctr">
+            <a:noFill/>
+            <a:prstDash val="solid"/>
+            <a:miter lim="800000"/>
+          </a:ln>
+          <a:effectLst/>
+          <a:extLst>
+            <a:ext uri="{91240B29-F687-4F45-9708-019B960494DF}">
+              <a14:hiddenLine xmlns:a14="http://schemas.microsoft.com/office/drawing/2010/main" w="12700" cap="flat" cmpd="sng" algn="ctr">
+                <a:solidFill>
+                  <a:schemeClr val="accent1">
+                    <a:shade val="50000"/>
+                  </a:schemeClr>
+                </a:solidFill>
+                <a:prstDash val="solid"/>
+                <a:miter lim="800000"/>
+              </a14:hiddenLine>
+            </a:ext>
+          </a:extLst>
+        </p:spPr>
+        <p:style>
+          <a:lnRef idx="2">
+            <a:schemeClr val="accent1">
+              <a:shade val="50000"/>
+            </a:schemeClr>
+          </a:lnRef>
+          <a:fillRef idx="1">
+            <a:schemeClr val="accent1"/>
+          </a:fillRef>
+          <a:effectRef idx="0">
+            <a:schemeClr val="accent1"/>
+          </a:effectRef>
+          <a:fontRef idx="minor">
+            <a:schemeClr val="lt1"/>
+          </a:fontRef>
+        </p:style>
+        <p:txBody>
+          <a:bodyPr rtlCol="0" anchor="ctr"/>
+          <a:lstStyle/>
+          <a:p>
+            <a:pPr algn="ctr"/>
+            <a:endParaRPr lang="en-US"/>
+          </a:p>
+        </p:txBody>
+      </p:sp>
+      <p:sp>
+        <p:nvSpPr>
+          <p:cNvPr id="10" name="Rectangle 9">
+            <a:extLst>
+              <a:ext uri="{FF2B5EF4-FFF2-40B4-BE49-F238E27FC236}">
+                <a16:creationId xmlns:a16="http://schemas.microsoft.com/office/drawing/2014/main" id="{3B2E3793-BFE6-45A2-9B7B-E18844431C99}"/>
+              </a:ext>
+              <a:ext uri="{C183D7F6-B498-43B3-948B-1728B52AA6E4}">
+                <adec:decorative xmlns:adec="http://schemas.microsoft.com/office/drawing/2017/decorative" val="1"/>
+              </a:ext>
+            </a:extLst>
+          </p:cNvPr>
+          <p:cNvSpPr>
+            <a:spLocks noGrp="1" noRot="1" noChangeAspect="1" noMove="1" noResize="1" noEditPoints="1" noAdjustHandles="1" noChangeArrowheads="1" noChangeShapeType="1" noTextEdit="1"/>
+          </p:cNvSpPr>
+          <p:nvPr>
+            <p:extLst>
+              <p:ext uri="{386F3935-93C4-4BCD-93E2-E3B085C9AB24}">
+                <p16:designElem xmlns:p16="http://schemas.microsoft.com/office/powerpoint/2015/main" val="1"/>
+              </p:ext>
+            </p:extLst>
+          </p:nvPr>
+        </p:nvSpPr>
+        <p:spPr>
+          <a:xfrm flipH="1">
+            <a:off x="-1" y="-1"/>
+            <a:ext cx="12191998" cy="1590742"/>
+          </a:xfrm>
+          <a:prstGeom prst="rect">
+            <a:avLst/>
+          </a:prstGeom>
+          <a:gradFill>
+            <a:gsLst>
+              <a:gs pos="0">
+                <a:srgbClr val="000000"/>
+              </a:gs>
+              <a:gs pos="100000">
+                <a:schemeClr val="accent1">
+                  <a:lumMod val="75000"/>
+                </a:schemeClr>
+              </a:gs>
+            </a:gsLst>
+            <a:lin ang="8400000" scaled="0"/>
+          </a:gradFill>
+          <a:ln>
+            <a:noFill/>
+          </a:ln>
+        </p:spPr>
+        <p:style>
+          <a:lnRef idx="2">
+            <a:schemeClr val="accent1">
+              <a:shade val="50000"/>
+            </a:schemeClr>
+          </a:lnRef>
+          <a:fillRef idx="1">
+            <a:schemeClr val="accent1"/>
+          </a:fillRef>
+          <a:effectRef idx="0">
+            <a:schemeClr val="accent1"/>
+          </a:effectRef>
+          <a:fontRef idx="minor">
+            <a:schemeClr val="lt1"/>
+          </a:fontRef>
+        </p:style>
+        <p:txBody>
+          <a:bodyPr rtlCol="0" anchor="ctr"/>
+          <a:lstStyle/>
+          <a:p>
+            <a:pPr algn="ctr"/>
+            <a:endParaRPr lang="en-US"/>
+          </a:p>
+        </p:txBody>
+      </p:sp>
+      <p:sp>
+        <p:nvSpPr>
+          <p:cNvPr id="12" name="Rectangle 11">
+            <a:extLst>
+              <a:ext uri="{FF2B5EF4-FFF2-40B4-BE49-F238E27FC236}">
+                <a16:creationId xmlns:a16="http://schemas.microsoft.com/office/drawing/2014/main" id="{BC4C4868-CB8F-4AF9-9CDB-8108F2C19B67}"/>
+              </a:ext>
+              <a:ext uri="{C183D7F6-B498-43B3-948B-1728B52AA6E4}">
+                <adec:decorative xmlns:adec="http://schemas.microsoft.com/office/drawing/2017/decorative" val="1"/>
+              </a:ext>
+            </a:extLst>
+          </p:cNvPr>
+          <p:cNvSpPr>
+            <a:spLocks noGrp="1" noRot="1" noChangeAspect="1" noMove="1" noResize="1" noEditPoints="1" noAdjustHandles="1" noChangeArrowheads="1" noChangeShapeType="1" noTextEdit="1"/>
+          </p:cNvSpPr>
+          <p:nvPr>
+            <p:extLst>
+              <p:ext uri="{386F3935-93C4-4BCD-93E2-E3B085C9AB24}">
+                <p16:designElem xmlns:p16="http://schemas.microsoft.com/office/powerpoint/2015/main" val="1"/>
+              </p:ext>
+            </p:extLst>
+          </p:nvPr>
+        </p:nvSpPr>
+        <p:spPr>
+          <a:xfrm rot="10800000" flipH="1">
+            <a:off x="-3" y="0"/>
+            <a:ext cx="8115306" cy="1590742"/>
+          </a:xfrm>
+          <a:prstGeom prst="rect">
+            <a:avLst/>
+          </a:prstGeom>
+          <a:gradFill>
+            <a:gsLst>
+              <a:gs pos="20000">
+                <a:schemeClr val="accent1">
+                  <a:alpha val="0"/>
+                </a:schemeClr>
+              </a:gs>
+              <a:gs pos="100000">
+                <a:schemeClr val="accent1">
+                  <a:lumMod val="50000"/>
+                  <a:alpha val="55000"/>
+                </a:schemeClr>
+              </a:gs>
+            </a:gsLst>
+            <a:lin ang="13800000" scaled="0"/>
+          </a:gradFill>
+          <a:ln>
+            <a:noFill/>
+          </a:ln>
+        </p:spPr>
+        <p:style>
+          <a:lnRef idx="2">
+            <a:schemeClr val="accent1">
+              <a:shade val="50000"/>
+            </a:schemeClr>
+          </a:lnRef>
+          <a:fillRef idx="1">
+            <a:schemeClr val="accent1"/>
+          </a:fillRef>
+          <a:effectRef idx="0">
+            <a:schemeClr val="accent1"/>
+          </a:effectRef>
+          <a:fontRef idx="minor">
+            <a:schemeClr val="lt1"/>
+          </a:fontRef>
+        </p:style>
+        <p:txBody>
+          <a:bodyPr rtlCol="0" anchor="ctr"/>
+          <a:lstStyle/>
+          <a:p>
+            <a:pPr algn="ctr"/>
+            <a:endParaRPr lang="en-US"/>
+          </a:p>
+        </p:txBody>
+      </p:sp>
+      <p:sp>
+        <p:nvSpPr>
+          <p:cNvPr id="14" name="Rectangle 13">
+            <a:extLst>
+              <a:ext uri="{FF2B5EF4-FFF2-40B4-BE49-F238E27FC236}">
+                <a16:creationId xmlns:a16="http://schemas.microsoft.com/office/drawing/2014/main" id="{375E0459-6403-40CD-989D-56A4407CA12E}"/>
+              </a:ext>
+              <a:ext uri="{C183D7F6-B498-43B3-948B-1728B52AA6E4}">
+                <adec:decorative xmlns:adec="http://schemas.microsoft.com/office/drawing/2017/decorative" val="1"/>
+              </a:ext>
+            </a:extLst>
+          </p:cNvPr>
+          <p:cNvSpPr>
+            <a:spLocks noGrp="1" noRot="1" noChangeAspect="1" noMove="1" noResize="1" noEditPoints="1" noAdjustHandles="1" noChangeArrowheads="1" noChangeShapeType="1" noTextEdit="1"/>
+          </p:cNvSpPr>
+          <p:nvPr>
+            <p:extLst>
+              <p:ext uri="{386F3935-93C4-4BCD-93E2-E3B085C9AB24}">
+                <p16:designElem xmlns:p16="http://schemas.microsoft.com/office/powerpoint/2015/main" val="1"/>
+              </p:ext>
+            </p:extLst>
+          </p:nvPr>
+        </p:nvSpPr>
+        <p:spPr>
+          <a:xfrm flipH="1">
+            <a:off x="8115299" y="-1"/>
+            <a:ext cx="4076698" cy="1590742"/>
+          </a:xfrm>
+          <a:prstGeom prst="rect">
+            <a:avLst/>
+          </a:prstGeom>
+          <a:gradFill>
+            <a:gsLst>
+              <a:gs pos="0">
+                <a:schemeClr val="accent1">
+                  <a:alpha val="66000"/>
+                </a:schemeClr>
+              </a:gs>
+              <a:gs pos="100000">
+                <a:srgbClr val="000000">
+                  <a:alpha val="30000"/>
+                </a:srgbClr>
+              </a:gs>
+            </a:gsLst>
+            <a:lin ang="13200000" scaled="0"/>
+          </a:gradFill>
+          <a:ln>
+            <a:noFill/>
+          </a:ln>
+        </p:spPr>
+        <p:style>
+          <a:lnRef idx="2">
+            <a:schemeClr val="accent1">
+              <a:shade val="50000"/>
+            </a:schemeClr>
+          </a:lnRef>
+          <a:fillRef idx="1">
+            <a:schemeClr val="accent1"/>
+          </a:fillRef>
+          <a:effectRef idx="0">
+            <a:schemeClr val="accent1"/>
+          </a:effectRef>
+          <a:fontRef idx="minor">
+            <a:schemeClr val="lt1"/>
+          </a:fontRef>
+        </p:style>
+        <p:txBody>
+          <a:bodyPr rtlCol="0" anchor="ctr"/>
+          <a:lstStyle/>
+          <a:p>
+            <a:pPr algn="ctr"/>
+            <a:endParaRPr lang="en-US"/>
+          </a:p>
+        </p:txBody>
+      </p:sp>
+      <p:sp>
+        <p:nvSpPr>
+          <p:cNvPr id="16" name="Rectangle 15">
+            <a:extLst>
+              <a:ext uri="{FF2B5EF4-FFF2-40B4-BE49-F238E27FC236}">
+                <a16:creationId xmlns:a16="http://schemas.microsoft.com/office/drawing/2014/main" id="{53E5B1A8-3AC9-4BD1-9BBC-78CA94F2D1BA}"/>
+              </a:ext>
+              <a:ext uri="{C183D7F6-B498-43B3-948B-1728B52AA6E4}">
+                <adec:decorative xmlns:adec="http://schemas.microsoft.com/office/drawing/2017/decorative" val="1"/>
+              </a:ext>
+            </a:extLst>
+          </p:cNvPr>
+          <p:cNvSpPr>
+            <a:spLocks noGrp="1" noRot="1" noChangeAspect="1" noMove="1" noResize="1" noEditPoints="1" noAdjustHandles="1" noChangeArrowheads="1" noChangeShapeType="1" noTextEdit="1"/>
+          </p:cNvSpPr>
+          <p:nvPr>
+            <p:extLst>
+              <p:ext uri="{386F3935-93C4-4BCD-93E2-E3B085C9AB24}">
+                <p16:designElem xmlns:p16="http://schemas.microsoft.com/office/powerpoint/2015/main" val="1"/>
+              </p:ext>
+            </p:extLst>
+          </p:nvPr>
+        </p:nvSpPr>
+        <p:spPr>
+          <a:xfrm>
+            <a:off x="459350" y="-1"/>
+            <a:ext cx="11732646" cy="1597433"/>
+          </a:xfrm>
+          <a:prstGeom prst="rect">
+            <a:avLst/>
+          </a:prstGeom>
+          <a:gradFill>
+            <a:gsLst>
+              <a:gs pos="50000">
+                <a:srgbClr val="000000">
+                  <a:alpha val="0"/>
+                </a:srgbClr>
+              </a:gs>
+              <a:gs pos="99000">
+                <a:schemeClr val="accent1">
+                  <a:lumMod val="50000"/>
+                  <a:alpha val="52000"/>
+                </a:schemeClr>
+              </a:gs>
+            </a:gsLst>
+            <a:lin ang="16800000" scaled="0"/>
+          </a:gradFill>
+          <a:ln>
+            <a:noFill/>
+          </a:ln>
+        </p:spPr>
+        <p:style>
+          <a:lnRef idx="2">
+            <a:schemeClr val="accent1">
+              <a:shade val="50000"/>
+            </a:schemeClr>
+          </a:lnRef>
+          <a:fillRef idx="1">
+            <a:schemeClr val="accent1"/>
+          </a:fillRef>
+          <a:effectRef idx="0">
+            <a:schemeClr val="accent1"/>
+          </a:effectRef>
+          <a:fontRef idx="minor">
+            <a:schemeClr val="lt1"/>
+          </a:fontRef>
+        </p:style>
+        <p:txBody>
+          <a:bodyPr rtlCol="0" anchor="ctr"/>
+          <a:lstStyle/>
+          <a:p>
+            <a:pPr algn="ctr"/>
+            <a:endParaRPr lang="en-US"/>
+          </a:p>
+        </p:txBody>
+      </p:sp>
       <p:sp>
         <p:nvSpPr>
           <p:cNvPr id="2" name="Titel 1">
@@ -3552,13 +7708,24 @@
             <p:ph type="title"/>
           </p:nvPr>
         </p:nvSpPr>
-        <p:spPr/>
+        <p:spPr>
+          <a:xfrm>
+            <a:off x="1371599" y="294538"/>
+            <a:ext cx="9895951" cy="1033669"/>
+          </a:xfrm>
+        </p:spPr>
         <p:txBody>
-          <a:bodyPr/>
+          <a:bodyPr>
+            <a:normAutofit/>
+          </a:bodyPr>
           <a:lstStyle/>
           <a:p>
             <a:r>
-              <a:rPr lang="de-CH" dirty="0"/>
+              <a:rPr lang="de-CH" sz="4000">
+                <a:solidFill>
+                  <a:srgbClr val="FFFFFF"/>
+                </a:solidFill>
+              </a:rPr>
               <a:t>Mein Projekt</a:t>
             </a:r>
           </a:p>
@@ -3580,13 +7747,20 @@
             <p:ph idx="1"/>
           </p:nvPr>
         </p:nvSpPr>
-        <p:spPr/>
+        <p:spPr>
+          <a:xfrm>
+            <a:off x="1371599" y="2318197"/>
+            <a:ext cx="9724031" cy="3683358"/>
+          </a:xfrm>
+        </p:spPr>
         <p:txBody>
-          <a:bodyPr/>
+          <a:bodyPr anchor="ctr">
+            <a:normAutofit/>
+          </a:bodyPr>
           <a:lstStyle/>
           <a:p>
             <a:r>
-              <a:rPr lang="de-CH" dirty="0"/>
+              <a:rPr lang="de-CH" sz="2000"/>
               <a:t>Anforderungen: </a:t>
             </a:r>
           </a:p>
@@ -3596,7 +7770,7 @@
               <a:buAutoNum type="arabicPeriod"/>
             </a:pPr>
             <a:r>
-              <a:rPr lang="de-CH" dirty="0"/>
+              <a:rPr lang="de-CH" sz="2000"/>
               <a:t>Web Shop</a:t>
             </a:r>
           </a:p>
@@ -3606,7 +7780,7 @@
               <a:buAutoNum type="arabicPeriod"/>
             </a:pPr>
             <a:r>
-              <a:rPr lang="de-CH" dirty="0"/>
+              <a:rPr lang="de-CH" sz="2000"/>
               <a:t>Nur HTML/CSS/JS als Programmiersprachen</a:t>
             </a:r>
           </a:p>
@@ -3616,14 +7790,9 @@
               <a:buAutoNum type="arabicPeriod"/>
             </a:pPr>
             <a:r>
-              <a:rPr lang="de-CH" dirty="0"/>
-              <a:t>Warenkorb </a:t>
+              <a:rPr lang="de-CH" sz="2000"/>
+              <a:t>Warenkorb Funktion</a:t>
             </a:r>
-            <a:r>
-              <a:rPr lang="de-CH" dirty="0" err="1"/>
-              <a:t>funktion</a:t>
-            </a:r>
-            <a:endParaRPr lang="de-CH" dirty="0"/>
           </a:p>
         </p:txBody>
       </p:sp>
@@ -3643,6 +7812,14 @@
 <file path=ppt/slides/slide4.xml><?xml version="1.0" encoding="utf-8"?>
 <p:sld xmlns:a="http://schemas.openxmlformats.org/drawingml/2006/main" xmlns:r="http://schemas.openxmlformats.org/officeDocument/2006/relationships" xmlns:p="http://schemas.openxmlformats.org/presentationml/2006/main">
   <p:cSld>
+    <p:bg>
+      <p:bgPr>
+        <a:solidFill>
+          <a:schemeClr val="bg1"/>
+        </a:solidFill>
+        <a:effectLst/>
+      </p:bgPr>
+    </p:bg>
     <p:spTree>
       <p:nvGrpSpPr>
         <p:cNvPr id="1" name=""/>
@@ -3657,6 +7834,382 @@
           <a:chExt cx="0" cy="0"/>
         </a:xfrm>
       </p:grpSpPr>
+      <p:sp useBgFill="1">
+        <p:nvSpPr>
+          <p:cNvPr id="20" name="Rectangle 7">
+            <a:extLst>
+              <a:ext uri="{FF2B5EF4-FFF2-40B4-BE49-F238E27FC236}">
+                <a16:creationId xmlns:a16="http://schemas.microsoft.com/office/drawing/2014/main" id="{1B15ED52-F352-441B-82BF-E0EA34836D08}"/>
+              </a:ext>
+              <a:ext uri="{C183D7F6-B498-43B3-948B-1728B52AA6E4}">
+                <adec:decorative xmlns:adec="http://schemas.microsoft.com/office/drawing/2017/decorative" val="1"/>
+              </a:ext>
+            </a:extLst>
+          </p:cNvPr>
+          <p:cNvSpPr>
+            <a:spLocks noGrp="1" noRot="1" noChangeAspect="1" noMove="1" noResize="1" noEditPoints="1" noAdjustHandles="1" noChangeArrowheads="1" noChangeShapeType="1" noTextEdit="1"/>
+          </p:cNvSpPr>
+          <p:nvPr>
+            <p:extLst>
+              <p:ext uri="{386F3935-93C4-4BCD-93E2-E3B085C9AB24}">
+                <p16:designElem xmlns:p16="http://schemas.microsoft.com/office/powerpoint/2015/main" val="1"/>
+              </p:ext>
+            </p:extLst>
+          </p:nvPr>
+        </p:nvSpPr>
+        <p:spPr>
+          <a:xfrm>
+            <a:off x="0" y="0"/>
+            <a:ext cx="12192000" cy="6858000"/>
+          </a:xfrm>
+          <a:prstGeom prst="rect">
+            <a:avLst/>
+          </a:prstGeom>
+          <a:ln w="12700" cap="flat" cmpd="sng" algn="ctr">
+            <a:noFill/>
+            <a:prstDash val="solid"/>
+            <a:miter lim="800000"/>
+          </a:ln>
+          <a:effectLst/>
+          <a:extLst>
+            <a:ext uri="{91240B29-F687-4F45-9708-019B960494DF}">
+              <a14:hiddenLine xmlns:a14="http://schemas.microsoft.com/office/drawing/2010/main" w="12700" cap="flat" cmpd="sng" algn="ctr">
+                <a:solidFill>
+                  <a:schemeClr val="accent1">
+                    <a:shade val="50000"/>
+                  </a:schemeClr>
+                </a:solidFill>
+                <a:prstDash val="solid"/>
+                <a:miter lim="800000"/>
+              </a14:hiddenLine>
+            </a:ext>
+          </a:extLst>
+        </p:spPr>
+        <p:style>
+          <a:lnRef idx="2">
+            <a:schemeClr val="accent1">
+              <a:shade val="50000"/>
+            </a:schemeClr>
+          </a:lnRef>
+          <a:fillRef idx="1">
+            <a:schemeClr val="accent1"/>
+          </a:fillRef>
+          <a:effectRef idx="0">
+            <a:schemeClr val="accent1"/>
+          </a:effectRef>
+          <a:fontRef idx="minor">
+            <a:schemeClr val="lt1"/>
+          </a:fontRef>
+        </p:style>
+        <p:txBody>
+          <a:bodyPr rtlCol="0" anchor="ctr"/>
+          <a:lstStyle/>
+          <a:p>
+            <a:pPr algn="ctr"/>
+            <a:endParaRPr lang="en-US"/>
+          </a:p>
+        </p:txBody>
+      </p:sp>
+      <p:sp>
+        <p:nvSpPr>
+          <p:cNvPr id="21" name="Rectangle 9">
+            <a:extLst>
+              <a:ext uri="{FF2B5EF4-FFF2-40B4-BE49-F238E27FC236}">
+                <a16:creationId xmlns:a16="http://schemas.microsoft.com/office/drawing/2014/main" id="{3B2E3793-BFE6-45A2-9B7B-E18844431C99}"/>
+              </a:ext>
+              <a:ext uri="{C183D7F6-B498-43B3-948B-1728B52AA6E4}">
+                <adec:decorative xmlns:adec="http://schemas.microsoft.com/office/drawing/2017/decorative" val="1"/>
+              </a:ext>
+            </a:extLst>
+          </p:cNvPr>
+          <p:cNvSpPr>
+            <a:spLocks noGrp="1" noRot="1" noChangeAspect="1" noMove="1" noResize="1" noEditPoints="1" noAdjustHandles="1" noChangeArrowheads="1" noChangeShapeType="1" noTextEdit="1"/>
+          </p:cNvSpPr>
+          <p:nvPr>
+            <p:extLst>
+              <p:ext uri="{386F3935-93C4-4BCD-93E2-E3B085C9AB24}">
+                <p16:designElem xmlns:p16="http://schemas.microsoft.com/office/powerpoint/2015/main" val="1"/>
+              </p:ext>
+            </p:extLst>
+          </p:nvPr>
+        </p:nvSpPr>
+        <p:spPr>
+          <a:xfrm flipH="1">
+            <a:off x="-1" y="-1"/>
+            <a:ext cx="12191998" cy="1590742"/>
+          </a:xfrm>
+          <a:prstGeom prst="rect">
+            <a:avLst/>
+          </a:prstGeom>
+          <a:gradFill>
+            <a:gsLst>
+              <a:gs pos="0">
+                <a:srgbClr val="000000"/>
+              </a:gs>
+              <a:gs pos="100000">
+                <a:schemeClr val="accent1">
+                  <a:lumMod val="75000"/>
+                </a:schemeClr>
+              </a:gs>
+            </a:gsLst>
+            <a:lin ang="8400000" scaled="0"/>
+          </a:gradFill>
+          <a:ln>
+            <a:noFill/>
+          </a:ln>
+        </p:spPr>
+        <p:style>
+          <a:lnRef idx="2">
+            <a:schemeClr val="accent1">
+              <a:shade val="50000"/>
+            </a:schemeClr>
+          </a:lnRef>
+          <a:fillRef idx="1">
+            <a:schemeClr val="accent1"/>
+          </a:fillRef>
+          <a:effectRef idx="0">
+            <a:schemeClr val="accent1"/>
+          </a:effectRef>
+          <a:fontRef idx="minor">
+            <a:schemeClr val="lt1"/>
+          </a:fontRef>
+        </p:style>
+        <p:txBody>
+          <a:bodyPr rtlCol="0" anchor="ctr"/>
+          <a:lstStyle/>
+          <a:p>
+            <a:pPr algn="ctr"/>
+            <a:endParaRPr lang="en-US"/>
+          </a:p>
+        </p:txBody>
+      </p:sp>
+      <p:sp>
+        <p:nvSpPr>
+          <p:cNvPr id="22" name="Rectangle 11">
+            <a:extLst>
+              <a:ext uri="{FF2B5EF4-FFF2-40B4-BE49-F238E27FC236}">
+                <a16:creationId xmlns:a16="http://schemas.microsoft.com/office/drawing/2014/main" id="{BC4C4868-CB8F-4AF9-9CDB-8108F2C19B67}"/>
+              </a:ext>
+              <a:ext uri="{C183D7F6-B498-43B3-948B-1728B52AA6E4}">
+                <adec:decorative xmlns:adec="http://schemas.microsoft.com/office/drawing/2017/decorative" val="1"/>
+              </a:ext>
+            </a:extLst>
+          </p:cNvPr>
+          <p:cNvSpPr>
+            <a:spLocks noGrp="1" noRot="1" noChangeAspect="1" noMove="1" noResize="1" noEditPoints="1" noAdjustHandles="1" noChangeArrowheads="1" noChangeShapeType="1" noTextEdit="1"/>
+          </p:cNvSpPr>
+          <p:nvPr>
+            <p:extLst>
+              <p:ext uri="{386F3935-93C4-4BCD-93E2-E3B085C9AB24}">
+                <p16:designElem xmlns:p16="http://schemas.microsoft.com/office/powerpoint/2015/main" val="1"/>
+              </p:ext>
+            </p:extLst>
+          </p:nvPr>
+        </p:nvSpPr>
+        <p:spPr>
+          <a:xfrm rot="10800000" flipH="1">
+            <a:off x="-3" y="0"/>
+            <a:ext cx="8115306" cy="1590742"/>
+          </a:xfrm>
+          <a:prstGeom prst="rect">
+            <a:avLst/>
+          </a:prstGeom>
+          <a:gradFill>
+            <a:gsLst>
+              <a:gs pos="20000">
+                <a:schemeClr val="accent1">
+                  <a:alpha val="0"/>
+                </a:schemeClr>
+              </a:gs>
+              <a:gs pos="100000">
+                <a:schemeClr val="accent1">
+                  <a:lumMod val="50000"/>
+                  <a:alpha val="55000"/>
+                </a:schemeClr>
+              </a:gs>
+            </a:gsLst>
+            <a:lin ang="13800000" scaled="0"/>
+          </a:gradFill>
+          <a:ln>
+            <a:noFill/>
+          </a:ln>
+        </p:spPr>
+        <p:style>
+          <a:lnRef idx="2">
+            <a:schemeClr val="accent1">
+              <a:shade val="50000"/>
+            </a:schemeClr>
+          </a:lnRef>
+          <a:fillRef idx="1">
+            <a:schemeClr val="accent1"/>
+          </a:fillRef>
+          <a:effectRef idx="0">
+            <a:schemeClr val="accent1"/>
+          </a:effectRef>
+          <a:fontRef idx="minor">
+            <a:schemeClr val="lt1"/>
+          </a:fontRef>
+        </p:style>
+        <p:txBody>
+          <a:bodyPr rtlCol="0" anchor="ctr"/>
+          <a:lstStyle/>
+          <a:p>
+            <a:pPr algn="ctr"/>
+            <a:endParaRPr lang="en-US"/>
+          </a:p>
+        </p:txBody>
+      </p:sp>
+      <p:sp>
+        <p:nvSpPr>
+          <p:cNvPr id="23" name="Rectangle 13">
+            <a:extLst>
+              <a:ext uri="{FF2B5EF4-FFF2-40B4-BE49-F238E27FC236}">
+                <a16:creationId xmlns:a16="http://schemas.microsoft.com/office/drawing/2014/main" id="{375E0459-6403-40CD-989D-56A4407CA12E}"/>
+              </a:ext>
+              <a:ext uri="{C183D7F6-B498-43B3-948B-1728B52AA6E4}">
+                <adec:decorative xmlns:adec="http://schemas.microsoft.com/office/drawing/2017/decorative" val="1"/>
+              </a:ext>
+            </a:extLst>
+          </p:cNvPr>
+          <p:cNvSpPr>
+            <a:spLocks noGrp="1" noRot="1" noChangeAspect="1" noMove="1" noResize="1" noEditPoints="1" noAdjustHandles="1" noChangeArrowheads="1" noChangeShapeType="1" noTextEdit="1"/>
+          </p:cNvSpPr>
+          <p:nvPr>
+            <p:extLst>
+              <p:ext uri="{386F3935-93C4-4BCD-93E2-E3B085C9AB24}">
+                <p16:designElem xmlns:p16="http://schemas.microsoft.com/office/powerpoint/2015/main" val="1"/>
+              </p:ext>
+            </p:extLst>
+          </p:nvPr>
+        </p:nvSpPr>
+        <p:spPr>
+          <a:xfrm flipH="1">
+            <a:off x="8115299" y="-1"/>
+            <a:ext cx="4076698" cy="1590742"/>
+          </a:xfrm>
+          <a:prstGeom prst="rect">
+            <a:avLst/>
+          </a:prstGeom>
+          <a:gradFill>
+            <a:gsLst>
+              <a:gs pos="0">
+                <a:schemeClr val="accent1">
+                  <a:alpha val="66000"/>
+                </a:schemeClr>
+              </a:gs>
+              <a:gs pos="100000">
+                <a:srgbClr val="000000">
+                  <a:alpha val="30000"/>
+                </a:srgbClr>
+              </a:gs>
+            </a:gsLst>
+            <a:lin ang="13200000" scaled="0"/>
+          </a:gradFill>
+          <a:ln>
+            <a:noFill/>
+          </a:ln>
+        </p:spPr>
+        <p:style>
+          <a:lnRef idx="2">
+            <a:schemeClr val="accent1">
+              <a:shade val="50000"/>
+            </a:schemeClr>
+          </a:lnRef>
+          <a:fillRef idx="1">
+            <a:schemeClr val="accent1"/>
+          </a:fillRef>
+          <a:effectRef idx="0">
+            <a:schemeClr val="accent1"/>
+          </a:effectRef>
+          <a:fontRef idx="minor">
+            <a:schemeClr val="lt1"/>
+          </a:fontRef>
+        </p:style>
+        <p:txBody>
+          <a:bodyPr rtlCol="0" anchor="ctr"/>
+          <a:lstStyle/>
+          <a:p>
+            <a:pPr algn="ctr"/>
+            <a:endParaRPr lang="en-US"/>
+          </a:p>
+        </p:txBody>
+      </p:sp>
+      <p:sp>
+        <p:nvSpPr>
+          <p:cNvPr id="24" name="Rectangle 15">
+            <a:extLst>
+              <a:ext uri="{FF2B5EF4-FFF2-40B4-BE49-F238E27FC236}">
+                <a16:creationId xmlns:a16="http://schemas.microsoft.com/office/drawing/2014/main" id="{53E5B1A8-3AC9-4BD1-9BBC-78CA94F2D1BA}"/>
+              </a:ext>
+              <a:ext uri="{C183D7F6-B498-43B3-948B-1728B52AA6E4}">
+                <adec:decorative xmlns:adec="http://schemas.microsoft.com/office/drawing/2017/decorative" val="1"/>
+              </a:ext>
+            </a:extLst>
+          </p:cNvPr>
+          <p:cNvSpPr>
+            <a:spLocks noGrp="1" noRot="1" noChangeAspect="1" noMove="1" noResize="1" noEditPoints="1" noAdjustHandles="1" noChangeArrowheads="1" noChangeShapeType="1" noTextEdit="1"/>
+          </p:cNvSpPr>
+          <p:nvPr>
+            <p:extLst>
+              <p:ext uri="{386F3935-93C4-4BCD-93E2-E3B085C9AB24}">
+                <p16:designElem xmlns:p16="http://schemas.microsoft.com/office/powerpoint/2015/main" val="1"/>
+              </p:ext>
+            </p:extLst>
+          </p:nvPr>
+        </p:nvSpPr>
+        <p:spPr>
+          <a:xfrm>
+            <a:off x="459350" y="-1"/>
+            <a:ext cx="11732646" cy="1597433"/>
+          </a:xfrm>
+          <a:prstGeom prst="rect">
+            <a:avLst/>
+          </a:prstGeom>
+          <a:gradFill>
+            <a:gsLst>
+              <a:gs pos="50000">
+                <a:srgbClr val="000000">
+                  <a:alpha val="0"/>
+                </a:srgbClr>
+              </a:gs>
+              <a:gs pos="99000">
+                <a:schemeClr val="accent1">
+                  <a:lumMod val="50000"/>
+                  <a:alpha val="52000"/>
+                </a:schemeClr>
+              </a:gs>
+            </a:gsLst>
+            <a:lin ang="16800000" scaled="0"/>
+          </a:gradFill>
+          <a:ln>
+            <a:noFill/>
+          </a:ln>
+        </p:spPr>
+        <p:style>
+          <a:lnRef idx="2">
+            <a:schemeClr val="accent1">
+              <a:shade val="50000"/>
+            </a:schemeClr>
+          </a:lnRef>
+          <a:fillRef idx="1">
+            <a:schemeClr val="accent1"/>
+          </a:fillRef>
+          <a:effectRef idx="0">
+            <a:schemeClr val="accent1"/>
+          </a:effectRef>
+          <a:fontRef idx="minor">
+            <a:schemeClr val="lt1"/>
+          </a:fontRef>
+        </p:style>
+        <p:txBody>
+          <a:bodyPr rtlCol="0" anchor="ctr"/>
+          <a:lstStyle/>
+          <a:p>
+            <a:pPr algn="ctr"/>
+            <a:endParaRPr lang="en-US"/>
+          </a:p>
+        </p:txBody>
+      </p:sp>
       <p:sp>
         <p:nvSpPr>
           <p:cNvPr id="2" name="Titel 1">
@@ -3673,13 +8226,24 @@
             <p:ph type="title"/>
           </p:nvPr>
         </p:nvSpPr>
-        <p:spPr/>
+        <p:spPr>
+          <a:xfrm>
+            <a:off x="1371599" y="294538"/>
+            <a:ext cx="9895951" cy="1033669"/>
+          </a:xfrm>
+        </p:spPr>
         <p:txBody>
-          <a:bodyPr/>
+          <a:bodyPr>
+            <a:normAutofit/>
+          </a:bodyPr>
           <a:lstStyle/>
           <a:p>
             <a:r>
-              <a:rPr lang="de-CH" dirty="0"/>
+              <a:rPr lang="de-CH" sz="4000">
+                <a:solidFill>
+                  <a:srgbClr val="FFFFFF"/>
+                </a:solidFill>
+              </a:rPr>
               <a:t>Präsentation des Webshops</a:t>
             </a:r>
           </a:p>
@@ -3701,13 +8265,20 @@
             <p:ph idx="1"/>
           </p:nvPr>
         </p:nvSpPr>
-        <p:spPr/>
+        <p:spPr>
+          <a:xfrm>
+            <a:off x="1371599" y="2318197"/>
+            <a:ext cx="9724031" cy="3683358"/>
+          </a:xfrm>
+        </p:spPr>
         <p:txBody>
-          <a:bodyPr/>
+          <a:bodyPr anchor="ctr">
+            <a:normAutofit/>
+          </a:bodyPr>
           <a:lstStyle/>
           <a:p>
             <a:r>
-              <a:rPr lang="de-CH" dirty="0"/>
+              <a:rPr lang="de-CH" sz="2000"/>
               <a:t>https://lorissuperstar.github.io/m293/index.html</a:t>
             </a:r>
           </a:p>
@@ -3723,6 +8294,678 @@
   <p:clrMapOvr>
     <a:masterClrMapping/>
   </p:clrMapOvr>
+  <p:timing>
+    <p:tnLst>
+      <p:par>
+        <p:cTn id="1" dur="indefinite" restart="never" nodeType="tmRoot">
+          <p:childTnLst>
+            <p:seq concurrent="1" nextAc="seek">
+              <p:cTn id="2" dur="indefinite" nodeType="mainSeq">
+                <p:childTnLst>
+                  <p:par>
+                    <p:cTn id="3" fill="hold">
+                      <p:stCondLst>
+                        <p:cond delay="indefinite"/>
+                        <p:cond evt="onBegin" delay="0">
+                          <p:tn val="2"/>
+                        </p:cond>
+                      </p:stCondLst>
+                      <p:childTnLst>
+                        <p:par>
+                          <p:cTn id="4" fill="hold">
+                            <p:stCondLst>
+                              <p:cond delay="0"/>
+                            </p:stCondLst>
+                            <p:childTnLst>
+                              <p:par>
+                                <p:cTn id="5" presetID="10" presetClass="entr" presetSubtype="0" fill="hold" grpId="0" nodeType="withEffect">
+                                  <p:stCondLst>
+                                    <p:cond delay="500"/>
+                                  </p:stCondLst>
+                                  <p:iterate type="wd">
+                                    <p:tmPct val="15000"/>
+                                  </p:iterate>
+                                  <p:childTnLst>
+                                    <p:set>
+                                      <p:cBhvr>
+                                        <p:cTn id="6" dur="1" fill="hold">
+                                          <p:stCondLst>
+                                            <p:cond delay="0"/>
+                                          </p:stCondLst>
+                                        </p:cTn>
+                                        <p:tgtEl>
+                                          <p:spTgt spid="2"/>
+                                        </p:tgtEl>
+                                        <p:attrNameLst>
+                                          <p:attrName>style.visibility</p:attrName>
+                                        </p:attrNameLst>
+                                      </p:cBhvr>
+                                      <p:to>
+                                        <p:strVal val="visible"/>
+                                      </p:to>
+                                    </p:set>
+                                    <p:animEffect transition="in" filter="fade">
+                                      <p:cBhvr>
+                                        <p:cTn id="7" dur="1000"/>
+                                        <p:tgtEl>
+                                          <p:spTgt spid="2"/>
+                                        </p:tgtEl>
+                                      </p:cBhvr>
+                                    </p:animEffect>
+                                  </p:childTnLst>
+                                </p:cTn>
+                              </p:par>
+                            </p:childTnLst>
+                          </p:cTn>
+                        </p:par>
+                      </p:childTnLst>
+                    </p:cTn>
+                  </p:par>
+                </p:childTnLst>
+              </p:cTn>
+              <p:prevCondLst>
+                <p:cond evt="onPrev" delay="0">
+                  <p:tgtEl>
+                    <p:sldTgt/>
+                  </p:tgtEl>
+                </p:cond>
+              </p:prevCondLst>
+              <p:nextCondLst>
+                <p:cond evt="onNext" delay="0">
+                  <p:tgtEl>
+                    <p:sldTgt/>
+                  </p:tgtEl>
+                </p:cond>
+              </p:nextCondLst>
+            </p:seq>
+          </p:childTnLst>
+        </p:cTn>
+      </p:par>
+    </p:tnLst>
+    <p:bldLst>
+      <p:bldP spid="2" grpId="0"/>
+    </p:bldLst>
+  </p:timing>
+</p:sld>
+</file>
+
+<file path=ppt/slides/slide5.xml><?xml version="1.0" encoding="utf-8"?>
+<p:sld xmlns:a="http://schemas.openxmlformats.org/drawingml/2006/main" xmlns:r="http://schemas.openxmlformats.org/officeDocument/2006/relationships" xmlns:p="http://schemas.openxmlformats.org/presentationml/2006/main">
+  <p:cSld>
+    <p:bg>
+      <p:bgPr>
+        <a:solidFill>
+          <a:schemeClr val="bg1"/>
+        </a:solidFill>
+        <a:effectLst/>
+      </p:bgPr>
+    </p:bg>
+    <p:spTree>
+      <p:nvGrpSpPr>
+        <p:cNvPr id="1" name=""/>
+        <p:cNvGrpSpPr/>
+        <p:nvPr/>
+      </p:nvGrpSpPr>
+      <p:grpSpPr>
+        <a:xfrm>
+          <a:off x="0" y="0"/>
+          <a:ext cx="0" cy="0"/>
+          <a:chOff x="0" y="0"/>
+          <a:chExt cx="0" cy="0"/>
+        </a:xfrm>
+      </p:grpSpPr>
+      <p:sp useBgFill="1">
+        <p:nvSpPr>
+          <p:cNvPr id="8" name="Rectangle 7">
+            <a:extLst>
+              <a:ext uri="{FF2B5EF4-FFF2-40B4-BE49-F238E27FC236}">
+                <a16:creationId xmlns:a16="http://schemas.microsoft.com/office/drawing/2014/main" id="{1B15ED52-F352-441B-82BF-E0EA34836D08}"/>
+              </a:ext>
+              <a:ext uri="{C183D7F6-B498-43B3-948B-1728B52AA6E4}">
+                <adec:decorative xmlns:adec="http://schemas.microsoft.com/office/drawing/2017/decorative" val="1"/>
+              </a:ext>
+            </a:extLst>
+          </p:cNvPr>
+          <p:cNvSpPr>
+            <a:spLocks noGrp="1" noRot="1" noChangeAspect="1" noMove="1" noResize="1" noEditPoints="1" noAdjustHandles="1" noChangeArrowheads="1" noChangeShapeType="1" noTextEdit="1"/>
+          </p:cNvSpPr>
+          <p:nvPr>
+            <p:extLst>
+              <p:ext uri="{386F3935-93C4-4BCD-93E2-E3B085C9AB24}">
+                <p16:designElem xmlns:p16="http://schemas.microsoft.com/office/powerpoint/2015/main" val="1"/>
+              </p:ext>
+            </p:extLst>
+          </p:nvPr>
+        </p:nvSpPr>
+        <p:spPr>
+          <a:xfrm>
+            <a:off x="0" y="0"/>
+            <a:ext cx="12192000" cy="6858000"/>
+          </a:xfrm>
+          <a:prstGeom prst="rect">
+            <a:avLst/>
+          </a:prstGeom>
+          <a:ln w="12700" cap="flat" cmpd="sng" algn="ctr">
+            <a:noFill/>
+            <a:prstDash val="solid"/>
+            <a:miter lim="800000"/>
+          </a:ln>
+          <a:effectLst/>
+          <a:extLst>
+            <a:ext uri="{91240B29-F687-4F45-9708-019B960494DF}">
+              <a14:hiddenLine xmlns:a14="http://schemas.microsoft.com/office/drawing/2010/main" w="12700" cap="flat" cmpd="sng" algn="ctr">
+                <a:solidFill>
+                  <a:schemeClr val="accent1">
+                    <a:shade val="50000"/>
+                  </a:schemeClr>
+                </a:solidFill>
+                <a:prstDash val="solid"/>
+                <a:miter lim="800000"/>
+              </a14:hiddenLine>
+            </a:ext>
+          </a:extLst>
+        </p:spPr>
+        <p:style>
+          <a:lnRef idx="2">
+            <a:schemeClr val="accent1">
+              <a:shade val="50000"/>
+            </a:schemeClr>
+          </a:lnRef>
+          <a:fillRef idx="1">
+            <a:schemeClr val="accent1"/>
+          </a:fillRef>
+          <a:effectRef idx="0">
+            <a:schemeClr val="accent1"/>
+          </a:effectRef>
+          <a:fontRef idx="minor">
+            <a:schemeClr val="lt1"/>
+          </a:fontRef>
+        </p:style>
+        <p:txBody>
+          <a:bodyPr rtlCol="0" anchor="ctr"/>
+          <a:lstStyle/>
+          <a:p>
+            <a:pPr algn="ctr"/>
+            <a:endParaRPr lang="en-US"/>
+          </a:p>
+        </p:txBody>
+      </p:sp>
+      <p:sp>
+        <p:nvSpPr>
+          <p:cNvPr id="10" name="Rectangle 9">
+            <a:extLst>
+              <a:ext uri="{FF2B5EF4-FFF2-40B4-BE49-F238E27FC236}">
+                <a16:creationId xmlns:a16="http://schemas.microsoft.com/office/drawing/2014/main" id="{3B2E3793-BFE6-45A2-9B7B-E18844431C99}"/>
+              </a:ext>
+              <a:ext uri="{C183D7F6-B498-43B3-948B-1728B52AA6E4}">
+                <adec:decorative xmlns:adec="http://schemas.microsoft.com/office/drawing/2017/decorative" val="1"/>
+              </a:ext>
+            </a:extLst>
+          </p:cNvPr>
+          <p:cNvSpPr>
+            <a:spLocks noGrp="1" noRot="1" noChangeAspect="1" noMove="1" noResize="1" noEditPoints="1" noAdjustHandles="1" noChangeArrowheads="1" noChangeShapeType="1" noTextEdit="1"/>
+          </p:cNvSpPr>
+          <p:nvPr>
+            <p:extLst>
+              <p:ext uri="{386F3935-93C4-4BCD-93E2-E3B085C9AB24}">
+                <p16:designElem xmlns:p16="http://schemas.microsoft.com/office/powerpoint/2015/main" val="1"/>
+              </p:ext>
+            </p:extLst>
+          </p:nvPr>
+        </p:nvSpPr>
+        <p:spPr>
+          <a:xfrm flipH="1">
+            <a:off x="-1" y="-1"/>
+            <a:ext cx="12191998" cy="1590742"/>
+          </a:xfrm>
+          <a:prstGeom prst="rect">
+            <a:avLst/>
+          </a:prstGeom>
+          <a:gradFill>
+            <a:gsLst>
+              <a:gs pos="0">
+                <a:srgbClr val="000000"/>
+              </a:gs>
+              <a:gs pos="100000">
+                <a:schemeClr val="accent1">
+                  <a:lumMod val="75000"/>
+                </a:schemeClr>
+              </a:gs>
+            </a:gsLst>
+            <a:lin ang="8400000" scaled="0"/>
+          </a:gradFill>
+          <a:ln>
+            <a:noFill/>
+          </a:ln>
+        </p:spPr>
+        <p:style>
+          <a:lnRef idx="2">
+            <a:schemeClr val="accent1">
+              <a:shade val="50000"/>
+            </a:schemeClr>
+          </a:lnRef>
+          <a:fillRef idx="1">
+            <a:schemeClr val="accent1"/>
+          </a:fillRef>
+          <a:effectRef idx="0">
+            <a:schemeClr val="accent1"/>
+          </a:effectRef>
+          <a:fontRef idx="minor">
+            <a:schemeClr val="lt1"/>
+          </a:fontRef>
+        </p:style>
+        <p:txBody>
+          <a:bodyPr rtlCol="0" anchor="ctr"/>
+          <a:lstStyle/>
+          <a:p>
+            <a:pPr algn="ctr"/>
+            <a:endParaRPr lang="en-US"/>
+          </a:p>
+        </p:txBody>
+      </p:sp>
+      <p:sp>
+        <p:nvSpPr>
+          <p:cNvPr id="12" name="Rectangle 11">
+            <a:extLst>
+              <a:ext uri="{FF2B5EF4-FFF2-40B4-BE49-F238E27FC236}">
+                <a16:creationId xmlns:a16="http://schemas.microsoft.com/office/drawing/2014/main" id="{BC4C4868-CB8F-4AF9-9CDB-8108F2C19B67}"/>
+              </a:ext>
+              <a:ext uri="{C183D7F6-B498-43B3-948B-1728B52AA6E4}">
+                <adec:decorative xmlns:adec="http://schemas.microsoft.com/office/drawing/2017/decorative" val="1"/>
+              </a:ext>
+            </a:extLst>
+          </p:cNvPr>
+          <p:cNvSpPr>
+            <a:spLocks noGrp="1" noRot="1" noChangeAspect="1" noMove="1" noResize="1" noEditPoints="1" noAdjustHandles="1" noChangeArrowheads="1" noChangeShapeType="1" noTextEdit="1"/>
+          </p:cNvSpPr>
+          <p:nvPr>
+            <p:extLst>
+              <p:ext uri="{386F3935-93C4-4BCD-93E2-E3B085C9AB24}">
+                <p16:designElem xmlns:p16="http://schemas.microsoft.com/office/powerpoint/2015/main" val="1"/>
+              </p:ext>
+            </p:extLst>
+          </p:nvPr>
+        </p:nvSpPr>
+        <p:spPr>
+          <a:xfrm rot="10800000" flipH="1">
+            <a:off x="-3" y="0"/>
+            <a:ext cx="8115306" cy="1590742"/>
+          </a:xfrm>
+          <a:prstGeom prst="rect">
+            <a:avLst/>
+          </a:prstGeom>
+          <a:gradFill>
+            <a:gsLst>
+              <a:gs pos="20000">
+                <a:schemeClr val="accent1">
+                  <a:alpha val="0"/>
+                </a:schemeClr>
+              </a:gs>
+              <a:gs pos="100000">
+                <a:schemeClr val="accent1">
+                  <a:lumMod val="50000"/>
+                  <a:alpha val="55000"/>
+                </a:schemeClr>
+              </a:gs>
+            </a:gsLst>
+            <a:lin ang="13800000" scaled="0"/>
+          </a:gradFill>
+          <a:ln>
+            <a:noFill/>
+          </a:ln>
+        </p:spPr>
+        <p:style>
+          <a:lnRef idx="2">
+            <a:schemeClr val="accent1">
+              <a:shade val="50000"/>
+            </a:schemeClr>
+          </a:lnRef>
+          <a:fillRef idx="1">
+            <a:schemeClr val="accent1"/>
+          </a:fillRef>
+          <a:effectRef idx="0">
+            <a:schemeClr val="accent1"/>
+          </a:effectRef>
+          <a:fontRef idx="minor">
+            <a:schemeClr val="lt1"/>
+          </a:fontRef>
+        </p:style>
+        <p:txBody>
+          <a:bodyPr rtlCol="0" anchor="ctr"/>
+          <a:lstStyle/>
+          <a:p>
+            <a:pPr algn="ctr"/>
+            <a:endParaRPr lang="en-US"/>
+          </a:p>
+        </p:txBody>
+      </p:sp>
+      <p:sp>
+        <p:nvSpPr>
+          <p:cNvPr id="14" name="Rectangle 13">
+            <a:extLst>
+              <a:ext uri="{FF2B5EF4-FFF2-40B4-BE49-F238E27FC236}">
+                <a16:creationId xmlns:a16="http://schemas.microsoft.com/office/drawing/2014/main" id="{375E0459-6403-40CD-989D-56A4407CA12E}"/>
+              </a:ext>
+              <a:ext uri="{C183D7F6-B498-43B3-948B-1728B52AA6E4}">
+                <adec:decorative xmlns:adec="http://schemas.microsoft.com/office/drawing/2017/decorative" val="1"/>
+              </a:ext>
+            </a:extLst>
+          </p:cNvPr>
+          <p:cNvSpPr>
+            <a:spLocks noGrp="1" noRot="1" noChangeAspect="1" noMove="1" noResize="1" noEditPoints="1" noAdjustHandles="1" noChangeArrowheads="1" noChangeShapeType="1" noTextEdit="1"/>
+          </p:cNvSpPr>
+          <p:nvPr>
+            <p:extLst>
+              <p:ext uri="{386F3935-93C4-4BCD-93E2-E3B085C9AB24}">
+                <p16:designElem xmlns:p16="http://schemas.microsoft.com/office/powerpoint/2015/main" val="1"/>
+              </p:ext>
+            </p:extLst>
+          </p:nvPr>
+        </p:nvSpPr>
+        <p:spPr>
+          <a:xfrm flipH="1">
+            <a:off x="8115299" y="-1"/>
+            <a:ext cx="4076698" cy="1590742"/>
+          </a:xfrm>
+          <a:prstGeom prst="rect">
+            <a:avLst/>
+          </a:prstGeom>
+          <a:gradFill>
+            <a:gsLst>
+              <a:gs pos="0">
+                <a:schemeClr val="accent1">
+                  <a:alpha val="66000"/>
+                </a:schemeClr>
+              </a:gs>
+              <a:gs pos="100000">
+                <a:srgbClr val="000000">
+                  <a:alpha val="30000"/>
+                </a:srgbClr>
+              </a:gs>
+            </a:gsLst>
+            <a:lin ang="13200000" scaled="0"/>
+          </a:gradFill>
+          <a:ln>
+            <a:noFill/>
+          </a:ln>
+        </p:spPr>
+        <p:style>
+          <a:lnRef idx="2">
+            <a:schemeClr val="accent1">
+              <a:shade val="50000"/>
+            </a:schemeClr>
+          </a:lnRef>
+          <a:fillRef idx="1">
+            <a:schemeClr val="accent1"/>
+          </a:fillRef>
+          <a:effectRef idx="0">
+            <a:schemeClr val="accent1"/>
+          </a:effectRef>
+          <a:fontRef idx="minor">
+            <a:schemeClr val="lt1"/>
+          </a:fontRef>
+        </p:style>
+        <p:txBody>
+          <a:bodyPr rtlCol="0" anchor="ctr"/>
+          <a:lstStyle/>
+          <a:p>
+            <a:pPr algn="ctr"/>
+            <a:endParaRPr lang="en-US"/>
+          </a:p>
+        </p:txBody>
+      </p:sp>
+      <p:sp>
+        <p:nvSpPr>
+          <p:cNvPr id="16" name="Rectangle 15">
+            <a:extLst>
+              <a:ext uri="{FF2B5EF4-FFF2-40B4-BE49-F238E27FC236}">
+                <a16:creationId xmlns:a16="http://schemas.microsoft.com/office/drawing/2014/main" id="{53E5B1A8-3AC9-4BD1-9BBC-78CA94F2D1BA}"/>
+              </a:ext>
+              <a:ext uri="{C183D7F6-B498-43B3-948B-1728B52AA6E4}">
+                <adec:decorative xmlns:adec="http://schemas.microsoft.com/office/drawing/2017/decorative" val="1"/>
+              </a:ext>
+            </a:extLst>
+          </p:cNvPr>
+          <p:cNvSpPr>
+            <a:spLocks noGrp="1" noRot="1" noChangeAspect="1" noMove="1" noResize="1" noEditPoints="1" noAdjustHandles="1" noChangeArrowheads="1" noChangeShapeType="1" noTextEdit="1"/>
+          </p:cNvSpPr>
+          <p:nvPr>
+            <p:extLst>
+              <p:ext uri="{386F3935-93C4-4BCD-93E2-E3B085C9AB24}">
+                <p16:designElem xmlns:p16="http://schemas.microsoft.com/office/powerpoint/2015/main" val="1"/>
+              </p:ext>
+            </p:extLst>
+          </p:nvPr>
+        </p:nvSpPr>
+        <p:spPr>
+          <a:xfrm>
+            <a:off x="459350" y="-1"/>
+            <a:ext cx="11732646" cy="1597433"/>
+          </a:xfrm>
+          <a:prstGeom prst="rect">
+            <a:avLst/>
+          </a:prstGeom>
+          <a:gradFill>
+            <a:gsLst>
+              <a:gs pos="50000">
+                <a:srgbClr val="000000">
+                  <a:alpha val="0"/>
+                </a:srgbClr>
+              </a:gs>
+              <a:gs pos="99000">
+                <a:schemeClr val="accent1">
+                  <a:lumMod val="50000"/>
+                  <a:alpha val="52000"/>
+                </a:schemeClr>
+              </a:gs>
+            </a:gsLst>
+            <a:lin ang="16800000" scaled="0"/>
+          </a:gradFill>
+          <a:ln>
+            <a:noFill/>
+          </a:ln>
+        </p:spPr>
+        <p:style>
+          <a:lnRef idx="2">
+            <a:schemeClr val="accent1">
+              <a:shade val="50000"/>
+            </a:schemeClr>
+          </a:lnRef>
+          <a:fillRef idx="1">
+            <a:schemeClr val="accent1"/>
+          </a:fillRef>
+          <a:effectRef idx="0">
+            <a:schemeClr val="accent1"/>
+          </a:effectRef>
+          <a:fontRef idx="minor">
+            <a:schemeClr val="lt1"/>
+          </a:fontRef>
+        </p:style>
+        <p:txBody>
+          <a:bodyPr rtlCol="0" anchor="ctr"/>
+          <a:lstStyle/>
+          <a:p>
+            <a:pPr algn="ctr"/>
+            <a:endParaRPr lang="en-US"/>
+          </a:p>
+        </p:txBody>
+      </p:sp>
+      <p:sp>
+        <p:nvSpPr>
+          <p:cNvPr id="2" name="Titel 1">
+            <a:extLst>
+              <a:ext uri="{FF2B5EF4-FFF2-40B4-BE49-F238E27FC236}">
+                <a16:creationId xmlns:a16="http://schemas.microsoft.com/office/drawing/2014/main" id="{BCDBF8F0-C55C-9874-8FC8-19BC6BE48F4C}"/>
+              </a:ext>
+            </a:extLst>
+          </p:cNvPr>
+          <p:cNvSpPr>
+            <a:spLocks noGrp="1"/>
+          </p:cNvSpPr>
+          <p:nvPr>
+            <p:ph type="title"/>
+          </p:nvPr>
+        </p:nvSpPr>
+        <p:spPr>
+          <a:xfrm>
+            <a:off x="1371599" y="294538"/>
+            <a:ext cx="9895951" cy="1033669"/>
+          </a:xfrm>
+        </p:spPr>
+        <p:txBody>
+          <a:bodyPr>
+            <a:normAutofit/>
+          </a:bodyPr>
+          <a:lstStyle/>
+          <a:p>
+            <a:r>
+              <a:rPr lang="de-CH" sz="4000">
+                <a:solidFill>
+                  <a:srgbClr val="FFFFFF"/>
+                </a:solidFill>
+              </a:rPr>
+              <a:t>Herausforderungen</a:t>
+            </a:r>
+          </a:p>
+        </p:txBody>
+      </p:sp>
+      <p:sp>
+        <p:nvSpPr>
+          <p:cNvPr id="3" name="Inhaltsplatzhalter 2">
+            <a:extLst>
+              <a:ext uri="{FF2B5EF4-FFF2-40B4-BE49-F238E27FC236}">
+                <a16:creationId xmlns:a16="http://schemas.microsoft.com/office/drawing/2014/main" id="{736F144E-92F4-2D85-9E33-620AB8C8391C}"/>
+              </a:ext>
+            </a:extLst>
+          </p:cNvPr>
+          <p:cNvSpPr>
+            <a:spLocks noGrp="1"/>
+          </p:cNvSpPr>
+          <p:nvPr>
+            <p:ph idx="1"/>
+          </p:nvPr>
+        </p:nvSpPr>
+        <p:spPr>
+          <a:xfrm>
+            <a:off x="1371599" y="2318197"/>
+            <a:ext cx="9724031" cy="3683358"/>
+          </a:xfrm>
+        </p:spPr>
+        <p:txBody>
+          <a:bodyPr anchor="ctr">
+            <a:normAutofit/>
+          </a:bodyPr>
+          <a:lstStyle/>
+          <a:p>
+            <a:r>
+              <a:rPr lang="de-CH" sz="2000"/>
+              <a:t>Pages (Mit Ai debugt)</a:t>
+            </a:r>
+          </a:p>
+        </p:txBody>
+      </p:sp>
+    </p:spTree>
+    <p:extLst>
+      <p:ext uri="{BB962C8B-B14F-4D97-AF65-F5344CB8AC3E}">
+        <p14:creationId xmlns:p14="http://schemas.microsoft.com/office/powerpoint/2010/main" val="510903890"/>
+      </p:ext>
+    </p:extLst>
+  </p:cSld>
+  <p:clrMapOvr>
+    <a:masterClrMapping/>
+  </p:clrMapOvr>
+  <p:timing>
+    <p:tnLst>
+      <p:par>
+        <p:cTn id="1" dur="indefinite" restart="never" nodeType="tmRoot">
+          <p:childTnLst>
+            <p:seq concurrent="1" nextAc="seek">
+              <p:cTn id="2" dur="indefinite" nodeType="mainSeq">
+                <p:childTnLst>
+                  <p:par>
+                    <p:cTn id="3" fill="hold">
+                      <p:stCondLst>
+                        <p:cond delay="indefinite"/>
+                        <p:cond evt="onBegin" delay="0">
+                          <p:tn val="2"/>
+                        </p:cond>
+                      </p:stCondLst>
+                      <p:childTnLst>
+                        <p:par>
+                          <p:cTn id="4" fill="hold">
+                            <p:stCondLst>
+                              <p:cond delay="0"/>
+                            </p:stCondLst>
+                            <p:childTnLst>
+                              <p:par>
+                                <p:cTn id="5" presetID="10" presetClass="entr" presetSubtype="0" fill="hold" grpId="0" nodeType="withEffect">
+                                  <p:stCondLst>
+                                    <p:cond delay="500"/>
+                                  </p:stCondLst>
+                                  <p:iterate type="lt">
+                                    <p:tmPct val="10000"/>
+                                  </p:iterate>
+                                  <p:childTnLst>
+                                    <p:set>
+                                      <p:cBhvr>
+                                        <p:cTn id="6" dur="1" fill="hold">
+                                          <p:stCondLst>
+                                            <p:cond delay="0"/>
+                                          </p:stCondLst>
+                                        </p:cTn>
+                                        <p:tgtEl>
+                                          <p:spTgt spid="2"/>
+                                        </p:tgtEl>
+                                        <p:attrNameLst>
+                                          <p:attrName>style.visibility</p:attrName>
+                                        </p:attrNameLst>
+                                      </p:cBhvr>
+                                      <p:to>
+                                        <p:strVal val="visible"/>
+                                      </p:to>
+                                    </p:set>
+                                    <p:animEffect transition="in" filter="fade">
+                                      <p:cBhvr>
+                                        <p:cTn id="7" dur="400"/>
+                                        <p:tgtEl>
+                                          <p:spTgt spid="2"/>
+                                        </p:tgtEl>
+                                      </p:cBhvr>
+                                    </p:animEffect>
+                                  </p:childTnLst>
+                                </p:cTn>
+                              </p:par>
+                            </p:childTnLst>
+                          </p:cTn>
+                        </p:par>
+                      </p:childTnLst>
+                    </p:cTn>
+                  </p:par>
+                </p:childTnLst>
+              </p:cTn>
+              <p:prevCondLst>
+                <p:cond evt="onPrev" delay="0">
+                  <p:tgtEl>
+                    <p:sldTgt/>
+                  </p:tgtEl>
+                </p:cond>
+              </p:prevCondLst>
+              <p:nextCondLst>
+                <p:cond evt="onNext" delay="0">
+                  <p:tgtEl>
+                    <p:sldTgt/>
+                  </p:tgtEl>
+                </p:cond>
+              </p:nextCondLst>
+            </p:seq>
+          </p:childTnLst>
+        </p:cTn>
+      </p:par>
+    </p:tnLst>
+    <p:bldLst>
+      <p:bldP spid="2" grpId="0"/>
+    </p:bldLst>
+  </p:timing>
 </p:sld>
 </file>
 

--- a/LB2.pptx
+++ b/LB2.pptx
@@ -108,6 +108,11 @@
       </a:defRPr>
     </a:lvl9pPr>
   </p:defaultTextStyle>
+  <p:extLst>
+    <p:ext uri="{EFAFB233-063F-42B5-8137-9DF3F51BA10A}">
+      <p15:sldGuideLst xmlns:p15="http://schemas.microsoft.com/office/powerpoint/2012/main"/>
+    </p:ext>
+  </p:extLst>
 </p:presentation>
 </file>
 
@@ -950,43 +955,6 @@
         </a:p>
       </dgm:t>
     </dgm:pt>
-    <dgm:pt modelId="{272D95CA-1B13-4AEB-861E-9FED919112C8}">
-      <dgm:prSet/>
-      <dgm:spPr/>
-      <dgm:t>
-        <a:bodyPr/>
-        <a:lstStyle/>
-        <a:p>
-          <a:r>
-            <a:rPr lang="de-CH"/>
-            <a:t>Herangehensweise</a:t>
-          </a:r>
-          <a:endParaRPr lang="en-US"/>
-        </a:p>
-      </dgm:t>
-    </dgm:pt>
-    <dgm:pt modelId="{FE4DE427-0357-49B4-A12B-19F609E36CB4}" type="parTrans" cxnId="{75CAA030-25BA-40F6-8557-8B05BAA648FD}">
-      <dgm:prSet/>
-      <dgm:spPr/>
-      <dgm:t>
-        <a:bodyPr/>
-        <a:lstStyle/>
-        <a:p>
-          <a:endParaRPr lang="en-US"/>
-        </a:p>
-      </dgm:t>
-    </dgm:pt>
-    <dgm:pt modelId="{63F71EEC-7B2F-4092-8C94-A7B74C81B0B6}" type="sibTrans" cxnId="{75CAA030-25BA-40F6-8557-8B05BAA648FD}">
-      <dgm:prSet/>
-      <dgm:spPr/>
-      <dgm:t>
-        <a:bodyPr/>
-        <a:lstStyle/>
-        <a:p>
-          <a:endParaRPr lang="en-US"/>
-        </a:p>
-      </dgm:t>
-    </dgm:pt>
     <dgm:pt modelId="{788DB37D-C91D-49EB-8952-E485C570E91A}">
       <dgm:prSet/>
       <dgm:spPr/>
@@ -1045,11 +1013,11 @@
       <dgm:spPr/>
     </dgm:pt>
     <dgm:pt modelId="{389B28DA-3106-407B-A127-742B15F41E97}" type="pres">
-      <dgm:prSet presAssocID="{11F79C86-314B-4E52-99E7-657B56D8F760}" presName="background" presStyleLbl="node0" presStyleIdx="0" presStyleCnt="4"/>
+      <dgm:prSet presAssocID="{11F79C86-314B-4E52-99E7-657B56D8F760}" presName="background" presStyleLbl="node0" presStyleIdx="0" presStyleCnt="3"/>
       <dgm:spPr/>
     </dgm:pt>
     <dgm:pt modelId="{11289389-6DEB-4599-B81F-3D1FD3FA3DF1}" type="pres">
-      <dgm:prSet presAssocID="{11F79C86-314B-4E52-99E7-657B56D8F760}" presName="text" presStyleLbl="fgAcc0" presStyleIdx="0" presStyleCnt="4">
+      <dgm:prSet presAssocID="{11F79C86-314B-4E52-99E7-657B56D8F760}" presName="text" presStyleLbl="fgAcc0" presStyleIdx="0" presStyleCnt="3">
         <dgm:presLayoutVars>
           <dgm:chPref val="3"/>
         </dgm:presLayoutVars>
@@ -1069,11 +1037,11 @@
       <dgm:spPr/>
     </dgm:pt>
     <dgm:pt modelId="{B84F92A2-A5E1-408F-A096-A9BF8C064E83}" type="pres">
-      <dgm:prSet presAssocID="{617C08E3-D070-444F-930F-EBAC0DAC7581}" presName="background" presStyleLbl="node0" presStyleIdx="1" presStyleCnt="4"/>
+      <dgm:prSet presAssocID="{617C08E3-D070-444F-930F-EBAC0DAC7581}" presName="background" presStyleLbl="node0" presStyleIdx="1" presStyleCnt="3"/>
       <dgm:spPr/>
     </dgm:pt>
     <dgm:pt modelId="{8AD53D65-22E6-47A4-9B65-9840F1DB434B}" type="pres">
-      <dgm:prSet presAssocID="{617C08E3-D070-444F-930F-EBAC0DAC7581}" presName="text" presStyleLbl="fgAcc0" presStyleIdx="1" presStyleCnt="4">
+      <dgm:prSet presAssocID="{617C08E3-D070-444F-930F-EBAC0DAC7581}" presName="text" presStyleLbl="fgAcc0" presStyleIdx="1" presStyleCnt="3">
         <dgm:presLayoutVars>
           <dgm:chPref val="3"/>
         </dgm:presLayoutVars>
@@ -1082,30 +1050,6 @@
     </dgm:pt>
     <dgm:pt modelId="{CD8BA619-1DC7-4583-8A6C-388C2AB275E7}" type="pres">
       <dgm:prSet presAssocID="{617C08E3-D070-444F-930F-EBAC0DAC7581}" presName="hierChild2" presStyleCnt="0"/>
-      <dgm:spPr/>
-    </dgm:pt>
-    <dgm:pt modelId="{8DB4C624-0A0E-462A-A98D-BA2122220BDD}" type="pres">
-      <dgm:prSet presAssocID="{272D95CA-1B13-4AEB-861E-9FED919112C8}" presName="hierRoot1" presStyleCnt="0"/>
-      <dgm:spPr/>
-    </dgm:pt>
-    <dgm:pt modelId="{9CCF5FA3-C6E2-44C5-895D-764785296366}" type="pres">
-      <dgm:prSet presAssocID="{272D95CA-1B13-4AEB-861E-9FED919112C8}" presName="composite" presStyleCnt="0"/>
-      <dgm:spPr/>
-    </dgm:pt>
-    <dgm:pt modelId="{6CE5B004-EDF3-40EB-AFD4-E97D77B518CD}" type="pres">
-      <dgm:prSet presAssocID="{272D95CA-1B13-4AEB-861E-9FED919112C8}" presName="background" presStyleLbl="node0" presStyleIdx="2" presStyleCnt="4"/>
-      <dgm:spPr/>
-    </dgm:pt>
-    <dgm:pt modelId="{FA112FF1-0334-4621-8E71-F56291530D1A}" type="pres">
-      <dgm:prSet presAssocID="{272D95CA-1B13-4AEB-861E-9FED919112C8}" presName="text" presStyleLbl="fgAcc0" presStyleIdx="2" presStyleCnt="4">
-        <dgm:presLayoutVars>
-          <dgm:chPref val="3"/>
-        </dgm:presLayoutVars>
-      </dgm:prSet>
-      <dgm:spPr/>
-    </dgm:pt>
-    <dgm:pt modelId="{0B73FB23-E67A-4E56-A6F4-E616B872D0C1}" type="pres">
-      <dgm:prSet presAssocID="{272D95CA-1B13-4AEB-861E-9FED919112C8}" presName="hierChild2" presStyleCnt="0"/>
       <dgm:spPr/>
     </dgm:pt>
     <dgm:pt modelId="{C38D1E99-8956-4CED-B15D-0F75145E37C4}" type="pres">
@@ -1117,11 +1061,11 @@
       <dgm:spPr/>
     </dgm:pt>
     <dgm:pt modelId="{AF12755E-B9C2-4948-983B-1C2322DD08F1}" type="pres">
-      <dgm:prSet presAssocID="{788DB37D-C91D-49EB-8952-E485C570E91A}" presName="background" presStyleLbl="node0" presStyleIdx="3" presStyleCnt="4"/>
+      <dgm:prSet presAssocID="{788DB37D-C91D-49EB-8952-E485C570E91A}" presName="background" presStyleLbl="node0" presStyleIdx="2" presStyleCnt="3"/>
       <dgm:spPr/>
     </dgm:pt>
     <dgm:pt modelId="{1AA9CB32-B361-4789-B5D3-3AE310257CA9}" type="pres">
-      <dgm:prSet presAssocID="{788DB37D-C91D-49EB-8952-E485C570E91A}" presName="text" presStyleLbl="fgAcc0" presStyleIdx="3" presStyleCnt="4">
+      <dgm:prSet presAssocID="{788DB37D-C91D-49EB-8952-E485C570E91A}" presName="text" presStyleLbl="fgAcc0" presStyleIdx="2" presStyleCnt="3">
         <dgm:presLayoutVars>
           <dgm:chPref val="3"/>
         </dgm:presLayoutVars>
@@ -1138,11 +1082,9 @@
     <dgm:cxn modelId="{6871CE1D-2B7B-4EF1-8F2E-EC6888EF7B90}" type="presOf" srcId="{788DB37D-C91D-49EB-8952-E485C570E91A}" destId="{1AA9CB32-B361-4789-B5D3-3AE310257CA9}" srcOrd="0" destOrd="0" presId="urn:microsoft.com/office/officeart/2005/8/layout/hierarchy1"/>
     <dgm:cxn modelId="{C7741A28-27A7-49DB-ABD6-DABAE9B1C829}" type="presOf" srcId="{11F79C86-314B-4E52-99E7-657B56D8F760}" destId="{11289389-6DEB-4599-B81F-3D1FD3FA3DF1}" srcOrd="0" destOrd="0" presId="urn:microsoft.com/office/officeart/2005/8/layout/hierarchy1"/>
     <dgm:cxn modelId="{A3F5392A-67DC-48E2-960A-8FDE9A3CF59A}" type="presOf" srcId="{617C08E3-D070-444F-930F-EBAC0DAC7581}" destId="{8AD53D65-22E6-47A4-9B65-9840F1DB434B}" srcOrd="0" destOrd="0" presId="urn:microsoft.com/office/officeart/2005/8/layout/hierarchy1"/>
-    <dgm:cxn modelId="{75CAA030-25BA-40F6-8557-8B05BAA648FD}" srcId="{1528C369-44D6-4BE6-9A3A-4A8608DBA0E0}" destId="{272D95CA-1B13-4AEB-861E-9FED919112C8}" srcOrd="2" destOrd="0" parTransId="{FE4DE427-0357-49B4-A12B-19F609E36CB4}" sibTransId="{63F71EEC-7B2F-4092-8C94-A7B74C81B0B6}"/>
     <dgm:cxn modelId="{7220506E-EBD8-4B44-BDF5-C85F92A2195E}" srcId="{1528C369-44D6-4BE6-9A3A-4A8608DBA0E0}" destId="{617C08E3-D070-444F-930F-EBAC0DAC7581}" srcOrd="1" destOrd="0" parTransId="{5A4881B4-947A-4BD2-B933-4C7DB176A3DF}" sibTransId="{0703D6EB-75BB-4EEC-B6F8-E6CDF6CFA009}"/>
     <dgm:cxn modelId="{76C76193-BAA6-413A-9864-86337D107125}" type="presOf" srcId="{1528C369-44D6-4BE6-9A3A-4A8608DBA0E0}" destId="{626BEB7E-E907-457C-AA7B-ACE4D2643C5A}" srcOrd="0" destOrd="0" presId="urn:microsoft.com/office/officeart/2005/8/layout/hierarchy1"/>
-    <dgm:cxn modelId="{774200BF-8779-4742-B842-FA078D427102}" type="presOf" srcId="{272D95CA-1B13-4AEB-861E-9FED919112C8}" destId="{FA112FF1-0334-4621-8E71-F56291530D1A}" srcOrd="0" destOrd="0" presId="urn:microsoft.com/office/officeart/2005/8/layout/hierarchy1"/>
-    <dgm:cxn modelId="{EF3C8BD0-B723-4FB8-8303-FBAAAE52B910}" srcId="{1528C369-44D6-4BE6-9A3A-4A8608DBA0E0}" destId="{788DB37D-C91D-49EB-8952-E485C570E91A}" srcOrd="3" destOrd="0" parTransId="{5DAE3A10-3677-4535-81D7-87D1EAE0EB74}" sibTransId="{1951943E-0038-4E10-BD7C-1EDCC04B16A0}"/>
+    <dgm:cxn modelId="{EF3C8BD0-B723-4FB8-8303-FBAAAE52B910}" srcId="{1528C369-44D6-4BE6-9A3A-4A8608DBA0E0}" destId="{788DB37D-C91D-49EB-8952-E485C570E91A}" srcOrd="2" destOrd="0" parTransId="{5DAE3A10-3677-4535-81D7-87D1EAE0EB74}" sibTransId="{1951943E-0038-4E10-BD7C-1EDCC04B16A0}"/>
     <dgm:cxn modelId="{94030068-16A2-4729-8181-2E790F03F5BB}" type="presParOf" srcId="{626BEB7E-E907-457C-AA7B-ACE4D2643C5A}" destId="{9DD7DAD9-2CA7-4276-A8DF-6CC128F94E15}" srcOrd="0" destOrd="0" presId="urn:microsoft.com/office/officeart/2005/8/layout/hierarchy1"/>
     <dgm:cxn modelId="{CB9DB440-0DCF-4250-9F3F-7D3672B17898}" type="presParOf" srcId="{9DD7DAD9-2CA7-4276-A8DF-6CC128F94E15}" destId="{9630F9AA-0008-4804-8F29-CB4C2E81CBC1}" srcOrd="0" destOrd="0" presId="urn:microsoft.com/office/officeart/2005/8/layout/hierarchy1"/>
     <dgm:cxn modelId="{711EACD6-7224-4ABF-AD13-08E1959E419F}" type="presParOf" srcId="{9630F9AA-0008-4804-8F29-CB4C2E81CBC1}" destId="{389B28DA-3106-407B-A127-742B15F41E97}" srcOrd="0" destOrd="0" presId="urn:microsoft.com/office/officeart/2005/8/layout/hierarchy1"/>
@@ -1153,12 +1095,7 @@
     <dgm:cxn modelId="{05876A65-2645-416E-9FB6-418F4095F3C8}" type="presParOf" srcId="{289E92C9-96F9-437C-BB46-839E1395CAB3}" destId="{B84F92A2-A5E1-408F-A096-A9BF8C064E83}" srcOrd="0" destOrd="0" presId="urn:microsoft.com/office/officeart/2005/8/layout/hierarchy1"/>
     <dgm:cxn modelId="{1873CC21-534D-4B06-B56E-BF771AB323BC}" type="presParOf" srcId="{289E92C9-96F9-437C-BB46-839E1395CAB3}" destId="{8AD53D65-22E6-47A4-9B65-9840F1DB434B}" srcOrd="1" destOrd="0" presId="urn:microsoft.com/office/officeart/2005/8/layout/hierarchy1"/>
     <dgm:cxn modelId="{9D8FE8BB-5D54-4198-9BA5-EC139F60520B}" type="presParOf" srcId="{46D9F92D-E195-43B1-AC69-10233AFECDAD}" destId="{CD8BA619-1DC7-4583-8A6C-388C2AB275E7}" srcOrd="1" destOrd="0" presId="urn:microsoft.com/office/officeart/2005/8/layout/hierarchy1"/>
-    <dgm:cxn modelId="{EC6F2CCB-C788-4A1C-960F-C54BA0457DAF}" type="presParOf" srcId="{626BEB7E-E907-457C-AA7B-ACE4D2643C5A}" destId="{8DB4C624-0A0E-462A-A98D-BA2122220BDD}" srcOrd="2" destOrd="0" presId="urn:microsoft.com/office/officeart/2005/8/layout/hierarchy1"/>
-    <dgm:cxn modelId="{8D1648C1-B071-4E24-BF9F-A4F967300AF4}" type="presParOf" srcId="{8DB4C624-0A0E-462A-A98D-BA2122220BDD}" destId="{9CCF5FA3-C6E2-44C5-895D-764785296366}" srcOrd="0" destOrd="0" presId="urn:microsoft.com/office/officeart/2005/8/layout/hierarchy1"/>
-    <dgm:cxn modelId="{84413F4A-98FC-4099-ADEF-F834DE4E4C1D}" type="presParOf" srcId="{9CCF5FA3-C6E2-44C5-895D-764785296366}" destId="{6CE5B004-EDF3-40EB-AFD4-E97D77B518CD}" srcOrd="0" destOrd="0" presId="urn:microsoft.com/office/officeart/2005/8/layout/hierarchy1"/>
-    <dgm:cxn modelId="{26D8E76C-6DF6-4060-82B8-D1EB895F922E}" type="presParOf" srcId="{9CCF5FA3-C6E2-44C5-895D-764785296366}" destId="{FA112FF1-0334-4621-8E71-F56291530D1A}" srcOrd="1" destOrd="0" presId="urn:microsoft.com/office/officeart/2005/8/layout/hierarchy1"/>
-    <dgm:cxn modelId="{8C5C0AAE-981D-4A0F-AB02-1B3E9297CB80}" type="presParOf" srcId="{8DB4C624-0A0E-462A-A98D-BA2122220BDD}" destId="{0B73FB23-E67A-4E56-A6F4-E616B872D0C1}" srcOrd="1" destOrd="0" presId="urn:microsoft.com/office/officeart/2005/8/layout/hierarchy1"/>
-    <dgm:cxn modelId="{4634DE8D-0669-4E8A-9A66-D2536DB99DA3}" type="presParOf" srcId="{626BEB7E-E907-457C-AA7B-ACE4D2643C5A}" destId="{C38D1E99-8956-4CED-B15D-0F75145E37C4}" srcOrd="3" destOrd="0" presId="urn:microsoft.com/office/officeart/2005/8/layout/hierarchy1"/>
+    <dgm:cxn modelId="{4634DE8D-0669-4E8A-9A66-D2536DB99DA3}" type="presParOf" srcId="{626BEB7E-E907-457C-AA7B-ACE4D2643C5A}" destId="{C38D1E99-8956-4CED-B15D-0F75145E37C4}" srcOrd="2" destOrd="0" presId="urn:microsoft.com/office/officeart/2005/8/layout/hierarchy1"/>
     <dgm:cxn modelId="{82DCBC83-823B-476F-B7C3-8FCE624D1B8E}" type="presParOf" srcId="{C38D1E99-8956-4CED-B15D-0F75145E37C4}" destId="{EADA2BAF-7CA7-4E8C-8F15-BB3318EB46C3}" srcOrd="0" destOrd="0" presId="urn:microsoft.com/office/officeart/2005/8/layout/hierarchy1"/>
     <dgm:cxn modelId="{72C5A3D6-1371-4AD7-BDE6-85D2C8B9893D}" type="presParOf" srcId="{EADA2BAF-7CA7-4E8C-8F15-BB3318EB46C3}" destId="{AF12755E-B9C2-4948-983B-1C2322DD08F1}" srcOrd="0" destOrd="0" presId="urn:microsoft.com/office/officeart/2005/8/layout/hierarchy1"/>
     <dgm:cxn modelId="{128705AA-0E92-483F-9BF6-58F114DB09C7}" type="presParOf" srcId="{EADA2BAF-7CA7-4E8C-8F15-BB3318EB46C3}" destId="{1AA9CB32-B361-4789-B5D3-3AE310257CA9}" srcOrd="1" destOrd="0" presId="urn:microsoft.com/office/officeart/2005/8/layout/hierarchy1"/>
@@ -1189,8 +1126,8 @@
       </dsp:nvSpPr>
       <dsp:spPr>
         <a:xfrm>
-          <a:off x="3201" y="998291"/>
-          <a:ext cx="2285879" cy="1451533"/>
+          <a:off x="0" y="706671"/>
+          <a:ext cx="3073451" cy="1951641"/>
         </a:xfrm>
         <a:prstGeom prst="roundRect">
           <a:avLst>
@@ -1241,8 +1178,8 @@
       </dsp:nvSpPr>
       <dsp:spPr>
         <a:xfrm>
-          <a:off x="257188" y="1239579"/>
-          <a:ext cx="2285879" cy="1451533"/>
+          <a:off x="341494" y="1031091"/>
+          <a:ext cx="3073451" cy="1951641"/>
         </a:xfrm>
         <a:prstGeom prst="roundRect">
           <a:avLst>
@@ -1285,12 +1222,12 @@
         <a:fontRef idx="minor"/>
       </dsp:style>
       <dsp:txBody>
-        <a:bodyPr spcFirstLastPara="0" vert="horz" wrap="square" lIns="72390" tIns="72390" rIns="72390" bIns="72390" numCol="1" spcCol="1270" anchor="ctr" anchorCtr="0">
+        <a:bodyPr spcFirstLastPara="0" vert="horz" wrap="square" lIns="95250" tIns="95250" rIns="95250" bIns="95250" numCol="1" spcCol="1270" anchor="ctr" anchorCtr="0">
           <a:noAutofit/>
         </a:bodyPr>
         <a:lstStyle/>
         <a:p>
-          <a:pPr marL="0" lvl="0" indent="0" algn="ctr" defTabSz="844550">
+          <a:pPr marL="0" lvl="0" indent="0" algn="ctr" defTabSz="1111250">
             <a:lnSpc>
               <a:spcPct val="90000"/>
             </a:lnSpc>
@@ -1303,15 +1240,15 @@
             <a:buNone/>
           </a:pPr>
           <a:r>
-            <a:rPr lang="de-CH" sz="1900" kern="1200"/>
+            <a:rPr lang="de-CH" sz="2500" kern="1200"/>
             <a:t>Das Projekt</a:t>
           </a:r>
-          <a:endParaRPr lang="en-US" sz="1900" kern="1200"/>
+          <a:endParaRPr lang="en-US" sz="2500" kern="1200"/>
         </a:p>
       </dsp:txBody>
       <dsp:txXfrm>
-        <a:off x="299702" y="1282093"/>
-        <a:ext cx="2200851" cy="1366505"/>
+        <a:off x="398656" y="1088253"/>
+        <a:ext cx="2959127" cy="1837317"/>
       </dsp:txXfrm>
     </dsp:sp>
     <dsp:sp modelId="{B84F92A2-A5E1-408F-A096-A9BF8C064E83}">
@@ -1321,8 +1258,8 @@
       </dsp:nvSpPr>
       <dsp:spPr>
         <a:xfrm>
-          <a:off x="2797054" y="998291"/>
-          <a:ext cx="2285879" cy="1451533"/>
+          <a:off x="3756441" y="706671"/>
+          <a:ext cx="3073451" cy="1951641"/>
         </a:xfrm>
         <a:prstGeom prst="roundRect">
           <a:avLst>
@@ -1373,8 +1310,8 @@
       </dsp:nvSpPr>
       <dsp:spPr>
         <a:xfrm>
-          <a:off x="3051041" y="1239579"/>
-          <a:ext cx="2285879" cy="1451533"/>
+          <a:off x="4097935" y="1031091"/>
+          <a:ext cx="3073451" cy="1951641"/>
         </a:xfrm>
         <a:prstGeom prst="roundRect">
           <a:avLst>
@@ -1417,12 +1354,12 @@
         <a:fontRef idx="minor"/>
       </dsp:style>
       <dsp:txBody>
-        <a:bodyPr spcFirstLastPara="0" vert="horz" wrap="square" lIns="72390" tIns="72390" rIns="72390" bIns="72390" numCol="1" spcCol="1270" anchor="ctr" anchorCtr="0">
+        <a:bodyPr spcFirstLastPara="0" vert="horz" wrap="square" lIns="95250" tIns="95250" rIns="95250" bIns="95250" numCol="1" spcCol="1270" anchor="ctr" anchorCtr="0">
           <a:noAutofit/>
         </a:bodyPr>
         <a:lstStyle/>
         <a:p>
-          <a:pPr marL="0" lvl="0" indent="0" algn="ctr" defTabSz="844550">
+          <a:pPr marL="0" lvl="0" indent="0" algn="ctr" defTabSz="1111250">
             <a:lnSpc>
               <a:spcPct val="90000"/>
             </a:lnSpc>
@@ -1435,147 +1372,15 @@
             <a:buNone/>
           </a:pPr>
           <a:r>
-            <a:rPr lang="de-CH" sz="1900" kern="1200"/>
+            <a:rPr lang="de-CH" sz="2500" kern="1200"/>
             <a:t>Produkt</a:t>
           </a:r>
-          <a:endParaRPr lang="en-US" sz="1900" kern="1200"/>
+          <a:endParaRPr lang="en-US" sz="2500" kern="1200"/>
         </a:p>
       </dsp:txBody>
       <dsp:txXfrm>
-        <a:off x="3093555" y="1282093"/>
-        <a:ext cx="2200851" cy="1366505"/>
-      </dsp:txXfrm>
-    </dsp:sp>
-    <dsp:sp modelId="{6CE5B004-EDF3-40EB-AFD4-E97D77B518CD}">
-      <dsp:nvSpPr>
-        <dsp:cNvPr id="0" name=""/>
-        <dsp:cNvSpPr/>
-      </dsp:nvSpPr>
-      <dsp:spPr>
-        <a:xfrm>
-          <a:off x="5590907" y="998291"/>
-          <a:ext cx="2285879" cy="1451533"/>
-        </a:xfrm>
-        <a:prstGeom prst="roundRect">
-          <a:avLst>
-            <a:gd name="adj" fmla="val 10000"/>
-          </a:avLst>
-        </a:prstGeom>
-        <a:solidFill>
-          <a:schemeClr val="dk2">
-            <a:hueOff val="0"/>
-            <a:satOff val="0"/>
-            <a:lumOff val="0"/>
-            <a:alphaOff val="0"/>
-          </a:schemeClr>
-        </a:solidFill>
-        <a:ln w="19050" cap="flat" cmpd="sng" algn="ctr">
-          <a:solidFill>
-            <a:schemeClr val="lt2">
-              <a:hueOff val="0"/>
-              <a:satOff val="0"/>
-              <a:lumOff val="0"/>
-              <a:alphaOff val="0"/>
-            </a:schemeClr>
-          </a:solidFill>
-          <a:prstDash val="solid"/>
-          <a:miter lim="800000"/>
-        </a:ln>
-        <a:effectLst/>
-      </dsp:spPr>
-      <dsp:style>
-        <a:lnRef idx="2">
-          <a:scrgbClr r="0" g="0" b="0"/>
-        </a:lnRef>
-        <a:fillRef idx="1">
-          <a:scrgbClr r="0" g="0" b="0"/>
-        </a:fillRef>
-        <a:effectRef idx="0">
-          <a:scrgbClr r="0" g="0" b="0"/>
-        </a:effectRef>
-        <a:fontRef idx="minor">
-          <a:schemeClr val="lt1"/>
-        </a:fontRef>
-      </dsp:style>
-    </dsp:sp>
-    <dsp:sp modelId="{FA112FF1-0334-4621-8E71-F56291530D1A}">
-      <dsp:nvSpPr>
-        <dsp:cNvPr id="0" name=""/>
-        <dsp:cNvSpPr/>
-      </dsp:nvSpPr>
-      <dsp:spPr>
-        <a:xfrm>
-          <a:off x="5844894" y="1239579"/>
-          <a:ext cx="2285879" cy="1451533"/>
-        </a:xfrm>
-        <a:prstGeom prst="roundRect">
-          <a:avLst>
-            <a:gd name="adj" fmla="val 10000"/>
-          </a:avLst>
-        </a:prstGeom>
-        <a:solidFill>
-          <a:schemeClr val="lt2">
-            <a:alpha val="90000"/>
-            <a:hueOff val="0"/>
-            <a:satOff val="0"/>
-            <a:lumOff val="0"/>
-            <a:alphaOff val="0"/>
-          </a:schemeClr>
-        </a:solidFill>
-        <a:ln w="19050" cap="flat" cmpd="sng" algn="ctr">
-          <a:solidFill>
-            <a:schemeClr val="dk2">
-              <a:hueOff val="0"/>
-              <a:satOff val="0"/>
-              <a:lumOff val="0"/>
-              <a:alphaOff val="0"/>
-            </a:schemeClr>
-          </a:solidFill>
-          <a:prstDash val="solid"/>
-          <a:miter lim="800000"/>
-        </a:ln>
-        <a:effectLst/>
-      </dsp:spPr>
-      <dsp:style>
-        <a:lnRef idx="2">
-          <a:scrgbClr r="0" g="0" b="0"/>
-        </a:lnRef>
-        <a:fillRef idx="1">
-          <a:scrgbClr r="0" g="0" b="0"/>
-        </a:fillRef>
-        <a:effectRef idx="0">
-          <a:scrgbClr r="0" g="0" b="0"/>
-        </a:effectRef>
-        <a:fontRef idx="minor"/>
-      </dsp:style>
-      <dsp:txBody>
-        <a:bodyPr spcFirstLastPara="0" vert="horz" wrap="square" lIns="72390" tIns="72390" rIns="72390" bIns="72390" numCol="1" spcCol="1270" anchor="ctr" anchorCtr="0">
-          <a:noAutofit/>
-        </a:bodyPr>
-        <a:lstStyle/>
-        <a:p>
-          <a:pPr marL="0" lvl="0" indent="0" algn="ctr" defTabSz="844550">
-            <a:lnSpc>
-              <a:spcPct val="90000"/>
-            </a:lnSpc>
-            <a:spcBef>
-              <a:spcPct val="0"/>
-            </a:spcBef>
-            <a:spcAft>
-              <a:spcPct val="35000"/>
-            </a:spcAft>
-            <a:buNone/>
-          </a:pPr>
-          <a:r>
-            <a:rPr lang="de-CH" sz="1900" kern="1200"/>
-            <a:t>Herangehensweise</a:t>
-          </a:r>
-          <a:endParaRPr lang="en-US" sz="1900" kern="1200"/>
-        </a:p>
-      </dsp:txBody>
-      <dsp:txXfrm>
-        <a:off x="5887408" y="1282093"/>
-        <a:ext cx="2200851" cy="1366505"/>
+        <a:off x="4155097" y="1088253"/>
+        <a:ext cx="2959127" cy="1837317"/>
       </dsp:txXfrm>
     </dsp:sp>
     <dsp:sp modelId="{AF12755E-B9C2-4948-983B-1C2322DD08F1}">
@@ -1585,8 +1390,8 @@
       </dsp:nvSpPr>
       <dsp:spPr>
         <a:xfrm>
-          <a:off x="8384760" y="998291"/>
-          <a:ext cx="2285879" cy="1451533"/>
+          <a:off x="7512882" y="706671"/>
+          <a:ext cx="3073451" cy="1951641"/>
         </a:xfrm>
         <a:prstGeom prst="roundRect">
           <a:avLst>
@@ -1637,8 +1442,8 @@
       </dsp:nvSpPr>
       <dsp:spPr>
         <a:xfrm>
-          <a:off x="8638747" y="1239579"/>
-          <a:ext cx="2285879" cy="1451533"/>
+          <a:off x="7854377" y="1031091"/>
+          <a:ext cx="3073451" cy="1951641"/>
         </a:xfrm>
         <a:prstGeom prst="roundRect">
           <a:avLst>
@@ -1681,12 +1486,12 @@
         <a:fontRef idx="minor"/>
       </dsp:style>
       <dsp:txBody>
-        <a:bodyPr spcFirstLastPara="0" vert="horz" wrap="square" lIns="72390" tIns="72390" rIns="72390" bIns="72390" numCol="1" spcCol="1270" anchor="ctr" anchorCtr="0">
+        <a:bodyPr spcFirstLastPara="0" vert="horz" wrap="square" lIns="95250" tIns="95250" rIns="95250" bIns="95250" numCol="1" spcCol="1270" anchor="ctr" anchorCtr="0">
           <a:noAutofit/>
         </a:bodyPr>
         <a:lstStyle/>
         <a:p>
-          <a:pPr marL="0" lvl="0" indent="0" algn="ctr" defTabSz="844550">
+          <a:pPr marL="0" lvl="0" indent="0" algn="ctr" defTabSz="1111250">
             <a:lnSpc>
               <a:spcPct val="90000"/>
             </a:lnSpc>
@@ -1699,15 +1504,15 @@
             <a:buNone/>
           </a:pPr>
           <a:r>
-            <a:rPr lang="de-CH" sz="1900" kern="1200"/>
+            <a:rPr lang="de-CH" sz="2500" kern="1200"/>
             <a:t>Herausforderungen</a:t>
           </a:r>
-          <a:endParaRPr lang="en-US" sz="1900" kern="1200"/>
+          <a:endParaRPr lang="en-US" sz="2500" kern="1200"/>
         </a:p>
       </dsp:txBody>
       <dsp:txXfrm>
-        <a:off x="8681261" y="1282093"/>
-        <a:ext cx="2200851" cy="1366505"/>
+        <a:off x="7911539" y="1088253"/>
+        <a:ext cx="2959127" cy="1837317"/>
       </dsp:txXfrm>
     </dsp:sp>
   </dsp:spTree>
@@ -3460,7 +3265,7 @@
           <a:p>
             <a:fld id="{90C06C34-4A22-4938-AADD-8EC846606CB8}" type="datetimeFigureOut">
               <a:rPr lang="de-CH" smtClean="0"/>
-              <a:t>29.06.2026</a:t>
+              <a:t>06.07.2026</a:t>
             </a:fld>
             <a:endParaRPr lang="de-CH"/>
           </a:p>
@@ -3660,7 +3465,7 @@
           <a:p>
             <a:fld id="{90C06C34-4A22-4938-AADD-8EC846606CB8}" type="datetimeFigureOut">
               <a:rPr lang="de-CH" smtClean="0"/>
-              <a:t>29.06.2026</a:t>
+              <a:t>06.07.2026</a:t>
             </a:fld>
             <a:endParaRPr lang="de-CH"/>
           </a:p>
@@ -3870,7 +3675,7 @@
           <a:p>
             <a:fld id="{90C06C34-4A22-4938-AADD-8EC846606CB8}" type="datetimeFigureOut">
               <a:rPr lang="de-CH" smtClean="0"/>
-              <a:t>29.06.2026</a:t>
+              <a:t>06.07.2026</a:t>
             </a:fld>
             <a:endParaRPr lang="de-CH"/>
           </a:p>
@@ -4070,7 +3875,7 @@
           <a:p>
             <a:fld id="{90C06C34-4A22-4938-AADD-8EC846606CB8}" type="datetimeFigureOut">
               <a:rPr lang="de-CH" smtClean="0"/>
-              <a:t>29.06.2026</a:t>
+              <a:t>06.07.2026</a:t>
             </a:fld>
             <a:endParaRPr lang="de-CH"/>
           </a:p>
@@ -4346,7 +4151,7 @@
           <a:p>
             <a:fld id="{90C06C34-4A22-4938-AADD-8EC846606CB8}" type="datetimeFigureOut">
               <a:rPr lang="de-CH" smtClean="0"/>
-              <a:t>29.06.2026</a:t>
+              <a:t>06.07.2026</a:t>
             </a:fld>
             <a:endParaRPr lang="de-CH"/>
           </a:p>
@@ -4614,7 +4419,7 @@
           <a:p>
             <a:fld id="{90C06C34-4A22-4938-AADD-8EC846606CB8}" type="datetimeFigureOut">
               <a:rPr lang="de-CH" smtClean="0"/>
-              <a:t>29.06.2026</a:t>
+              <a:t>06.07.2026</a:t>
             </a:fld>
             <a:endParaRPr lang="de-CH"/>
           </a:p>
@@ -5029,7 +4834,7 @@
           <a:p>
             <a:fld id="{90C06C34-4A22-4938-AADD-8EC846606CB8}" type="datetimeFigureOut">
               <a:rPr lang="de-CH" smtClean="0"/>
-              <a:t>29.06.2026</a:t>
+              <a:t>06.07.2026</a:t>
             </a:fld>
             <a:endParaRPr lang="de-CH"/>
           </a:p>
@@ -5171,7 +4976,7 @@
           <a:p>
             <a:fld id="{90C06C34-4A22-4938-AADD-8EC846606CB8}" type="datetimeFigureOut">
               <a:rPr lang="de-CH" smtClean="0"/>
-              <a:t>29.06.2026</a:t>
+              <a:t>06.07.2026</a:t>
             </a:fld>
             <a:endParaRPr lang="de-CH"/>
           </a:p>
@@ -5284,7 +5089,7 @@
           <a:p>
             <a:fld id="{90C06C34-4A22-4938-AADD-8EC846606CB8}" type="datetimeFigureOut">
               <a:rPr lang="de-CH" smtClean="0"/>
-              <a:t>29.06.2026</a:t>
+              <a:t>06.07.2026</a:t>
             </a:fld>
             <a:endParaRPr lang="de-CH"/>
           </a:p>
@@ -5597,7 +5402,7 @@
           <a:p>
             <a:fld id="{90C06C34-4A22-4938-AADD-8EC846606CB8}" type="datetimeFigureOut">
               <a:rPr lang="de-CH" smtClean="0"/>
-              <a:t>29.06.2026</a:t>
+              <a:t>06.07.2026</a:t>
             </a:fld>
             <a:endParaRPr lang="de-CH"/>
           </a:p>
@@ -5886,7 +5691,7 @@
           <a:p>
             <a:fld id="{90C06C34-4A22-4938-AADD-8EC846606CB8}" type="datetimeFigureOut">
               <a:rPr lang="de-CH" smtClean="0"/>
-              <a:t>29.06.2026</a:t>
+              <a:t>06.07.2026</a:t>
             </a:fld>
             <a:endParaRPr lang="de-CH"/>
           </a:p>
@@ -6129,7 +5934,7 @@
           <a:p>
             <a:fld id="{90C06C34-4A22-4938-AADD-8EC846606CB8}" type="datetimeFigureOut">
               <a:rPr lang="de-CH" smtClean="0"/>
-              <a:t>29.06.2026</a:t>
+              <a:t>06.07.2026</a:t>
             </a:fld>
             <a:endParaRPr lang="de-CH"/>
           </a:p>
@@ -7263,7 +7068,7 @@
             <p:ph idx="1"/>
             <p:extLst>
               <p:ext uri="{D42A27DB-BD31-4B8C-83A1-F6EECF244321}">
-                <p14:modId xmlns:p14="http://schemas.microsoft.com/office/powerpoint/2010/main" val="2887197179"/>
+                <p14:modId xmlns:p14="http://schemas.microsoft.com/office/powerpoint/2010/main" val="745525363"/>
               </p:ext>
             </p:extLst>
           </p:nvPr>
@@ -8278,7 +8083,7 @@
           <a:lstStyle/>
           <a:p>
             <a:r>
-              <a:rPr lang="de-CH" sz="2000"/>
+              <a:rPr lang="de-CH" sz="2000" dirty="0"/>
               <a:t>https://lorissuperstar.github.io/m293/index.html</a:t>
             </a:r>
           </a:p>
@@ -8858,8 +8663,14 @@
           <a:lstStyle/>
           <a:p>
             <a:r>
-              <a:rPr lang="de-CH" sz="2000"/>
-              <a:t>Pages (Mit Ai debugt)</a:t>
+              <a:rPr lang="de-CH" sz="2000" dirty="0"/>
+              <a:t>Pages</a:t>
+            </a:r>
+          </a:p>
+          <a:p>
+            <a:r>
+              <a:rPr lang="de-CH" sz="2000" dirty="0"/>
+              <a:t>Keine Tokens mehr</a:t>
             </a:r>
           </a:p>
         </p:txBody>
